--- a/01 Classes/Aula5 - Gestão da Informação - PLANEJAMENTO ESTRATÉGICO DE TI (PETI) E PLANO DIRETOR DE TI (PDTI).pptx
+++ b/01 Classes/Aula5 - Gestão da Informação - PLANEJAMENTO ESTRATÉGICO DE TI (PETI) E PLANO DIRETOR DE TI (PDTI).pptx
@@ -5,17 +5,25 @@
     <p:sldMasterId id="2147483648" r:id="rId1"/>
   </p:sldMasterIdLst>
   <p:notesMasterIdLst>
-    <p:notesMasterId r:id="rId10"/>
+    <p:notesMasterId r:id="rId18"/>
   </p:notesMasterIdLst>
   <p:sldIdLst>
     <p:sldId id="256" r:id="rId2"/>
     <p:sldId id="291" r:id="rId3"/>
     <p:sldId id="331" r:id="rId4"/>
-    <p:sldId id="333" r:id="rId5"/>
-    <p:sldId id="323" r:id="rId6"/>
-    <p:sldId id="360" r:id="rId7"/>
-    <p:sldId id="337" r:id="rId8"/>
-    <p:sldId id="309" r:id="rId9"/>
+    <p:sldId id="361" r:id="rId5"/>
+    <p:sldId id="362" r:id="rId6"/>
+    <p:sldId id="363" r:id="rId7"/>
+    <p:sldId id="364" r:id="rId8"/>
+    <p:sldId id="365" r:id="rId9"/>
+    <p:sldId id="366" r:id="rId10"/>
+    <p:sldId id="333" r:id="rId11"/>
+    <p:sldId id="323" r:id="rId12"/>
+    <p:sldId id="367" r:id="rId13"/>
+    <p:sldId id="360" r:id="rId14"/>
+    <p:sldId id="368" r:id="rId15"/>
+    <p:sldId id="337" r:id="rId16"/>
+    <p:sldId id="309" r:id="rId17"/>
   </p:sldIdLst>
   <p:sldSz cx="9144000" cy="5143500" type="screen16x9"/>
   <p:notesSz cx="6858000" cy="9144000"/>
@@ -562,7 +570,7 @@
 </p:notes>
 </file>
 
-<file path=ppt/notesSlides/notesSlide2.xml><?xml version="1.0" encoding="utf-8"?>
+<file path=ppt/notesSlides/notesSlide10.xml><?xml version="1.0" encoding="utf-8"?>
 <p:notes xmlns:a="http://schemas.openxmlformats.org/drawingml/2006/main" xmlns:r="http://schemas.openxmlformats.org/officeDocument/2006/relationships" xmlns:p="http://schemas.openxmlformats.org/presentationml/2006/main">
   <p:cSld>
     <p:spTree>
@@ -618,7 +626,7 @@
     </p:spTree>
     <p:extLst>
       <p:ext uri="{BB962C8B-B14F-4D97-AF65-F5344CB8AC3E}">
-        <p14:creationId xmlns:p14="http://schemas.microsoft.com/office/powerpoint/2010/main" val="3035753547"/>
+        <p14:creationId xmlns:p14="http://schemas.microsoft.com/office/powerpoint/2010/main" val="2709569597"/>
       </p:ext>
     </p:extLst>
   </p:cSld>
@@ -628,12 +636,18 @@
 </p:notes>
 </file>
 
-<file path=ppt/notesSlides/notesSlide3.xml><?xml version="1.0" encoding="utf-8"?>
+<file path=ppt/notesSlides/notesSlide11.xml><?xml version="1.0" encoding="utf-8"?>
 <p:notes xmlns:a="http://schemas.openxmlformats.org/drawingml/2006/main" xmlns:r="http://schemas.openxmlformats.org/officeDocument/2006/relationships" xmlns:p="http://schemas.openxmlformats.org/presentationml/2006/main">
   <p:cSld>
     <p:spTree>
       <p:nvGrpSpPr>
-        <p:cNvPr id="1" name=""/>
+        <p:cNvPr id="1" name="">
+          <a:extLst>
+            <a:ext uri="{FF2B5EF4-FFF2-40B4-BE49-F238E27FC236}">
+              <a16:creationId xmlns:a16="http://schemas.microsoft.com/office/drawing/2014/main" id="{EBBE5AE9-8C24-6EF0-D024-555514478C45}"/>
+            </a:ext>
+          </a:extLst>
+        </p:cNvPr>
         <p:cNvGrpSpPr/>
         <p:nvPr/>
       </p:nvGrpSpPr>
@@ -647,7 +661,13 @@
       </p:grpSpPr>
       <p:sp>
         <p:nvSpPr>
-          <p:cNvPr id="2" name="Espaço Reservado para Imagem de Slide 1"/>
+          <p:cNvPr id="2" name="Espaço Reservado para Imagem de Slide 1">
+            <a:extLst>
+              <a:ext uri="{FF2B5EF4-FFF2-40B4-BE49-F238E27FC236}">
+                <a16:creationId xmlns:a16="http://schemas.microsoft.com/office/drawing/2014/main" id="{45BFFBCB-0F2E-E312-4525-B4AD5CCA4297}"/>
+              </a:ext>
+            </a:extLst>
+          </p:cNvPr>
           <p:cNvSpPr>
             <a:spLocks noGrp="1" noRot="1" noChangeAspect="1"/>
           </p:cNvSpPr>
@@ -664,7 +684,13 @@
       </p:sp>
       <p:sp>
         <p:nvSpPr>
-          <p:cNvPr id="3" name="Espaço Reservado para Anotações 2"/>
+          <p:cNvPr id="3" name="Espaço Reservado para Anotações 2">
+            <a:extLst>
+              <a:ext uri="{FF2B5EF4-FFF2-40B4-BE49-F238E27FC236}">
+                <a16:creationId xmlns:a16="http://schemas.microsoft.com/office/drawing/2014/main" id="{492C515F-738E-EE61-76D7-7B7FE8E42A6F}"/>
+              </a:ext>
+            </a:extLst>
+          </p:cNvPr>
           <p:cNvSpPr>
             <a:spLocks noGrp="1"/>
           </p:cNvSpPr>
@@ -684,7 +710,7 @@
     </p:spTree>
     <p:extLst>
       <p:ext uri="{BB962C8B-B14F-4D97-AF65-F5344CB8AC3E}">
-        <p14:creationId xmlns:p14="http://schemas.microsoft.com/office/powerpoint/2010/main" val="585304384"/>
+        <p14:creationId xmlns:p14="http://schemas.microsoft.com/office/powerpoint/2010/main" val="2677219069"/>
       </p:ext>
     </p:extLst>
   </p:cSld>
@@ -694,73 +720,7 @@
 </p:notes>
 </file>
 
-<file path=ppt/notesSlides/notesSlide4.xml><?xml version="1.0" encoding="utf-8"?>
-<p:notes xmlns:a="http://schemas.openxmlformats.org/drawingml/2006/main" xmlns:r="http://schemas.openxmlformats.org/officeDocument/2006/relationships" xmlns:p="http://schemas.openxmlformats.org/presentationml/2006/main">
-  <p:cSld>
-    <p:spTree>
-      <p:nvGrpSpPr>
-        <p:cNvPr id="1" name=""/>
-        <p:cNvGrpSpPr/>
-        <p:nvPr/>
-      </p:nvGrpSpPr>
-      <p:grpSpPr>
-        <a:xfrm>
-          <a:off x="0" y="0"/>
-          <a:ext cx="0" cy="0"/>
-          <a:chOff x="0" y="0"/>
-          <a:chExt cx="0" cy="0"/>
-        </a:xfrm>
-      </p:grpSpPr>
-      <p:sp>
-        <p:nvSpPr>
-          <p:cNvPr id="2" name="Espaço Reservado para Imagem de Slide 1"/>
-          <p:cNvSpPr>
-            <a:spLocks noGrp="1" noRot="1" noChangeAspect="1"/>
-          </p:cNvSpPr>
-          <p:nvPr>
-            <p:ph type="sldImg"/>
-          </p:nvPr>
-        </p:nvSpPr>
-        <p:spPr>
-          <a:xfrm>
-            <a:off x="381000" y="685800"/>
-            <a:ext cx="6096000" cy="3429000"/>
-          </a:xfrm>
-        </p:spPr>
-      </p:sp>
-      <p:sp>
-        <p:nvSpPr>
-          <p:cNvPr id="3" name="Espaço Reservado para Anotações 2"/>
-          <p:cNvSpPr>
-            <a:spLocks noGrp="1"/>
-          </p:cNvSpPr>
-          <p:nvPr>
-            <p:ph type="body" idx="1"/>
-          </p:nvPr>
-        </p:nvSpPr>
-        <p:spPr/>
-        <p:txBody>
-          <a:bodyPr/>
-          <a:lstStyle/>
-          <a:p>
-            <a:endParaRPr lang="pt-BR" dirty="0"/>
-          </a:p>
-        </p:txBody>
-      </p:sp>
-    </p:spTree>
-    <p:extLst>
-      <p:ext uri="{BB962C8B-B14F-4D97-AF65-F5344CB8AC3E}">
-        <p14:creationId xmlns:p14="http://schemas.microsoft.com/office/powerpoint/2010/main" val="2709569597"/>
-      </p:ext>
-    </p:extLst>
-  </p:cSld>
-  <p:clrMapOvr>
-    <a:masterClrMapping/>
-  </p:clrMapOvr>
-</p:notes>
-</file>
-
-<file path=ppt/notesSlides/notesSlide5.xml><?xml version="1.0" encoding="utf-8"?>
+<file path=ppt/notesSlides/notesSlide12.xml><?xml version="1.0" encoding="utf-8"?>
 <p:notes xmlns:a="http://schemas.openxmlformats.org/drawingml/2006/main" xmlns:r="http://schemas.openxmlformats.org/officeDocument/2006/relationships" xmlns:p="http://schemas.openxmlformats.org/presentationml/2006/main">
   <p:cSld>
     <p:spTree>
@@ -844,7 +804,91 @@
 </p:notes>
 </file>
 
-<file path=ppt/notesSlides/notesSlide6.xml><?xml version="1.0" encoding="utf-8"?>
+<file path=ppt/notesSlides/notesSlide13.xml><?xml version="1.0" encoding="utf-8"?>
+<p:notes xmlns:a="http://schemas.openxmlformats.org/drawingml/2006/main" xmlns:r="http://schemas.openxmlformats.org/officeDocument/2006/relationships" xmlns:p="http://schemas.openxmlformats.org/presentationml/2006/main">
+  <p:cSld>
+    <p:spTree>
+      <p:nvGrpSpPr>
+        <p:cNvPr id="1" name="">
+          <a:extLst>
+            <a:ext uri="{FF2B5EF4-FFF2-40B4-BE49-F238E27FC236}">
+              <a16:creationId xmlns:a16="http://schemas.microsoft.com/office/drawing/2014/main" id="{5F0B59BF-1418-F77E-BDBD-E14983B38959}"/>
+            </a:ext>
+          </a:extLst>
+        </p:cNvPr>
+        <p:cNvGrpSpPr/>
+        <p:nvPr/>
+      </p:nvGrpSpPr>
+      <p:grpSpPr>
+        <a:xfrm>
+          <a:off x="0" y="0"/>
+          <a:ext cx="0" cy="0"/>
+          <a:chOff x="0" y="0"/>
+          <a:chExt cx="0" cy="0"/>
+        </a:xfrm>
+      </p:grpSpPr>
+      <p:sp>
+        <p:nvSpPr>
+          <p:cNvPr id="2" name="Espaço Reservado para Imagem de Slide 1">
+            <a:extLst>
+              <a:ext uri="{FF2B5EF4-FFF2-40B4-BE49-F238E27FC236}">
+                <a16:creationId xmlns:a16="http://schemas.microsoft.com/office/drawing/2014/main" id="{ACB831D5-23A3-86B4-3B13-C400B060A178}"/>
+              </a:ext>
+            </a:extLst>
+          </p:cNvPr>
+          <p:cNvSpPr>
+            <a:spLocks noGrp="1" noRot="1" noChangeAspect="1"/>
+          </p:cNvSpPr>
+          <p:nvPr>
+            <p:ph type="sldImg"/>
+          </p:nvPr>
+        </p:nvSpPr>
+        <p:spPr>
+          <a:xfrm>
+            <a:off x="381000" y="685800"/>
+            <a:ext cx="6096000" cy="3429000"/>
+          </a:xfrm>
+        </p:spPr>
+      </p:sp>
+      <p:sp>
+        <p:nvSpPr>
+          <p:cNvPr id="3" name="Espaço Reservado para Anotações 2">
+            <a:extLst>
+              <a:ext uri="{FF2B5EF4-FFF2-40B4-BE49-F238E27FC236}">
+                <a16:creationId xmlns:a16="http://schemas.microsoft.com/office/drawing/2014/main" id="{24C113B7-D398-A4FB-9AC2-76E8C8F357CE}"/>
+              </a:ext>
+            </a:extLst>
+          </p:cNvPr>
+          <p:cNvSpPr>
+            <a:spLocks noGrp="1"/>
+          </p:cNvSpPr>
+          <p:nvPr>
+            <p:ph type="body" idx="1"/>
+          </p:nvPr>
+        </p:nvSpPr>
+        <p:spPr/>
+        <p:txBody>
+          <a:bodyPr/>
+          <a:lstStyle/>
+          <a:p>
+            <a:endParaRPr lang="pt-BR" dirty="0"/>
+          </a:p>
+        </p:txBody>
+      </p:sp>
+    </p:spTree>
+    <p:extLst>
+      <p:ext uri="{BB962C8B-B14F-4D97-AF65-F5344CB8AC3E}">
+        <p14:creationId xmlns:p14="http://schemas.microsoft.com/office/powerpoint/2010/main" val="3699277635"/>
+      </p:ext>
+    </p:extLst>
+  </p:cSld>
+  <p:clrMapOvr>
+    <a:masterClrMapping/>
+  </p:clrMapOvr>
+</p:notes>
+</file>
+
+<file path=ppt/notesSlides/notesSlide14.xml><?xml version="1.0" encoding="utf-8"?>
 <p:notes xmlns:a="http://schemas.openxmlformats.org/drawingml/2006/main" xmlns:r="http://schemas.openxmlformats.org/officeDocument/2006/relationships" xmlns:p="http://schemas.openxmlformats.org/presentationml/2006/main">
   <p:cSld>
     <p:spTree>
@@ -901,6 +945,642 @@
     <p:extLst>
       <p:ext uri="{BB962C8B-B14F-4D97-AF65-F5344CB8AC3E}">
         <p14:creationId xmlns:p14="http://schemas.microsoft.com/office/powerpoint/2010/main" val="4290351292"/>
+      </p:ext>
+    </p:extLst>
+  </p:cSld>
+  <p:clrMapOvr>
+    <a:masterClrMapping/>
+  </p:clrMapOvr>
+</p:notes>
+</file>
+
+<file path=ppt/notesSlides/notesSlide2.xml><?xml version="1.0" encoding="utf-8"?>
+<p:notes xmlns:a="http://schemas.openxmlformats.org/drawingml/2006/main" xmlns:r="http://schemas.openxmlformats.org/officeDocument/2006/relationships" xmlns:p="http://schemas.openxmlformats.org/presentationml/2006/main">
+  <p:cSld>
+    <p:spTree>
+      <p:nvGrpSpPr>
+        <p:cNvPr id="1" name=""/>
+        <p:cNvGrpSpPr/>
+        <p:nvPr/>
+      </p:nvGrpSpPr>
+      <p:grpSpPr>
+        <a:xfrm>
+          <a:off x="0" y="0"/>
+          <a:ext cx="0" cy="0"/>
+          <a:chOff x="0" y="0"/>
+          <a:chExt cx="0" cy="0"/>
+        </a:xfrm>
+      </p:grpSpPr>
+      <p:sp>
+        <p:nvSpPr>
+          <p:cNvPr id="2" name="Espaço Reservado para Imagem de Slide 1"/>
+          <p:cNvSpPr>
+            <a:spLocks noGrp="1" noRot="1" noChangeAspect="1"/>
+          </p:cNvSpPr>
+          <p:nvPr>
+            <p:ph type="sldImg"/>
+          </p:nvPr>
+        </p:nvSpPr>
+        <p:spPr>
+          <a:xfrm>
+            <a:off x="381000" y="685800"/>
+            <a:ext cx="6096000" cy="3429000"/>
+          </a:xfrm>
+        </p:spPr>
+      </p:sp>
+      <p:sp>
+        <p:nvSpPr>
+          <p:cNvPr id="3" name="Espaço Reservado para Anotações 2"/>
+          <p:cNvSpPr>
+            <a:spLocks noGrp="1"/>
+          </p:cNvSpPr>
+          <p:nvPr>
+            <p:ph type="body" idx="1"/>
+          </p:nvPr>
+        </p:nvSpPr>
+        <p:spPr/>
+        <p:txBody>
+          <a:bodyPr/>
+          <a:lstStyle/>
+          <a:p>
+            <a:endParaRPr lang="pt-BR" dirty="0"/>
+          </a:p>
+        </p:txBody>
+      </p:sp>
+    </p:spTree>
+    <p:extLst>
+      <p:ext uri="{BB962C8B-B14F-4D97-AF65-F5344CB8AC3E}">
+        <p14:creationId xmlns:p14="http://schemas.microsoft.com/office/powerpoint/2010/main" val="3035753547"/>
+      </p:ext>
+    </p:extLst>
+  </p:cSld>
+  <p:clrMapOvr>
+    <a:masterClrMapping/>
+  </p:clrMapOvr>
+</p:notes>
+</file>
+
+<file path=ppt/notesSlides/notesSlide3.xml><?xml version="1.0" encoding="utf-8"?>
+<p:notes xmlns:a="http://schemas.openxmlformats.org/drawingml/2006/main" xmlns:r="http://schemas.openxmlformats.org/officeDocument/2006/relationships" xmlns:p="http://schemas.openxmlformats.org/presentationml/2006/main">
+  <p:cSld>
+    <p:spTree>
+      <p:nvGrpSpPr>
+        <p:cNvPr id="1" name="">
+          <a:extLst>
+            <a:ext uri="{FF2B5EF4-FFF2-40B4-BE49-F238E27FC236}">
+              <a16:creationId xmlns:a16="http://schemas.microsoft.com/office/drawing/2014/main" id="{FC87DDE2-C427-18C5-9C25-7601AACC23CD}"/>
+            </a:ext>
+          </a:extLst>
+        </p:cNvPr>
+        <p:cNvGrpSpPr/>
+        <p:nvPr/>
+      </p:nvGrpSpPr>
+      <p:grpSpPr>
+        <a:xfrm>
+          <a:off x="0" y="0"/>
+          <a:ext cx="0" cy="0"/>
+          <a:chOff x="0" y="0"/>
+          <a:chExt cx="0" cy="0"/>
+        </a:xfrm>
+      </p:grpSpPr>
+      <p:sp>
+        <p:nvSpPr>
+          <p:cNvPr id="2" name="Espaço Reservado para Imagem de Slide 1">
+            <a:extLst>
+              <a:ext uri="{FF2B5EF4-FFF2-40B4-BE49-F238E27FC236}">
+                <a16:creationId xmlns:a16="http://schemas.microsoft.com/office/drawing/2014/main" id="{83A602F4-213D-826B-719D-86896D40E973}"/>
+              </a:ext>
+            </a:extLst>
+          </p:cNvPr>
+          <p:cNvSpPr>
+            <a:spLocks noGrp="1" noRot="1" noChangeAspect="1"/>
+          </p:cNvSpPr>
+          <p:nvPr>
+            <p:ph type="sldImg"/>
+          </p:nvPr>
+        </p:nvSpPr>
+        <p:spPr>
+          <a:xfrm>
+            <a:off x="381000" y="685800"/>
+            <a:ext cx="6096000" cy="3429000"/>
+          </a:xfrm>
+        </p:spPr>
+      </p:sp>
+      <p:sp>
+        <p:nvSpPr>
+          <p:cNvPr id="3" name="Espaço Reservado para Anotações 2">
+            <a:extLst>
+              <a:ext uri="{FF2B5EF4-FFF2-40B4-BE49-F238E27FC236}">
+                <a16:creationId xmlns:a16="http://schemas.microsoft.com/office/drawing/2014/main" id="{D1761F60-89B9-BD15-8F28-186979992800}"/>
+              </a:ext>
+            </a:extLst>
+          </p:cNvPr>
+          <p:cNvSpPr>
+            <a:spLocks noGrp="1"/>
+          </p:cNvSpPr>
+          <p:nvPr>
+            <p:ph type="body" idx="1"/>
+          </p:nvPr>
+        </p:nvSpPr>
+        <p:spPr/>
+        <p:txBody>
+          <a:bodyPr/>
+          <a:lstStyle/>
+          <a:p>
+            <a:endParaRPr lang="pt-BR" dirty="0"/>
+          </a:p>
+        </p:txBody>
+      </p:sp>
+    </p:spTree>
+    <p:extLst>
+      <p:ext uri="{BB962C8B-B14F-4D97-AF65-F5344CB8AC3E}">
+        <p14:creationId xmlns:p14="http://schemas.microsoft.com/office/powerpoint/2010/main" val="187984464"/>
+      </p:ext>
+    </p:extLst>
+  </p:cSld>
+  <p:clrMapOvr>
+    <a:masterClrMapping/>
+  </p:clrMapOvr>
+</p:notes>
+</file>
+
+<file path=ppt/notesSlides/notesSlide4.xml><?xml version="1.0" encoding="utf-8"?>
+<p:notes xmlns:a="http://schemas.openxmlformats.org/drawingml/2006/main" xmlns:r="http://schemas.openxmlformats.org/officeDocument/2006/relationships" xmlns:p="http://schemas.openxmlformats.org/presentationml/2006/main">
+  <p:cSld>
+    <p:spTree>
+      <p:nvGrpSpPr>
+        <p:cNvPr id="1" name="">
+          <a:extLst>
+            <a:ext uri="{FF2B5EF4-FFF2-40B4-BE49-F238E27FC236}">
+              <a16:creationId xmlns:a16="http://schemas.microsoft.com/office/drawing/2014/main" id="{CD398896-C8B6-0702-A965-141BB1D21CC9}"/>
+            </a:ext>
+          </a:extLst>
+        </p:cNvPr>
+        <p:cNvGrpSpPr/>
+        <p:nvPr/>
+      </p:nvGrpSpPr>
+      <p:grpSpPr>
+        <a:xfrm>
+          <a:off x="0" y="0"/>
+          <a:ext cx="0" cy="0"/>
+          <a:chOff x="0" y="0"/>
+          <a:chExt cx="0" cy="0"/>
+        </a:xfrm>
+      </p:grpSpPr>
+      <p:sp>
+        <p:nvSpPr>
+          <p:cNvPr id="2" name="Espaço Reservado para Imagem de Slide 1">
+            <a:extLst>
+              <a:ext uri="{FF2B5EF4-FFF2-40B4-BE49-F238E27FC236}">
+                <a16:creationId xmlns:a16="http://schemas.microsoft.com/office/drawing/2014/main" id="{013B9D16-4CB7-DB52-44C0-FA7849497F6E}"/>
+              </a:ext>
+            </a:extLst>
+          </p:cNvPr>
+          <p:cNvSpPr>
+            <a:spLocks noGrp="1" noRot="1" noChangeAspect="1"/>
+          </p:cNvSpPr>
+          <p:nvPr>
+            <p:ph type="sldImg"/>
+          </p:nvPr>
+        </p:nvSpPr>
+        <p:spPr>
+          <a:xfrm>
+            <a:off x="381000" y="685800"/>
+            <a:ext cx="6096000" cy="3429000"/>
+          </a:xfrm>
+        </p:spPr>
+      </p:sp>
+      <p:sp>
+        <p:nvSpPr>
+          <p:cNvPr id="3" name="Espaço Reservado para Anotações 2">
+            <a:extLst>
+              <a:ext uri="{FF2B5EF4-FFF2-40B4-BE49-F238E27FC236}">
+                <a16:creationId xmlns:a16="http://schemas.microsoft.com/office/drawing/2014/main" id="{FB852ACD-15E6-C1C8-C68F-92C093282593}"/>
+              </a:ext>
+            </a:extLst>
+          </p:cNvPr>
+          <p:cNvSpPr>
+            <a:spLocks noGrp="1"/>
+          </p:cNvSpPr>
+          <p:nvPr>
+            <p:ph type="body" idx="1"/>
+          </p:nvPr>
+        </p:nvSpPr>
+        <p:spPr/>
+        <p:txBody>
+          <a:bodyPr/>
+          <a:lstStyle/>
+          <a:p>
+            <a:endParaRPr lang="pt-BR" dirty="0"/>
+          </a:p>
+        </p:txBody>
+      </p:sp>
+    </p:spTree>
+    <p:extLst>
+      <p:ext uri="{BB962C8B-B14F-4D97-AF65-F5344CB8AC3E}">
+        <p14:creationId xmlns:p14="http://schemas.microsoft.com/office/powerpoint/2010/main" val="3561598941"/>
+      </p:ext>
+    </p:extLst>
+  </p:cSld>
+  <p:clrMapOvr>
+    <a:masterClrMapping/>
+  </p:clrMapOvr>
+</p:notes>
+</file>
+
+<file path=ppt/notesSlides/notesSlide5.xml><?xml version="1.0" encoding="utf-8"?>
+<p:notes xmlns:a="http://schemas.openxmlformats.org/drawingml/2006/main" xmlns:r="http://schemas.openxmlformats.org/officeDocument/2006/relationships" xmlns:p="http://schemas.openxmlformats.org/presentationml/2006/main">
+  <p:cSld>
+    <p:spTree>
+      <p:nvGrpSpPr>
+        <p:cNvPr id="1" name="">
+          <a:extLst>
+            <a:ext uri="{FF2B5EF4-FFF2-40B4-BE49-F238E27FC236}">
+              <a16:creationId xmlns:a16="http://schemas.microsoft.com/office/drawing/2014/main" id="{9D272F6F-8F22-1D42-EA8E-DC0B7ADA0DD6}"/>
+            </a:ext>
+          </a:extLst>
+        </p:cNvPr>
+        <p:cNvGrpSpPr/>
+        <p:nvPr/>
+      </p:nvGrpSpPr>
+      <p:grpSpPr>
+        <a:xfrm>
+          <a:off x="0" y="0"/>
+          <a:ext cx="0" cy="0"/>
+          <a:chOff x="0" y="0"/>
+          <a:chExt cx="0" cy="0"/>
+        </a:xfrm>
+      </p:grpSpPr>
+      <p:sp>
+        <p:nvSpPr>
+          <p:cNvPr id="2" name="Espaço Reservado para Imagem de Slide 1">
+            <a:extLst>
+              <a:ext uri="{FF2B5EF4-FFF2-40B4-BE49-F238E27FC236}">
+                <a16:creationId xmlns:a16="http://schemas.microsoft.com/office/drawing/2014/main" id="{ABE4D10A-8195-3317-7014-98825659B597}"/>
+              </a:ext>
+            </a:extLst>
+          </p:cNvPr>
+          <p:cNvSpPr>
+            <a:spLocks noGrp="1" noRot="1" noChangeAspect="1"/>
+          </p:cNvSpPr>
+          <p:nvPr>
+            <p:ph type="sldImg"/>
+          </p:nvPr>
+        </p:nvSpPr>
+        <p:spPr>
+          <a:xfrm>
+            <a:off x="381000" y="685800"/>
+            <a:ext cx="6096000" cy="3429000"/>
+          </a:xfrm>
+        </p:spPr>
+      </p:sp>
+      <p:sp>
+        <p:nvSpPr>
+          <p:cNvPr id="3" name="Espaço Reservado para Anotações 2">
+            <a:extLst>
+              <a:ext uri="{FF2B5EF4-FFF2-40B4-BE49-F238E27FC236}">
+                <a16:creationId xmlns:a16="http://schemas.microsoft.com/office/drawing/2014/main" id="{3D885453-CD53-2DC7-64F9-06227F880884}"/>
+              </a:ext>
+            </a:extLst>
+          </p:cNvPr>
+          <p:cNvSpPr>
+            <a:spLocks noGrp="1"/>
+          </p:cNvSpPr>
+          <p:nvPr>
+            <p:ph type="body" idx="1"/>
+          </p:nvPr>
+        </p:nvSpPr>
+        <p:spPr/>
+        <p:txBody>
+          <a:bodyPr/>
+          <a:lstStyle/>
+          <a:p>
+            <a:endParaRPr lang="pt-BR" dirty="0"/>
+          </a:p>
+        </p:txBody>
+      </p:sp>
+    </p:spTree>
+    <p:extLst>
+      <p:ext uri="{BB962C8B-B14F-4D97-AF65-F5344CB8AC3E}">
+        <p14:creationId xmlns:p14="http://schemas.microsoft.com/office/powerpoint/2010/main" val="2614849840"/>
+      </p:ext>
+    </p:extLst>
+  </p:cSld>
+  <p:clrMapOvr>
+    <a:masterClrMapping/>
+  </p:clrMapOvr>
+</p:notes>
+</file>
+
+<file path=ppt/notesSlides/notesSlide6.xml><?xml version="1.0" encoding="utf-8"?>
+<p:notes xmlns:a="http://schemas.openxmlformats.org/drawingml/2006/main" xmlns:r="http://schemas.openxmlformats.org/officeDocument/2006/relationships" xmlns:p="http://schemas.openxmlformats.org/presentationml/2006/main">
+  <p:cSld>
+    <p:spTree>
+      <p:nvGrpSpPr>
+        <p:cNvPr id="1" name="">
+          <a:extLst>
+            <a:ext uri="{FF2B5EF4-FFF2-40B4-BE49-F238E27FC236}">
+              <a16:creationId xmlns:a16="http://schemas.microsoft.com/office/drawing/2014/main" id="{A2B0D4D5-F7DA-0EC9-6223-3383F8F82765}"/>
+            </a:ext>
+          </a:extLst>
+        </p:cNvPr>
+        <p:cNvGrpSpPr/>
+        <p:nvPr/>
+      </p:nvGrpSpPr>
+      <p:grpSpPr>
+        <a:xfrm>
+          <a:off x="0" y="0"/>
+          <a:ext cx="0" cy="0"/>
+          <a:chOff x="0" y="0"/>
+          <a:chExt cx="0" cy="0"/>
+        </a:xfrm>
+      </p:grpSpPr>
+      <p:sp>
+        <p:nvSpPr>
+          <p:cNvPr id="2" name="Espaço Reservado para Imagem de Slide 1">
+            <a:extLst>
+              <a:ext uri="{FF2B5EF4-FFF2-40B4-BE49-F238E27FC236}">
+                <a16:creationId xmlns:a16="http://schemas.microsoft.com/office/drawing/2014/main" id="{79AFFBF7-B9D6-0DDD-4603-9F117201E5BE}"/>
+              </a:ext>
+            </a:extLst>
+          </p:cNvPr>
+          <p:cNvSpPr>
+            <a:spLocks noGrp="1" noRot="1" noChangeAspect="1"/>
+          </p:cNvSpPr>
+          <p:nvPr>
+            <p:ph type="sldImg"/>
+          </p:nvPr>
+        </p:nvSpPr>
+        <p:spPr>
+          <a:xfrm>
+            <a:off x="381000" y="685800"/>
+            <a:ext cx="6096000" cy="3429000"/>
+          </a:xfrm>
+        </p:spPr>
+      </p:sp>
+      <p:sp>
+        <p:nvSpPr>
+          <p:cNvPr id="3" name="Espaço Reservado para Anotações 2">
+            <a:extLst>
+              <a:ext uri="{FF2B5EF4-FFF2-40B4-BE49-F238E27FC236}">
+                <a16:creationId xmlns:a16="http://schemas.microsoft.com/office/drawing/2014/main" id="{74E22A23-1C4B-D3EF-394B-9BE6151B5ECE}"/>
+              </a:ext>
+            </a:extLst>
+          </p:cNvPr>
+          <p:cNvSpPr>
+            <a:spLocks noGrp="1"/>
+          </p:cNvSpPr>
+          <p:nvPr>
+            <p:ph type="body" idx="1"/>
+          </p:nvPr>
+        </p:nvSpPr>
+        <p:spPr/>
+        <p:txBody>
+          <a:bodyPr/>
+          <a:lstStyle/>
+          <a:p>
+            <a:endParaRPr lang="pt-BR" dirty="0"/>
+          </a:p>
+        </p:txBody>
+      </p:sp>
+    </p:spTree>
+    <p:extLst>
+      <p:ext uri="{BB962C8B-B14F-4D97-AF65-F5344CB8AC3E}">
+        <p14:creationId xmlns:p14="http://schemas.microsoft.com/office/powerpoint/2010/main" val="2849004039"/>
+      </p:ext>
+    </p:extLst>
+  </p:cSld>
+  <p:clrMapOvr>
+    <a:masterClrMapping/>
+  </p:clrMapOvr>
+</p:notes>
+</file>
+
+<file path=ppt/notesSlides/notesSlide7.xml><?xml version="1.0" encoding="utf-8"?>
+<p:notes xmlns:a="http://schemas.openxmlformats.org/drawingml/2006/main" xmlns:r="http://schemas.openxmlformats.org/officeDocument/2006/relationships" xmlns:p="http://schemas.openxmlformats.org/presentationml/2006/main">
+  <p:cSld>
+    <p:spTree>
+      <p:nvGrpSpPr>
+        <p:cNvPr id="1" name="">
+          <a:extLst>
+            <a:ext uri="{FF2B5EF4-FFF2-40B4-BE49-F238E27FC236}">
+              <a16:creationId xmlns:a16="http://schemas.microsoft.com/office/drawing/2014/main" id="{394E8D16-2319-D101-3E61-885391FE4B4E}"/>
+            </a:ext>
+          </a:extLst>
+        </p:cNvPr>
+        <p:cNvGrpSpPr/>
+        <p:nvPr/>
+      </p:nvGrpSpPr>
+      <p:grpSpPr>
+        <a:xfrm>
+          <a:off x="0" y="0"/>
+          <a:ext cx="0" cy="0"/>
+          <a:chOff x="0" y="0"/>
+          <a:chExt cx="0" cy="0"/>
+        </a:xfrm>
+      </p:grpSpPr>
+      <p:sp>
+        <p:nvSpPr>
+          <p:cNvPr id="2" name="Espaço Reservado para Imagem de Slide 1">
+            <a:extLst>
+              <a:ext uri="{FF2B5EF4-FFF2-40B4-BE49-F238E27FC236}">
+                <a16:creationId xmlns:a16="http://schemas.microsoft.com/office/drawing/2014/main" id="{121AA65E-7DFF-A9F3-3480-B8D6BA99E5B0}"/>
+              </a:ext>
+            </a:extLst>
+          </p:cNvPr>
+          <p:cNvSpPr>
+            <a:spLocks noGrp="1" noRot="1" noChangeAspect="1"/>
+          </p:cNvSpPr>
+          <p:nvPr>
+            <p:ph type="sldImg"/>
+          </p:nvPr>
+        </p:nvSpPr>
+        <p:spPr>
+          <a:xfrm>
+            <a:off x="381000" y="685800"/>
+            <a:ext cx="6096000" cy="3429000"/>
+          </a:xfrm>
+        </p:spPr>
+      </p:sp>
+      <p:sp>
+        <p:nvSpPr>
+          <p:cNvPr id="3" name="Espaço Reservado para Anotações 2">
+            <a:extLst>
+              <a:ext uri="{FF2B5EF4-FFF2-40B4-BE49-F238E27FC236}">
+                <a16:creationId xmlns:a16="http://schemas.microsoft.com/office/drawing/2014/main" id="{86DF6C48-03DB-A0DF-0721-7C1E12781DC7}"/>
+              </a:ext>
+            </a:extLst>
+          </p:cNvPr>
+          <p:cNvSpPr>
+            <a:spLocks noGrp="1"/>
+          </p:cNvSpPr>
+          <p:nvPr>
+            <p:ph type="body" idx="1"/>
+          </p:nvPr>
+        </p:nvSpPr>
+        <p:spPr/>
+        <p:txBody>
+          <a:bodyPr/>
+          <a:lstStyle/>
+          <a:p>
+            <a:endParaRPr lang="pt-BR" dirty="0"/>
+          </a:p>
+        </p:txBody>
+      </p:sp>
+    </p:spTree>
+    <p:extLst>
+      <p:ext uri="{BB962C8B-B14F-4D97-AF65-F5344CB8AC3E}">
+        <p14:creationId xmlns:p14="http://schemas.microsoft.com/office/powerpoint/2010/main" val="3521013865"/>
+      </p:ext>
+    </p:extLst>
+  </p:cSld>
+  <p:clrMapOvr>
+    <a:masterClrMapping/>
+  </p:clrMapOvr>
+</p:notes>
+</file>
+
+<file path=ppt/notesSlides/notesSlide8.xml><?xml version="1.0" encoding="utf-8"?>
+<p:notes xmlns:a="http://schemas.openxmlformats.org/drawingml/2006/main" xmlns:r="http://schemas.openxmlformats.org/officeDocument/2006/relationships" xmlns:p="http://schemas.openxmlformats.org/presentationml/2006/main">
+  <p:cSld>
+    <p:spTree>
+      <p:nvGrpSpPr>
+        <p:cNvPr id="1" name="">
+          <a:extLst>
+            <a:ext uri="{FF2B5EF4-FFF2-40B4-BE49-F238E27FC236}">
+              <a16:creationId xmlns:a16="http://schemas.microsoft.com/office/drawing/2014/main" id="{17D285E4-7F67-AEC1-121C-7C475B2A08CC}"/>
+            </a:ext>
+          </a:extLst>
+        </p:cNvPr>
+        <p:cNvGrpSpPr/>
+        <p:nvPr/>
+      </p:nvGrpSpPr>
+      <p:grpSpPr>
+        <a:xfrm>
+          <a:off x="0" y="0"/>
+          <a:ext cx="0" cy="0"/>
+          <a:chOff x="0" y="0"/>
+          <a:chExt cx="0" cy="0"/>
+        </a:xfrm>
+      </p:grpSpPr>
+      <p:sp>
+        <p:nvSpPr>
+          <p:cNvPr id="2" name="Espaço Reservado para Imagem de Slide 1">
+            <a:extLst>
+              <a:ext uri="{FF2B5EF4-FFF2-40B4-BE49-F238E27FC236}">
+                <a16:creationId xmlns:a16="http://schemas.microsoft.com/office/drawing/2014/main" id="{FE4A37FF-0862-014D-5A95-710D7078AA71}"/>
+              </a:ext>
+            </a:extLst>
+          </p:cNvPr>
+          <p:cNvSpPr>
+            <a:spLocks noGrp="1" noRot="1" noChangeAspect="1"/>
+          </p:cNvSpPr>
+          <p:nvPr>
+            <p:ph type="sldImg"/>
+          </p:nvPr>
+        </p:nvSpPr>
+        <p:spPr>
+          <a:xfrm>
+            <a:off x="381000" y="685800"/>
+            <a:ext cx="6096000" cy="3429000"/>
+          </a:xfrm>
+        </p:spPr>
+      </p:sp>
+      <p:sp>
+        <p:nvSpPr>
+          <p:cNvPr id="3" name="Espaço Reservado para Anotações 2">
+            <a:extLst>
+              <a:ext uri="{FF2B5EF4-FFF2-40B4-BE49-F238E27FC236}">
+                <a16:creationId xmlns:a16="http://schemas.microsoft.com/office/drawing/2014/main" id="{FC71171C-5E2A-8DBB-251B-58146385DC91}"/>
+              </a:ext>
+            </a:extLst>
+          </p:cNvPr>
+          <p:cNvSpPr>
+            <a:spLocks noGrp="1"/>
+          </p:cNvSpPr>
+          <p:nvPr>
+            <p:ph type="body" idx="1"/>
+          </p:nvPr>
+        </p:nvSpPr>
+        <p:spPr/>
+        <p:txBody>
+          <a:bodyPr/>
+          <a:lstStyle/>
+          <a:p>
+            <a:endParaRPr lang="pt-BR" dirty="0"/>
+          </a:p>
+        </p:txBody>
+      </p:sp>
+    </p:spTree>
+    <p:extLst>
+      <p:ext uri="{BB962C8B-B14F-4D97-AF65-F5344CB8AC3E}">
+        <p14:creationId xmlns:p14="http://schemas.microsoft.com/office/powerpoint/2010/main" val="3498238106"/>
+      </p:ext>
+    </p:extLst>
+  </p:cSld>
+  <p:clrMapOvr>
+    <a:masterClrMapping/>
+  </p:clrMapOvr>
+</p:notes>
+</file>
+
+<file path=ppt/notesSlides/notesSlide9.xml><?xml version="1.0" encoding="utf-8"?>
+<p:notes xmlns:a="http://schemas.openxmlformats.org/drawingml/2006/main" xmlns:r="http://schemas.openxmlformats.org/officeDocument/2006/relationships" xmlns:p="http://schemas.openxmlformats.org/presentationml/2006/main">
+  <p:cSld>
+    <p:spTree>
+      <p:nvGrpSpPr>
+        <p:cNvPr id="1" name=""/>
+        <p:cNvGrpSpPr/>
+        <p:nvPr/>
+      </p:nvGrpSpPr>
+      <p:grpSpPr>
+        <a:xfrm>
+          <a:off x="0" y="0"/>
+          <a:ext cx="0" cy="0"/>
+          <a:chOff x="0" y="0"/>
+          <a:chExt cx="0" cy="0"/>
+        </a:xfrm>
+      </p:grpSpPr>
+      <p:sp>
+        <p:nvSpPr>
+          <p:cNvPr id="2" name="Espaço Reservado para Imagem de Slide 1"/>
+          <p:cNvSpPr>
+            <a:spLocks noGrp="1" noRot="1" noChangeAspect="1"/>
+          </p:cNvSpPr>
+          <p:nvPr>
+            <p:ph type="sldImg"/>
+          </p:nvPr>
+        </p:nvSpPr>
+        <p:spPr>
+          <a:xfrm>
+            <a:off x="381000" y="685800"/>
+            <a:ext cx="6096000" cy="3429000"/>
+          </a:xfrm>
+        </p:spPr>
+      </p:sp>
+      <p:sp>
+        <p:nvSpPr>
+          <p:cNvPr id="3" name="Espaço Reservado para Anotações 2"/>
+          <p:cNvSpPr>
+            <a:spLocks noGrp="1"/>
+          </p:cNvSpPr>
+          <p:nvPr>
+            <p:ph type="body" idx="1"/>
+          </p:nvPr>
+        </p:nvSpPr>
+        <p:spPr/>
+        <p:txBody>
+          <a:bodyPr/>
+          <a:lstStyle/>
+          <a:p>
+            <a:endParaRPr lang="pt-BR" dirty="0"/>
+          </a:p>
+        </p:txBody>
+      </p:sp>
+    </p:spTree>
+    <p:extLst>
+      <p:ext uri="{BB962C8B-B14F-4D97-AF65-F5344CB8AC3E}">
+        <p14:creationId xmlns:p14="http://schemas.microsoft.com/office/powerpoint/2010/main" val="585304384"/>
       </p:ext>
     </p:extLst>
   </p:cSld>
@@ -3847,6 +4527,2048 @@
 </p:sld>
 </file>
 
+<file path=ppt/slides/slide10.xml><?xml version="1.0" encoding="utf-8"?>
+<p:sld xmlns:a="http://schemas.openxmlformats.org/drawingml/2006/main" xmlns:r="http://schemas.openxmlformats.org/officeDocument/2006/relationships" xmlns:p="http://schemas.openxmlformats.org/presentationml/2006/main">
+  <p:cSld>
+    <p:spTree>
+      <p:nvGrpSpPr>
+        <p:cNvPr id="1" name=""/>
+        <p:cNvGrpSpPr/>
+        <p:nvPr/>
+      </p:nvGrpSpPr>
+      <p:grpSpPr>
+        <a:xfrm>
+          <a:off x="0" y="0"/>
+          <a:ext cx="0" cy="0"/>
+          <a:chOff x="0" y="0"/>
+          <a:chExt cx="0" cy="0"/>
+        </a:xfrm>
+      </p:grpSpPr>
+      <p:sp>
+        <p:nvSpPr>
+          <p:cNvPr id="6" name="Title 1"/>
+          <p:cNvSpPr>
+            <a:spLocks noGrp="1"/>
+          </p:cNvSpPr>
+          <p:nvPr>
+            <p:ph type="title"/>
+          </p:nvPr>
+        </p:nvSpPr>
+        <p:spPr>
+          <a:xfrm>
+            <a:off x="457200" y="205980"/>
+            <a:ext cx="8229600" cy="857251"/>
+          </a:xfrm>
+        </p:spPr>
+        <p:txBody>
+          <a:bodyPr>
+            <a:normAutofit/>
+          </a:bodyPr>
+          <a:lstStyle/>
+          <a:p>
+            <a:r>
+              <a:rPr lang="en-US" b="1" dirty="0" err="1">
+                <a:solidFill>
+                  <a:srgbClr val="0070C0"/>
+                </a:solidFill>
+              </a:rPr>
+              <a:t>Leitura</a:t>
+            </a:r>
+            <a:r>
+              <a:rPr lang="en-US" b="1" dirty="0">
+                <a:solidFill>
+                  <a:srgbClr val="0070C0"/>
+                </a:solidFill>
+              </a:rPr>
+              <a:t> </a:t>
+            </a:r>
+            <a:r>
+              <a:rPr lang="en-US" b="1" dirty="0" err="1">
+                <a:solidFill>
+                  <a:srgbClr val="0070C0"/>
+                </a:solidFill>
+              </a:rPr>
+              <a:t>Específica</a:t>
+            </a:r>
+            <a:endParaRPr lang="en-US" b="1" dirty="0">
+              <a:solidFill>
+                <a:srgbClr val="0070C0"/>
+              </a:solidFill>
+            </a:endParaRPr>
+          </a:p>
+        </p:txBody>
+      </p:sp>
+      <p:sp>
+        <p:nvSpPr>
+          <p:cNvPr id="8" name="Text Placeholder 2"/>
+          <p:cNvSpPr>
+            <a:spLocks noGrp="1"/>
+          </p:cNvSpPr>
+          <p:nvPr>
+            <p:ph type="body" sz="half" idx="1"/>
+          </p:nvPr>
+        </p:nvSpPr>
+        <p:spPr>
+          <a:xfrm>
+            <a:off x="142865" y="1200150"/>
+            <a:ext cx="8865056" cy="3737369"/>
+          </a:xfrm>
+        </p:spPr>
+        <p:txBody>
+          <a:bodyPr>
+            <a:noAutofit/>
+          </a:bodyPr>
+          <a:lstStyle/>
+          <a:p>
+            <a:pPr marL="0" indent="0">
+              <a:buNone/>
+            </a:pPr>
+            <a:r>
+              <a:rPr lang="pt-BR" sz="2000" dirty="0">
+                <a:latin typeface="Times New Roman" panose="02020603050405020304" pitchFamily="18" charset="0"/>
+                <a:cs typeface="Times New Roman" panose="02020603050405020304" pitchFamily="18" charset="0"/>
+              </a:rPr>
+              <a:t>[1] </a:t>
+            </a:r>
+            <a:r>
+              <a:rPr lang="pt-BR" sz="2000" b="1" dirty="0">
+                <a:latin typeface="Times New Roman" panose="02020603050405020304" pitchFamily="18" charset="0"/>
+                <a:cs typeface="Times New Roman" panose="02020603050405020304" pitchFamily="18" charset="0"/>
+              </a:rPr>
+              <a:t>Planejamento Estratégico de TI – Guia Prático (FGV)</a:t>
+            </a:r>
+          </a:p>
+          <a:p>
+            <a:pPr marL="0" indent="0">
+              <a:buNone/>
+            </a:pPr>
+            <a:r>
+              <a:rPr lang="pt-BR" sz="2000" b="1" dirty="0">
+                <a:solidFill>
+                  <a:srgbClr val="FF0000"/>
+                </a:solidFill>
+                <a:latin typeface="Times New Roman" panose="02020603050405020304" pitchFamily="18" charset="0"/>
+                <a:cs typeface="Times New Roman" panose="02020603050405020304" pitchFamily="18" charset="0"/>
+              </a:rPr>
+              <a:t>Disponível em: </a:t>
+            </a:r>
+            <a:r>
+              <a:rPr lang="pt-BR" sz="2000" dirty="0">
+                <a:latin typeface="Times New Roman" panose="02020603050405020304" pitchFamily="18" charset="0"/>
+                <a:cs typeface="Times New Roman" panose="02020603050405020304" pitchFamily="18" charset="0"/>
+                <a:hlinkClick r:id="rId3"/>
+              </a:rPr>
+              <a:t>https://bibliotecadigital.fgv.br/dspace/handle/10438/14631</a:t>
+            </a:r>
+            <a:r>
+              <a:rPr lang="pt-BR" sz="2000" dirty="0">
+                <a:latin typeface="Times New Roman" panose="02020603050405020304" pitchFamily="18" charset="0"/>
+                <a:cs typeface="Times New Roman" panose="02020603050405020304" pitchFamily="18" charset="0"/>
+              </a:rPr>
+              <a:t> </a:t>
+            </a:r>
+          </a:p>
+          <a:p>
+            <a:pPr marL="0" indent="0">
+              <a:buNone/>
+            </a:pPr>
+            <a:endParaRPr lang="pt-BR" sz="2000" dirty="0">
+              <a:latin typeface="Times New Roman" panose="02020603050405020304" pitchFamily="18" charset="0"/>
+              <a:cs typeface="Times New Roman" panose="02020603050405020304" pitchFamily="18" charset="0"/>
+            </a:endParaRPr>
+          </a:p>
+          <a:p>
+            <a:pPr marL="0" indent="0">
+              <a:buNone/>
+            </a:pPr>
+            <a:endParaRPr lang="pt-BR" sz="2000" dirty="0">
+              <a:latin typeface="Times New Roman" panose="02020603050405020304" pitchFamily="18" charset="0"/>
+              <a:cs typeface="Times New Roman" panose="02020603050405020304" pitchFamily="18" charset="0"/>
+            </a:endParaRPr>
+          </a:p>
+          <a:p>
+            <a:pPr marL="0" indent="0">
+              <a:buNone/>
+            </a:pPr>
+            <a:endParaRPr lang="pt-BR" sz="2000" dirty="0">
+              <a:latin typeface="Times New Roman" panose="02020603050405020304" pitchFamily="18" charset="0"/>
+              <a:cs typeface="Times New Roman" panose="02020603050405020304" pitchFamily="18" charset="0"/>
+            </a:endParaRPr>
+          </a:p>
+          <a:p>
+            <a:pPr marL="0" indent="0">
+              <a:buNone/>
+            </a:pPr>
+            <a:r>
+              <a:rPr lang="pt-BR" sz="2000" dirty="0">
+                <a:latin typeface="Times New Roman" panose="02020603050405020304" pitchFamily="18" charset="0"/>
+                <a:cs typeface="Times New Roman" panose="02020603050405020304" pitchFamily="18" charset="0"/>
+              </a:rPr>
+              <a:t>[2] </a:t>
+            </a:r>
+            <a:r>
+              <a:rPr lang="pt-BR" sz="2000" b="1" dirty="0">
+                <a:latin typeface="Times New Roman" panose="02020603050405020304" pitchFamily="18" charset="0"/>
+                <a:cs typeface="Times New Roman" panose="02020603050405020304" pitchFamily="18" charset="0"/>
+              </a:rPr>
+              <a:t>Guia PDTI – Governo Federal (SISP)</a:t>
+            </a:r>
+          </a:p>
+          <a:p>
+            <a:pPr marL="0" indent="0">
+              <a:buNone/>
+            </a:pPr>
+            <a:r>
+              <a:rPr lang="pt-BR" sz="2000" b="1" dirty="0">
+                <a:solidFill>
+                  <a:srgbClr val="FF0000"/>
+                </a:solidFill>
+                <a:latin typeface="Times New Roman" panose="02020603050405020304" pitchFamily="18" charset="0"/>
+                <a:cs typeface="Times New Roman" panose="02020603050405020304" pitchFamily="18" charset="0"/>
+              </a:rPr>
+              <a:t>Disponível em: </a:t>
+            </a:r>
+            <a:r>
+              <a:rPr lang="pt-BR" sz="2000" dirty="0">
+                <a:latin typeface="Times New Roman" panose="02020603050405020304" pitchFamily="18" charset="0"/>
+                <a:cs typeface="Times New Roman" panose="02020603050405020304" pitchFamily="18" charset="0"/>
+                <a:hlinkClick r:id="rId4"/>
+              </a:rPr>
+              <a:t>https://www.gov.br/governodigital/pt-br/sisp/documentos/guia-pdti</a:t>
+            </a:r>
+            <a:r>
+              <a:rPr lang="pt-BR" sz="2000" dirty="0">
+                <a:latin typeface="Times New Roman" panose="02020603050405020304" pitchFamily="18" charset="0"/>
+                <a:cs typeface="Times New Roman" panose="02020603050405020304" pitchFamily="18" charset="0"/>
+              </a:rPr>
+              <a:t> </a:t>
+            </a:r>
+            <a:endParaRPr lang="pt-BR" sz="2000" b="1" dirty="0">
+              <a:solidFill>
+                <a:srgbClr val="FF0000"/>
+              </a:solidFill>
+              <a:latin typeface="Times New Roman" panose="02020603050405020304" pitchFamily="18" charset="0"/>
+              <a:cs typeface="Times New Roman" panose="02020603050405020304" pitchFamily="18" charset="0"/>
+            </a:endParaRPr>
+          </a:p>
+        </p:txBody>
+      </p:sp>
+    </p:spTree>
+    <p:extLst>
+      <p:ext uri="{BB962C8B-B14F-4D97-AF65-F5344CB8AC3E}">
+        <p14:creationId xmlns:p14="http://schemas.microsoft.com/office/powerpoint/2010/main" val="3680270425"/>
+      </p:ext>
+    </p:extLst>
+  </p:cSld>
+  <p:clrMapOvr>
+    <a:masterClrMapping/>
+  </p:clrMapOvr>
+  <p:transition spd="med"/>
+</p:sld>
+</file>
+
+<file path=ppt/slides/slide11.xml><?xml version="1.0" encoding="utf-8"?>
+<p:sld xmlns:a="http://schemas.openxmlformats.org/drawingml/2006/main" xmlns:r="http://schemas.openxmlformats.org/officeDocument/2006/relationships" xmlns:p="http://schemas.openxmlformats.org/presentationml/2006/main">
+  <p:cSld>
+    <p:spTree>
+      <p:nvGrpSpPr>
+        <p:cNvPr id="1" name=""/>
+        <p:cNvGrpSpPr/>
+        <p:nvPr/>
+      </p:nvGrpSpPr>
+      <p:grpSpPr>
+        <a:xfrm>
+          <a:off x="0" y="0"/>
+          <a:ext cx="0" cy="0"/>
+          <a:chOff x="0" y="0"/>
+          <a:chExt cx="0" cy="0"/>
+        </a:xfrm>
+      </p:grpSpPr>
+      <p:sp>
+        <p:nvSpPr>
+          <p:cNvPr id="6" name="Title 1"/>
+          <p:cNvSpPr>
+            <a:spLocks noGrp="1"/>
+          </p:cNvSpPr>
+          <p:nvPr>
+            <p:ph type="title"/>
+          </p:nvPr>
+        </p:nvSpPr>
+        <p:spPr>
+          <a:xfrm>
+            <a:off x="457200" y="205980"/>
+            <a:ext cx="8229600" cy="857251"/>
+          </a:xfrm>
+        </p:spPr>
+        <p:txBody>
+          <a:bodyPr>
+            <a:normAutofit/>
+          </a:bodyPr>
+          <a:lstStyle/>
+          <a:p>
+            <a:r>
+              <a:rPr lang="en-US" b="1" dirty="0" err="1">
+                <a:solidFill>
+                  <a:srgbClr val="0070C0"/>
+                </a:solidFill>
+              </a:rPr>
+              <a:t>Aprenda</a:t>
+            </a:r>
+            <a:r>
+              <a:rPr lang="en-US" b="1" dirty="0">
+                <a:solidFill>
+                  <a:srgbClr val="0070C0"/>
+                </a:solidFill>
+              </a:rPr>
+              <a:t>+</a:t>
+            </a:r>
+          </a:p>
+        </p:txBody>
+      </p:sp>
+      <p:sp>
+        <p:nvSpPr>
+          <p:cNvPr id="8" name="Text Placeholder 2"/>
+          <p:cNvSpPr>
+            <a:spLocks noGrp="1"/>
+          </p:cNvSpPr>
+          <p:nvPr>
+            <p:ph type="body" sz="half" idx="1"/>
+          </p:nvPr>
+        </p:nvSpPr>
+        <p:spPr>
+          <a:xfrm>
+            <a:off x="142865" y="1200150"/>
+            <a:ext cx="8865056" cy="3737370"/>
+          </a:xfrm>
+        </p:spPr>
+        <p:txBody>
+          <a:bodyPr>
+            <a:noAutofit/>
+          </a:bodyPr>
+          <a:lstStyle/>
+          <a:p>
+            <a:pPr marL="0" indent="0" algn="just">
+              <a:buNone/>
+            </a:pPr>
+            <a:r>
+              <a:rPr lang="pt-BR" sz="2000" dirty="0">
+                <a:latin typeface="Times New Roman" panose="02020603050405020304" pitchFamily="18" charset="0"/>
+                <a:cs typeface="Times New Roman" panose="02020603050405020304" pitchFamily="18" charset="0"/>
+              </a:rPr>
+              <a:t>[1] </a:t>
+            </a:r>
+            <a:r>
+              <a:rPr lang="pt-BR" sz="2000" b="1" dirty="0">
+                <a:latin typeface="Times New Roman" panose="02020603050405020304" pitchFamily="18" charset="0"/>
+                <a:cs typeface="Times New Roman" panose="02020603050405020304" pitchFamily="18" charset="0"/>
+              </a:rPr>
+              <a:t>Planejamento Estratégico de TI (explicação clara)</a:t>
+            </a:r>
+          </a:p>
+          <a:p>
+            <a:pPr marL="0" indent="0" algn="just">
+              <a:buNone/>
+            </a:pPr>
+            <a:r>
+              <a:rPr lang="pt-BR" sz="2000" b="1" dirty="0">
+                <a:solidFill>
+                  <a:srgbClr val="FF0000"/>
+                </a:solidFill>
+                <a:latin typeface="Times New Roman" panose="02020603050405020304" pitchFamily="18" charset="0"/>
+                <a:cs typeface="Times New Roman" panose="02020603050405020304" pitchFamily="18" charset="0"/>
+              </a:rPr>
+              <a:t>Disponível em: </a:t>
+            </a:r>
+            <a:r>
+              <a:rPr lang="pt-BR" sz="2000" dirty="0">
+                <a:latin typeface="Times New Roman" panose="02020603050405020304" pitchFamily="18" charset="0"/>
+                <a:cs typeface="Times New Roman" panose="02020603050405020304" pitchFamily="18" charset="0"/>
+                <a:hlinkClick r:id="rId3"/>
+              </a:rPr>
+              <a:t>https://www.youtube.com/watch?v=7vVQ0c2sQ3A</a:t>
+            </a:r>
+            <a:r>
+              <a:rPr lang="pt-BR" sz="2000" dirty="0">
+                <a:latin typeface="Times New Roman" panose="02020603050405020304" pitchFamily="18" charset="0"/>
+                <a:cs typeface="Times New Roman" panose="02020603050405020304" pitchFamily="18" charset="0"/>
+              </a:rPr>
+              <a:t> </a:t>
+            </a:r>
+          </a:p>
+          <a:p>
+            <a:pPr marL="0" indent="0" algn="just">
+              <a:buNone/>
+            </a:pPr>
+            <a:r>
+              <a:rPr lang="pt-BR" sz="2000" dirty="0">
+                <a:latin typeface="Times New Roman" panose="02020603050405020304" pitchFamily="18" charset="0"/>
+                <a:cs typeface="Times New Roman" panose="02020603050405020304" pitchFamily="18" charset="0"/>
+              </a:rPr>
+              <a:t> </a:t>
+            </a:r>
+          </a:p>
+          <a:p>
+            <a:pPr marL="0" indent="0" algn="just">
+              <a:buNone/>
+            </a:pPr>
+            <a:endParaRPr lang="pt-BR" sz="2000" dirty="0">
+              <a:latin typeface="Times New Roman" panose="02020603050405020304" pitchFamily="18" charset="0"/>
+              <a:cs typeface="Times New Roman" panose="02020603050405020304" pitchFamily="18" charset="0"/>
+            </a:endParaRPr>
+          </a:p>
+          <a:p>
+            <a:pPr marL="0" indent="0" algn="just">
+              <a:buNone/>
+            </a:pPr>
+            <a:endParaRPr lang="pt-BR" sz="2000" dirty="0">
+              <a:latin typeface="Times New Roman" panose="02020603050405020304" pitchFamily="18" charset="0"/>
+              <a:cs typeface="Times New Roman" panose="02020603050405020304" pitchFamily="18" charset="0"/>
+            </a:endParaRPr>
+          </a:p>
+          <a:p>
+            <a:pPr marL="0" indent="0" algn="just">
+              <a:buNone/>
+            </a:pPr>
+            <a:r>
+              <a:rPr lang="pt-BR" sz="2000" dirty="0">
+                <a:latin typeface="Times New Roman" panose="02020603050405020304" pitchFamily="18" charset="0"/>
+                <a:cs typeface="Times New Roman" panose="02020603050405020304" pitchFamily="18" charset="0"/>
+              </a:rPr>
+              <a:t>[2] </a:t>
+            </a:r>
+            <a:r>
+              <a:rPr lang="pt-BR" sz="2000" b="1" dirty="0">
+                <a:latin typeface="Times New Roman" panose="02020603050405020304" pitchFamily="18" charset="0"/>
+                <a:cs typeface="Times New Roman" panose="02020603050405020304" pitchFamily="18" charset="0"/>
+              </a:rPr>
+              <a:t>O que é PDTI e Governança de TI</a:t>
+            </a:r>
+          </a:p>
+          <a:p>
+            <a:pPr marL="0" indent="0" algn="just">
+              <a:buNone/>
+            </a:pPr>
+            <a:r>
+              <a:rPr lang="pt-BR" sz="2000" b="1" dirty="0">
+                <a:solidFill>
+                  <a:srgbClr val="FF0000"/>
+                </a:solidFill>
+                <a:latin typeface="Times New Roman" panose="02020603050405020304" pitchFamily="18" charset="0"/>
+                <a:cs typeface="Times New Roman" panose="02020603050405020304" pitchFamily="18" charset="0"/>
+              </a:rPr>
+              <a:t>Disponível em: </a:t>
+            </a:r>
+            <a:r>
+              <a:rPr lang="pt-BR" sz="2000" dirty="0">
+                <a:latin typeface="Times New Roman" panose="02020603050405020304" pitchFamily="18" charset="0"/>
+                <a:cs typeface="Times New Roman" panose="02020603050405020304" pitchFamily="18" charset="0"/>
+                <a:hlinkClick r:id="rId4"/>
+              </a:rPr>
+              <a:t>https://www.youtube.com/watch?v=F0wzRj4pJkE</a:t>
+            </a:r>
+            <a:r>
+              <a:rPr lang="pt-BR" sz="2000" dirty="0">
+                <a:latin typeface="Times New Roman" panose="02020603050405020304" pitchFamily="18" charset="0"/>
+                <a:cs typeface="Times New Roman" panose="02020603050405020304" pitchFamily="18" charset="0"/>
+              </a:rPr>
+              <a:t> </a:t>
+            </a:r>
+          </a:p>
+        </p:txBody>
+      </p:sp>
+    </p:spTree>
+    <p:extLst>
+      <p:ext uri="{BB962C8B-B14F-4D97-AF65-F5344CB8AC3E}">
+        <p14:creationId xmlns:p14="http://schemas.microsoft.com/office/powerpoint/2010/main" val="2747596967"/>
+      </p:ext>
+    </p:extLst>
+  </p:cSld>
+  <p:clrMapOvr>
+    <a:masterClrMapping/>
+  </p:clrMapOvr>
+  <p:transition spd="med"/>
+</p:sld>
+</file>
+
+<file path=ppt/slides/slide12.xml><?xml version="1.0" encoding="utf-8"?>
+<p:sld xmlns:a="http://schemas.openxmlformats.org/drawingml/2006/main" xmlns:r="http://schemas.openxmlformats.org/officeDocument/2006/relationships" xmlns:p="http://schemas.openxmlformats.org/presentationml/2006/main">
+  <p:cSld>
+    <p:spTree>
+      <p:nvGrpSpPr>
+        <p:cNvPr id="1" name="">
+          <a:extLst>
+            <a:ext uri="{FF2B5EF4-FFF2-40B4-BE49-F238E27FC236}">
+              <a16:creationId xmlns:a16="http://schemas.microsoft.com/office/drawing/2014/main" id="{57874BAE-D367-2F50-EDE8-171BC247D1C2}"/>
+            </a:ext>
+          </a:extLst>
+        </p:cNvPr>
+        <p:cNvGrpSpPr/>
+        <p:nvPr/>
+      </p:nvGrpSpPr>
+      <p:grpSpPr>
+        <a:xfrm>
+          <a:off x="0" y="0"/>
+          <a:ext cx="0" cy="0"/>
+          <a:chOff x="0" y="0"/>
+          <a:chExt cx="0" cy="0"/>
+        </a:xfrm>
+      </p:grpSpPr>
+      <p:sp>
+        <p:nvSpPr>
+          <p:cNvPr id="6" name="Title 1">
+            <a:extLst>
+              <a:ext uri="{FF2B5EF4-FFF2-40B4-BE49-F238E27FC236}">
+                <a16:creationId xmlns:a16="http://schemas.microsoft.com/office/drawing/2014/main" id="{12176EC2-3405-C858-95B8-B0C648FA59B0}"/>
+              </a:ext>
+            </a:extLst>
+          </p:cNvPr>
+          <p:cNvSpPr>
+            <a:spLocks noGrp="1"/>
+          </p:cNvSpPr>
+          <p:nvPr>
+            <p:ph type="title"/>
+          </p:nvPr>
+        </p:nvSpPr>
+        <p:spPr>
+          <a:xfrm>
+            <a:off x="457200" y="205980"/>
+            <a:ext cx="8229600" cy="857251"/>
+          </a:xfrm>
+        </p:spPr>
+        <p:txBody>
+          <a:bodyPr>
+            <a:normAutofit/>
+          </a:bodyPr>
+          <a:lstStyle/>
+          <a:p>
+            <a:r>
+              <a:rPr lang="en-US" b="1" dirty="0" err="1">
+                <a:solidFill>
+                  <a:srgbClr val="0070C0"/>
+                </a:solidFill>
+              </a:rPr>
+              <a:t>Estudo</a:t>
+            </a:r>
+            <a:r>
+              <a:rPr lang="en-US" b="1" dirty="0">
+                <a:solidFill>
+                  <a:srgbClr val="0070C0"/>
+                </a:solidFill>
+              </a:rPr>
+              <a:t> de Caso</a:t>
+            </a:r>
+          </a:p>
+        </p:txBody>
+      </p:sp>
+      <p:sp>
+        <p:nvSpPr>
+          <p:cNvPr id="8" name="Text Placeholder 2">
+            <a:extLst>
+              <a:ext uri="{FF2B5EF4-FFF2-40B4-BE49-F238E27FC236}">
+                <a16:creationId xmlns:a16="http://schemas.microsoft.com/office/drawing/2014/main" id="{B9D93FB2-4945-1BB7-94FD-0914D75EFB0C}"/>
+              </a:ext>
+            </a:extLst>
+          </p:cNvPr>
+          <p:cNvSpPr>
+            <a:spLocks noGrp="1"/>
+          </p:cNvSpPr>
+          <p:nvPr>
+            <p:ph type="body" sz="half" idx="1"/>
+          </p:nvPr>
+        </p:nvSpPr>
+        <p:spPr>
+          <a:xfrm>
+            <a:off x="142865" y="1035050"/>
+            <a:ext cx="8865056" cy="3994150"/>
+          </a:xfrm>
+        </p:spPr>
+        <p:txBody>
+          <a:bodyPr>
+            <a:noAutofit/>
+          </a:bodyPr>
+          <a:lstStyle/>
+          <a:p>
+            <a:pPr marL="0" indent="0">
+              <a:buNone/>
+            </a:pPr>
+            <a:r>
+              <a:rPr lang="pt-BR" sz="2200" b="1" dirty="0">
+                <a:latin typeface="Times New Roman" panose="02020603050405020304" pitchFamily="18" charset="0"/>
+                <a:cs typeface="Times New Roman" panose="02020603050405020304" pitchFamily="18" charset="0"/>
+              </a:rPr>
+              <a:t>Empresa deseja crescer e digitalizar processos</a:t>
+            </a:r>
+          </a:p>
+          <a:p>
+            <a:pPr marL="0" indent="0">
+              <a:buNone/>
+            </a:pPr>
+            <a:endParaRPr lang="pt-BR" sz="2200" dirty="0">
+              <a:latin typeface="Times New Roman" panose="02020603050405020304" pitchFamily="18" charset="0"/>
+              <a:cs typeface="Times New Roman" panose="02020603050405020304" pitchFamily="18" charset="0"/>
+            </a:endParaRPr>
+          </a:p>
+          <a:p>
+            <a:pPr marL="0" indent="0">
+              <a:buNone/>
+            </a:pPr>
+            <a:endParaRPr lang="pt-BR" sz="2200" dirty="0">
+              <a:latin typeface="Times New Roman" panose="02020603050405020304" pitchFamily="18" charset="0"/>
+              <a:cs typeface="Times New Roman" panose="02020603050405020304" pitchFamily="18" charset="0"/>
+            </a:endParaRPr>
+          </a:p>
+          <a:p>
+            <a:pPr marL="0" indent="0">
+              <a:buNone/>
+            </a:pPr>
+            <a:r>
+              <a:rPr lang="pt-BR" sz="2200" b="1" dirty="0">
+                <a:solidFill>
+                  <a:srgbClr val="FF0000"/>
+                </a:solidFill>
+                <a:latin typeface="Times New Roman" panose="02020603050405020304" pitchFamily="18" charset="0"/>
+                <a:cs typeface="Times New Roman" panose="02020603050405020304" pitchFamily="18" charset="0"/>
+              </a:rPr>
+              <a:t>Perguntas</a:t>
+            </a:r>
+            <a:endParaRPr lang="pt-BR" sz="2200" dirty="0">
+              <a:latin typeface="Times New Roman" panose="02020603050405020304" pitchFamily="18" charset="0"/>
+              <a:cs typeface="Times New Roman" panose="02020603050405020304" pitchFamily="18" charset="0"/>
+            </a:endParaRPr>
+          </a:p>
+          <a:p>
+            <a:r>
+              <a:rPr lang="pt-BR" sz="2200" dirty="0">
+                <a:latin typeface="Times New Roman" panose="02020603050405020304" pitchFamily="18" charset="0"/>
+                <a:cs typeface="Times New Roman" panose="02020603050405020304" pitchFamily="18" charset="0"/>
+              </a:rPr>
+              <a:t>Qual seria o papel do </a:t>
+            </a:r>
+            <a:r>
+              <a:rPr lang="pt-BR" sz="2200" b="1" dirty="0">
+                <a:latin typeface="Times New Roman" panose="02020603050405020304" pitchFamily="18" charset="0"/>
+                <a:cs typeface="Times New Roman" panose="02020603050405020304" pitchFamily="18" charset="0"/>
+              </a:rPr>
+              <a:t>PETI</a:t>
+            </a:r>
+            <a:r>
+              <a:rPr lang="pt-BR" sz="2200" dirty="0">
+                <a:latin typeface="Times New Roman" panose="02020603050405020304" pitchFamily="18" charset="0"/>
+                <a:cs typeface="Times New Roman" panose="02020603050405020304" pitchFamily="18" charset="0"/>
+              </a:rPr>
+              <a:t>?</a:t>
+            </a:r>
+          </a:p>
+          <a:p>
+            <a:r>
+              <a:rPr lang="pt-BR" sz="2200" dirty="0">
+                <a:latin typeface="Times New Roman" panose="02020603050405020304" pitchFamily="18" charset="0"/>
+                <a:cs typeface="Times New Roman" panose="02020603050405020304" pitchFamily="18" charset="0"/>
+              </a:rPr>
+              <a:t>Quais ações entrariam no </a:t>
+            </a:r>
+            <a:r>
+              <a:rPr lang="pt-BR" sz="2200" b="1" dirty="0">
+                <a:solidFill>
+                  <a:srgbClr val="FF0000"/>
+                </a:solidFill>
+                <a:latin typeface="Times New Roman" panose="02020603050405020304" pitchFamily="18" charset="0"/>
+                <a:cs typeface="Times New Roman" panose="02020603050405020304" pitchFamily="18" charset="0"/>
+              </a:rPr>
+              <a:t>PDTI</a:t>
+            </a:r>
+            <a:r>
+              <a:rPr lang="pt-BR" sz="2200" dirty="0">
+                <a:latin typeface="Times New Roman" panose="02020603050405020304" pitchFamily="18" charset="0"/>
+                <a:cs typeface="Times New Roman" panose="02020603050405020304" pitchFamily="18" charset="0"/>
+              </a:rPr>
+              <a:t>?</a:t>
+            </a:r>
+          </a:p>
+          <a:p>
+            <a:r>
+              <a:rPr lang="pt-BR" sz="2200" dirty="0">
+                <a:latin typeface="Times New Roman" panose="02020603050405020304" pitchFamily="18" charset="0"/>
+                <a:cs typeface="Times New Roman" panose="02020603050405020304" pitchFamily="18" charset="0"/>
+              </a:rPr>
+              <a:t>O que poderia ser terceirizado?</a:t>
+            </a:r>
+          </a:p>
+        </p:txBody>
+      </p:sp>
+    </p:spTree>
+    <p:extLst>
+      <p:ext uri="{BB962C8B-B14F-4D97-AF65-F5344CB8AC3E}">
+        <p14:creationId xmlns:p14="http://schemas.microsoft.com/office/powerpoint/2010/main" val="2144566514"/>
+      </p:ext>
+    </p:extLst>
+  </p:cSld>
+  <p:clrMapOvr>
+    <a:masterClrMapping/>
+  </p:clrMapOvr>
+  <p:transition spd="med"/>
+</p:sld>
+</file>
+
+<file path=ppt/slides/slide13.xml><?xml version="1.0" encoding="utf-8"?>
+<p:sld xmlns:a="http://schemas.openxmlformats.org/drawingml/2006/main" xmlns:r="http://schemas.openxmlformats.org/officeDocument/2006/relationships" xmlns:p="http://schemas.openxmlformats.org/presentationml/2006/main">
+  <p:cSld>
+    <p:spTree>
+      <p:nvGrpSpPr>
+        <p:cNvPr id="1" name="">
+          <a:extLst>
+            <a:ext uri="{FF2B5EF4-FFF2-40B4-BE49-F238E27FC236}">
+              <a16:creationId xmlns:a16="http://schemas.microsoft.com/office/drawing/2014/main" id="{2953AC7D-8CF9-A63F-57A2-D983DEB50039}"/>
+            </a:ext>
+          </a:extLst>
+        </p:cNvPr>
+        <p:cNvGrpSpPr/>
+        <p:nvPr/>
+      </p:nvGrpSpPr>
+      <p:grpSpPr>
+        <a:xfrm>
+          <a:off x="0" y="0"/>
+          <a:ext cx="0" cy="0"/>
+          <a:chOff x="0" y="0"/>
+          <a:chExt cx="0" cy="0"/>
+        </a:xfrm>
+      </p:grpSpPr>
+      <p:sp>
+        <p:nvSpPr>
+          <p:cNvPr id="6" name="Title 1">
+            <a:extLst>
+              <a:ext uri="{FF2B5EF4-FFF2-40B4-BE49-F238E27FC236}">
+                <a16:creationId xmlns:a16="http://schemas.microsoft.com/office/drawing/2014/main" id="{CC4C3A19-ED0C-1CE0-1512-03DBBA8E622A}"/>
+              </a:ext>
+            </a:extLst>
+          </p:cNvPr>
+          <p:cNvSpPr>
+            <a:spLocks noGrp="1"/>
+          </p:cNvSpPr>
+          <p:nvPr>
+            <p:ph type="title"/>
+          </p:nvPr>
+        </p:nvSpPr>
+        <p:spPr>
+          <a:xfrm>
+            <a:off x="457200" y="205980"/>
+            <a:ext cx="8229600" cy="857251"/>
+          </a:xfrm>
+        </p:spPr>
+        <p:txBody>
+          <a:bodyPr>
+            <a:normAutofit/>
+          </a:bodyPr>
+          <a:lstStyle/>
+          <a:p>
+            <a:r>
+              <a:rPr lang="en-US" b="1" dirty="0" err="1">
+                <a:solidFill>
+                  <a:srgbClr val="0070C0"/>
+                </a:solidFill>
+              </a:rPr>
+              <a:t>Dinâmica</a:t>
+            </a:r>
+            <a:r>
+              <a:rPr lang="en-US" b="1" dirty="0">
+                <a:solidFill>
+                  <a:srgbClr val="0070C0"/>
+                </a:solidFill>
+              </a:rPr>
+              <a:t>/</a:t>
+            </a:r>
+            <a:r>
+              <a:rPr lang="en-US" b="1" dirty="0" err="1">
+                <a:solidFill>
+                  <a:srgbClr val="0070C0"/>
+                </a:solidFill>
+              </a:rPr>
+              <a:t>Atividade</a:t>
+            </a:r>
+            <a:endParaRPr lang="en-US" b="1" dirty="0">
+              <a:solidFill>
+                <a:srgbClr val="0070C0"/>
+              </a:solidFill>
+            </a:endParaRPr>
+          </a:p>
+        </p:txBody>
+      </p:sp>
+      <p:sp>
+        <p:nvSpPr>
+          <p:cNvPr id="8" name="Text Placeholder 2">
+            <a:extLst>
+              <a:ext uri="{FF2B5EF4-FFF2-40B4-BE49-F238E27FC236}">
+                <a16:creationId xmlns:a16="http://schemas.microsoft.com/office/drawing/2014/main" id="{B45119E1-EF11-7248-2ADA-8776A0D7E7E3}"/>
+              </a:ext>
+            </a:extLst>
+          </p:cNvPr>
+          <p:cNvSpPr>
+            <a:spLocks noGrp="1"/>
+          </p:cNvSpPr>
+          <p:nvPr>
+            <p:ph type="body" sz="half" idx="1"/>
+          </p:nvPr>
+        </p:nvSpPr>
+        <p:spPr>
+          <a:xfrm>
+            <a:off x="142865" y="1035050"/>
+            <a:ext cx="8865056" cy="3994150"/>
+          </a:xfrm>
+        </p:spPr>
+        <p:txBody>
+          <a:bodyPr>
+            <a:noAutofit/>
+          </a:bodyPr>
+          <a:lstStyle/>
+          <a:p>
+            <a:pPr marL="457200" indent="-457200">
+              <a:buFont typeface="+mj-lt"/>
+              <a:buAutoNum type="arabicPeriod"/>
+            </a:pPr>
+            <a:r>
+              <a:rPr lang="pt-BR" sz="2000" b="1" dirty="0">
+                <a:solidFill>
+                  <a:srgbClr val="FF0000"/>
+                </a:solidFill>
+                <a:latin typeface="Times New Roman" panose="02020603050405020304" pitchFamily="18" charset="0"/>
+                <a:cs typeface="Times New Roman" panose="02020603050405020304" pitchFamily="18" charset="0"/>
+              </a:rPr>
+              <a:t>Escolher</a:t>
+            </a:r>
+            <a:r>
+              <a:rPr lang="pt-BR" sz="2000" b="1" dirty="0">
+                <a:latin typeface="Times New Roman" panose="02020603050405020304" pitchFamily="18" charset="0"/>
+                <a:cs typeface="Times New Roman" panose="02020603050405020304" pitchFamily="18" charset="0"/>
+              </a:rPr>
+              <a:t> uma empresa (real ou </a:t>
+            </a:r>
+            <a:r>
+              <a:rPr lang="pt-BR" sz="2000" b="1" dirty="0">
+                <a:solidFill>
+                  <a:srgbClr val="FF0000"/>
+                </a:solidFill>
+                <a:latin typeface="Times New Roman" panose="02020603050405020304" pitchFamily="18" charset="0"/>
+                <a:cs typeface="Times New Roman" panose="02020603050405020304" pitchFamily="18" charset="0"/>
+              </a:rPr>
+              <a:t>fictícia</a:t>
+            </a:r>
+            <a:r>
+              <a:rPr lang="pt-BR" sz="2000" b="1" dirty="0">
+                <a:latin typeface="Times New Roman" panose="02020603050405020304" pitchFamily="18" charset="0"/>
+                <a:cs typeface="Times New Roman" panose="02020603050405020304" pitchFamily="18" charset="0"/>
+              </a:rPr>
+              <a:t>)</a:t>
+            </a:r>
+          </a:p>
+          <a:p>
+            <a:pPr marL="457200" indent="-457200">
+              <a:buFont typeface="+mj-lt"/>
+              <a:buAutoNum type="arabicPeriod"/>
+            </a:pPr>
+            <a:r>
+              <a:rPr lang="pt-BR" sz="2000" b="1" dirty="0">
+                <a:solidFill>
+                  <a:srgbClr val="FF0000"/>
+                </a:solidFill>
+                <a:latin typeface="Times New Roman" panose="02020603050405020304" pitchFamily="18" charset="0"/>
+                <a:cs typeface="Times New Roman" panose="02020603050405020304" pitchFamily="18" charset="0"/>
+              </a:rPr>
+              <a:t>Definir</a:t>
+            </a:r>
+          </a:p>
+          <a:p>
+            <a:pPr lvl="1">
+              <a:buFont typeface="Wingdings" panose="05000000000000000000" pitchFamily="2" charset="2"/>
+              <a:buChar char="§"/>
+            </a:pPr>
+            <a:r>
+              <a:rPr lang="pt-BR" sz="2000" dirty="0">
+                <a:latin typeface="Times New Roman" panose="02020603050405020304" pitchFamily="18" charset="0"/>
+                <a:cs typeface="Times New Roman" panose="02020603050405020304" pitchFamily="18" charset="0"/>
+              </a:rPr>
+              <a:t>Objetivo estratégico (</a:t>
+            </a:r>
+            <a:r>
+              <a:rPr lang="pt-BR" sz="2000" b="1" dirty="0">
+                <a:solidFill>
+                  <a:srgbClr val="002060"/>
+                </a:solidFill>
+                <a:latin typeface="Times New Roman" panose="02020603050405020304" pitchFamily="18" charset="0"/>
+                <a:cs typeface="Times New Roman" panose="02020603050405020304" pitchFamily="18" charset="0"/>
+              </a:rPr>
+              <a:t>PEC</a:t>
+            </a:r>
+            <a:r>
+              <a:rPr lang="pt-BR" sz="2000" dirty="0">
+                <a:latin typeface="Times New Roman" panose="02020603050405020304" pitchFamily="18" charset="0"/>
+                <a:cs typeface="Times New Roman" panose="02020603050405020304" pitchFamily="18" charset="0"/>
+              </a:rPr>
+              <a:t>)</a:t>
+            </a:r>
+          </a:p>
+          <a:p>
+            <a:pPr lvl="1">
+              <a:buFont typeface="Wingdings" panose="05000000000000000000" pitchFamily="2" charset="2"/>
+              <a:buChar char="§"/>
+            </a:pPr>
+            <a:r>
+              <a:rPr lang="pt-BR" sz="2000" dirty="0">
+                <a:latin typeface="Times New Roman" panose="02020603050405020304" pitchFamily="18" charset="0"/>
+                <a:cs typeface="Times New Roman" panose="02020603050405020304" pitchFamily="18" charset="0"/>
+              </a:rPr>
+              <a:t>3 iniciativas de </a:t>
+            </a:r>
+            <a:r>
+              <a:rPr lang="pt-BR" sz="2000" b="1" dirty="0">
+                <a:latin typeface="Times New Roman" panose="02020603050405020304" pitchFamily="18" charset="0"/>
+                <a:cs typeface="Times New Roman" panose="02020603050405020304" pitchFamily="18" charset="0"/>
+              </a:rPr>
+              <a:t>TI</a:t>
+            </a:r>
+            <a:r>
+              <a:rPr lang="pt-BR" sz="2000" dirty="0">
+                <a:latin typeface="Times New Roman" panose="02020603050405020304" pitchFamily="18" charset="0"/>
+                <a:cs typeface="Times New Roman" panose="02020603050405020304" pitchFamily="18" charset="0"/>
+              </a:rPr>
+              <a:t> (</a:t>
+            </a:r>
+            <a:r>
+              <a:rPr lang="pt-BR" sz="2000" b="1" dirty="0">
+                <a:latin typeface="Times New Roman" panose="02020603050405020304" pitchFamily="18" charset="0"/>
+                <a:cs typeface="Times New Roman" panose="02020603050405020304" pitchFamily="18" charset="0"/>
+              </a:rPr>
+              <a:t>PETI</a:t>
+            </a:r>
+            <a:r>
+              <a:rPr lang="pt-BR" sz="2000" dirty="0">
+                <a:latin typeface="Times New Roman" panose="02020603050405020304" pitchFamily="18" charset="0"/>
+                <a:cs typeface="Times New Roman" panose="02020603050405020304" pitchFamily="18" charset="0"/>
+              </a:rPr>
+              <a:t>)</a:t>
+            </a:r>
+          </a:p>
+          <a:p>
+            <a:pPr lvl="1">
+              <a:buFont typeface="Wingdings" panose="05000000000000000000" pitchFamily="2" charset="2"/>
+              <a:buChar char="§"/>
+            </a:pPr>
+            <a:r>
+              <a:rPr lang="pt-BR" sz="2000" dirty="0">
+                <a:latin typeface="Times New Roman" panose="02020603050405020304" pitchFamily="18" charset="0"/>
+                <a:cs typeface="Times New Roman" panose="02020603050405020304" pitchFamily="18" charset="0"/>
+              </a:rPr>
+              <a:t>3 ações concretas (</a:t>
+            </a:r>
+            <a:r>
+              <a:rPr lang="pt-BR" sz="2000" b="1" dirty="0">
+                <a:solidFill>
+                  <a:srgbClr val="FF0000"/>
+                </a:solidFill>
+                <a:latin typeface="Times New Roman" panose="02020603050405020304" pitchFamily="18" charset="0"/>
+                <a:cs typeface="Times New Roman" panose="02020603050405020304" pitchFamily="18" charset="0"/>
+              </a:rPr>
+              <a:t>PDTI</a:t>
+            </a:r>
+            <a:r>
+              <a:rPr lang="pt-BR" sz="2000" dirty="0">
+                <a:latin typeface="Times New Roman" panose="02020603050405020304" pitchFamily="18" charset="0"/>
+                <a:cs typeface="Times New Roman" panose="02020603050405020304" pitchFamily="18" charset="0"/>
+              </a:rPr>
+              <a:t>)</a:t>
+            </a:r>
+          </a:p>
+          <a:p>
+            <a:pPr marL="457200" indent="-457200">
+              <a:buFont typeface="+mj-lt"/>
+              <a:buAutoNum type="arabicPeriod"/>
+            </a:pPr>
+            <a:r>
+              <a:rPr lang="pt-BR" sz="2000" b="1" dirty="0">
+                <a:solidFill>
+                  <a:srgbClr val="FF0000"/>
+                </a:solidFill>
+                <a:latin typeface="Times New Roman" panose="02020603050405020304" pitchFamily="18" charset="0"/>
+                <a:cs typeface="Times New Roman" panose="02020603050405020304" pitchFamily="18" charset="0"/>
+              </a:rPr>
+              <a:t>Indicar</a:t>
+            </a:r>
+          </a:p>
+          <a:p>
+            <a:pPr lvl="1">
+              <a:buFont typeface="Wingdings" panose="05000000000000000000" pitchFamily="2" charset="2"/>
+              <a:buChar char="§"/>
+            </a:pPr>
+            <a:r>
+              <a:rPr lang="pt-BR" sz="2000" dirty="0">
+                <a:latin typeface="Times New Roman" panose="02020603050405020304" pitchFamily="18" charset="0"/>
+                <a:cs typeface="Times New Roman" panose="02020603050405020304" pitchFamily="18" charset="0"/>
+              </a:rPr>
+              <a:t>O que seria terceirizado e por quê?</a:t>
+            </a:r>
+          </a:p>
+          <a:p>
+            <a:pPr marL="0" indent="0">
+              <a:buNone/>
+            </a:pPr>
+            <a:endParaRPr lang="pt-BR" sz="2000" dirty="0">
+              <a:latin typeface="Times New Roman" panose="02020603050405020304" pitchFamily="18" charset="0"/>
+              <a:cs typeface="Times New Roman" panose="02020603050405020304" pitchFamily="18" charset="0"/>
+            </a:endParaRPr>
+          </a:p>
+          <a:p>
+            <a:pPr marL="0" indent="0" algn="just">
+              <a:buNone/>
+            </a:pPr>
+            <a:r>
+              <a:rPr lang="pt-BR" sz="2000" b="1" dirty="0">
+                <a:solidFill>
+                  <a:srgbClr val="FF0000"/>
+                </a:solidFill>
+                <a:latin typeface="Times New Roman" panose="02020603050405020304" pitchFamily="18" charset="0"/>
+                <a:cs typeface="Times New Roman" panose="02020603050405020304" pitchFamily="18" charset="0"/>
+              </a:rPr>
+              <a:t>Entrega</a:t>
+            </a:r>
+            <a:r>
+              <a:rPr lang="pt-BR" sz="2000" dirty="0">
+                <a:latin typeface="Times New Roman" panose="02020603050405020304" pitchFamily="18" charset="0"/>
+                <a:cs typeface="Times New Roman" panose="02020603050405020304" pitchFamily="18" charset="0"/>
+              </a:rPr>
+              <a:t>: apresentação (</a:t>
+            </a:r>
+            <a:r>
+              <a:rPr lang="pt-BR" sz="2000" b="1" dirty="0">
+                <a:solidFill>
+                  <a:srgbClr val="FF0000"/>
+                </a:solidFill>
+                <a:latin typeface="Times New Roman" panose="02020603050405020304" pitchFamily="18" charset="0"/>
+                <a:cs typeface="Times New Roman" panose="02020603050405020304" pitchFamily="18" charset="0"/>
+              </a:rPr>
+              <a:t>08 min</a:t>
+            </a:r>
+            <a:r>
+              <a:rPr lang="pt-BR" sz="2000" dirty="0">
+                <a:latin typeface="Times New Roman" panose="02020603050405020304" pitchFamily="18" charset="0"/>
+                <a:cs typeface="Times New Roman" panose="02020603050405020304" pitchFamily="18" charset="0"/>
+              </a:rPr>
+              <a:t>)</a:t>
+            </a:r>
+          </a:p>
+        </p:txBody>
+      </p:sp>
+    </p:spTree>
+    <p:extLst>
+      <p:ext uri="{BB962C8B-B14F-4D97-AF65-F5344CB8AC3E}">
+        <p14:creationId xmlns:p14="http://schemas.microsoft.com/office/powerpoint/2010/main" val="2976682751"/>
+      </p:ext>
+    </p:extLst>
+  </p:cSld>
+  <p:clrMapOvr>
+    <a:masterClrMapping/>
+  </p:clrMapOvr>
+  <p:transition spd="med"/>
+</p:sld>
+</file>
+
+<file path=ppt/slides/slide14.xml><?xml version="1.0" encoding="utf-8"?>
+<p:sld xmlns:a="http://schemas.openxmlformats.org/drawingml/2006/main" xmlns:r="http://schemas.openxmlformats.org/officeDocument/2006/relationships" xmlns:p="http://schemas.openxmlformats.org/presentationml/2006/main">
+  <p:cSld>
+    <p:spTree>
+      <p:nvGrpSpPr>
+        <p:cNvPr id="1" name="">
+          <a:extLst>
+            <a:ext uri="{FF2B5EF4-FFF2-40B4-BE49-F238E27FC236}">
+              <a16:creationId xmlns:a16="http://schemas.microsoft.com/office/drawing/2014/main" id="{36494CA4-E5E3-037A-5250-D5E02B7EAFD5}"/>
+            </a:ext>
+          </a:extLst>
+        </p:cNvPr>
+        <p:cNvGrpSpPr/>
+        <p:nvPr/>
+      </p:nvGrpSpPr>
+      <p:grpSpPr>
+        <a:xfrm>
+          <a:off x="0" y="0"/>
+          <a:ext cx="0" cy="0"/>
+          <a:chOff x="0" y="0"/>
+          <a:chExt cx="0" cy="0"/>
+        </a:xfrm>
+      </p:grpSpPr>
+      <p:sp>
+        <p:nvSpPr>
+          <p:cNvPr id="6" name="Title 1">
+            <a:extLst>
+              <a:ext uri="{FF2B5EF4-FFF2-40B4-BE49-F238E27FC236}">
+                <a16:creationId xmlns:a16="http://schemas.microsoft.com/office/drawing/2014/main" id="{A55ADCC5-FC96-1E83-FDA8-3A03745E6139}"/>
+              </a:ext>
+            </a:extLst>
+          </p:cNvPr>
+          <p:cNvSpPr>
+            <a:spLocks noGrp="1"/>
+          </p:cNvSpPr>
+          <p:nvPr>
+            <p:ph type="title"/>
+          </p:nvPr>
+        </p:nvSpPr>
+        <p:spPr>
+          <a:xfrm>
+            <a:off x="457200" y="205980"/>
+            <a:ext cx="8229600" cy="857251"/>
+          </a:xfrm>
+        </p:spPr>
+        <p:txBody>
+          <a:bodyPr>
+            <a:normAutofit/>
+          </a:bodyPr>
+          <a:lstStyle/>
+          <a:p>
+            <a:r>
+              <a:rPr lang="en-US" b="1" dirty="0" err="1">
+                <a:solidFill>
+                  <a:srgbClr val="0070C0"/>
+                </a:solidFill>
+              </a:rPr>
+              <a:t>Conclusão</a:t>
+            </a:r>
+            <a:endParaRPr lang="en-US" b="1" dirty="0">
+              <a:solidFill>
+                <a:srgbClr val="0070C0"/>
+              </a:solidFill>
+            </a:endParaRPr>
+          </a:p>
+        </p:txBody>
+      </p:sp>
+      <p:sp>
+        <p:nvSpPr>
+          <p:cNvPr id="8" name="Text Placeholder 2">
+            <a:extLst>
+              <a:ext uri="{FF2B5EF4-FFF2-40B4-BE49-F238E27FC236}">
+                <a16:creationId xmlns:a16="http://schemas.microsoft.com/office/drawing/2014/main" id="{24611900-AB91-DD17-67BB-8E2E6DD8A34F}"/>
+              </a:ext>
+            </a:extLst>
+          </p:cNvPr>
+          <p:cNvSpPr>
+            <a:spLocks noGrp="1"/>
+          </p:cNvSpPr>
+          <p:nvPr>
+            <p:ph type="body" sz="half" idx="1"/>
+          </p:nvPr>
+        </p:nvSpPr>
+        <p:spPr>
+          <a:xfrm>
+            <a:off x="142865" y="1035050"/>
+            <a:ext cx="8865056" cy="3994150"/>
+          </a:xfrm>
+        </p:spPr>
+        <p:txBody>
+          <a:bodyPr>
+            <a:noAutofit/>
+          </a:bodyPr>
+          <a:lstStyle/>
+          <a:p>
+            <a:pPr>
+              <a:buFont typeface="Wingdings" panose="05000000000000000000" pitchFamily="2" charset="2"/>
+              <a:buChar char="ü"/>
+            </a:pPr>
+            <a:r>
+              <a:rPr lang="pt-BR" sz="2200" b="1" dirty="0">
+                <a:latin typeface="Times New Roman" panose="02020603050405020304" pitchFamily="18" charset="0"/>
+                <a:cs typeface="Times New Roman" panose="02020603050405020304" pitchFamily="18" charset="0"/>
+              </a:rPr>
+              <a:t>PETI</a:t>
+            </a:r>
+            <a:r>
+              <a:rPr lang="pt-BR" sz="2200" dirty="0">
+                <a:latin typeface="Times New Roman" panose="02020603050405020304" pitchFamily="18" charset="0"/>
+                <a:cs typeface="Times New Roman" panose="02020603050405020304" pitchFamily="18" charset="0"/>
+              </a:rPr>
+              <a:t> conecta </a:t>
+            </a:r>
+            <a:r>
+              <a:rPr lang="pt-BR" sz="2200" b="1" dirty="0">
+                <a:latin typeface="Times New Roman" panose="02020603050405020304" pitchFamily="18" charset="0"/>
+                <a:cs typeface="Times New Roman" panose="02020603050405020304" pitchFamily="18" charset="0"/>
+              </a:rPr>
+              <a:t>TI</a:t>
+            </a:r>
+            <a:r>
+              <a:rPr lang="pt-BR" sz="2200" dirty="0">
+                <a:latin typeface="Times New Roman" panose="02020603050405020304" pitchFamily="18" charset="0"/>
+                <a:cs typeface="Times New Roman" panose="02020603050405020304" pitchFamily="18" charset="0"/>
+              </a:rPr>
+              <a:t> à estratégia</a:t>
+            </a:r>
+          </a:p>
+          <a:p>
+            <a:pPr>
+              <a:buFont typeface="Wingdings" panose="05000000000000000000" pitchFamily="2" charset="2"/>
+              <a:buChar char="ü"/>
+            </a:pPr>
+            <a:endParaRPr lang="pt-BR" sz="2200" dirty="0">
+              <a:latin typeface="Times New Roman" panose="02020603050405020304" pitchFamily="18" charset="0"/>
+              <a:cs typeface="Times New Roman" panose="02020603050405020304" pitchFamily="18" charset="0"/>
+            </a:endParaRPr>
+          </a:p>
+          <a:p>
+            <a:pPr>
+              <a:buFont typeface="Wingdings" panose="05000000000000000000" pitchFamily="2" charset="2"/>
+              <a:buChar char="ü"/>
+            </a:pPr>
+            <a:r>
+              <a:rPr lang="pt-BR" sz="2200" b="1" dirty="0">
+                <a:solidFill>
+                  <a:srgbClr val="FF0000"/>
+                </a:solidFill>
+                <a:latin typeface="Times New Roman" panose="02020603050405020304" pitchFamily="18" charset="0"/>
+                <a:cs typeface="Times New Roman" panose="02020603050405020304" pitchFamily="18" charset="0"/>
+              </a:rPr>
+              <a:t>PDTI</a:t>
+            </a:r>
+            <a:r>
+              <a:rPr lang="pt-BR" sz="2200" dirty="0">
+                <a:latin typeface="Times New Roman" panose="02020603050405020304" pitchFamily="18" charset="0"/>
+                <a:cs typeface="Times New Roman" panose="02020603050405020304" pitchFamily="18" charset="0"/>
+              </a:rPr>
+              <a:t> transforma estratégia em ação</a:t>
+            </a:r>
+          </a:p>
+          <a:p>
+            <a:pPr>
+              <a:buFont typeface="Wingdings" panose="05000000000000000000" pitchFamily="2" charset="2"/>
+              <a:buChar char="ü"/>
+            </a:pPr>
+            <a:endParaRPr lang="pt-BR" sz="2200" dirty="0">
+              <a:latin typeface="Times New Roman" panose="02020603050405020304" pitchFamily="18" charset="0"/>
+              <a:cs typeface="Times New Roman" panose="02020603050405020304" pitchFamily="18" charset="0"/>
+            </a:endParaRPr>
+          </a:p>
+          <a:p>
+            <a:pPr>
+              <a:buFont typeface="Wingdings" panose="05000000000000000000" pitchFamily="2" charset="2"/>
+              <a:buChar char="ü"/>
+            </a:pPr>
+            <a:r>
+              <a:rPr lang="pt-BR" sz="2200" b="1" dirty="0">
+                <a:latin typeface="Times New Roman" panose="02020603050405020304" pitchFamily="18" charset="0"/>
+                <a:cs typeface="Times New Roman" panose="02020603050405020304" pitchFamily="18" charset="0"/>
+              </a:rPr>
+              <a:t>Terceirização</a:t>
+            </a:r>
+            <a:r>
+              <a:rPr lang="pt-BR" sz="2200" dirty="0">
+                <a:latin typeface="Times New Roman" panose="02020603050405020304" pitchFamily="18" charset="0"/>
+                <a:cs typeface="Times New Roman" panose="02020603050405020304" pitchFamily="18" charset="0"/>
+              </a:rPr>
+              <a:t> é decisão estratégica</a:t>
+            </a:r>
+          </a:p>
+          <a:p>
+            <a:pPr>
+              <a:buFont typeface="Wingdings" panose="05000000000000000000" pitchFamily="2" charset="2"/>
+              <a:buChar char="ü"/>
+            </a:pPr>
+            <a:endParaRPr lang="pt-BR" sz="2200" dirty="0">
+              <a:latin typeface="Times New Roman" panose="02020603050405020304" pitchFamily="18" charset="0"/>
+              <a:cs typeface="Times New Roman" panose="02020603050405020304" pitchFamily="18" charset="0"/>
+            </a:endParaRPr>
+          </a:p>
+          <a:p>
+            <a:pPr marL="0" indent="0">
+              <a:buNone/>
+            </a:pPr>
+            <a:endParaRPr lang="pt-BR" sz="2200" dirty="0">
+              <a:latin typeface="Times New Roman" panose="02020603050405020304" pitchFamily="18" charset="0"/>
+              <a:cs typeface="Times New Roman" panose="02020603050405020304" pitchFamily="18" charset="0"/>
+            </a:endParaRPr>
+          </a:p>
+          <a:p>
+            <a:pPr marL="0" indent="0">
+              <a:buNone/>
+            </a:pPr>
+            <a:r>
+              <a:rPr lang="pt-BR" sz="2200" b="1" dirty="0">
+                <a:latin typeface="Times New Roman" panose="02020603050405020304" pitchFamily="18" charset="0"/>
+                <a:cs typeface="Times New Roman" panose="02020603050405020304" pitchFamily="18" charset="0"/>
+              </a:rPr>
+              <a:t>TI</a:t>
+            </a:r>
+            <a:r>
+              <a:rPr lang="pt-BR" sz="2200" dirty="0">
+                <a:latin typeface="Times New Roman" panose="02020603050405020304" pitchFamily="18" charset="0"/>
+                <a:cs typeface="Times New Roman" panose="02020603050405020304" pitchFamily="18" charset="0"/>
+              </a:rPr>
+              <a:t> não é suporte; é parte da </a:t>
+            </a:r>
+            <a:r>
+              <a:rPr lang="pt-BR" sz="2200" b="1" dirty="0">
+                <a:latin typeface="Times New Roman" panose="02020603050405020304" pitchFamily="18" charset="0"/>
+                <a:cs typeface="Times New Roman" panose="02020603050405020304" pitchFamily="18" charset="0"/>
+              </a:rPr>
+              <a:t>estratégia do negócio</a:t>
+            </a:r>
+            <a:r>
+              <a:rPr lang="pt-BR" sz="2200" dirty="0">
+                <a:latin typeface="Times New Roman" panose="02020603050405020304" pitchFamily="18" charset="0"/>
+                <a:cs typeface="Times New Roman" panose="02020603050405020304" pitchFamily="18" charset="0"/>
+              </a:rPr>
+              <a:t>.</a:t>
+            </a:r>
+          </a:p>
+        </p:txBody>
+      </p:sp>
+    </p:spTree>
+    <p:extLst>
+      <p:ext uri="{BB962C8B-B14F-4D97-AF65-F5344CB8AC3E}">
+        <p14:creationId xmlns:p14="http://schemas.microsoft.com/office/powerpoint/2010/main" val="3667212659"/>
+      </p:ext>
+    </p:extLst>
+  </p:cSld>
+  <p:clrMapOvr>
+    <a:masterClrMapping/>
+  </p:clrMapOvr>
+  <p:transition spd="med"/>
+</p:sld>
+</file>
+
+<file path=ppt/slides/slide15.xml><?xml version="1.0" encoding="utf-8"?>
+<p:sld xmlns:a="http://schemas.openxmlformats.org/drawingml/2006/main" xmlns:r="http://schemas.openxmlformats.org/officeDocument/2006/relationships" xmlns:p="http://schemas.openxmlformats.org/presentationml/2006/main">
+  <p:cSld>
+    <p:spTree>
+      <p:nvGrpSpPr>
+        <p:cNvPr id="1" name=""/>
+        <p:cNvGrpSpPr/>
+        <p:nvPr/>
+      </p:nvGrpSpPr>
+      <p:grpSpPr>
+        <a:xfrm>
+          <a:off x="0" y="0"/>
+          <a:ext cx="0" cy="0"/>
+          <a:chOff x="0" y="0"/>
+          <a:chExt cx="0" cy="0"/>
+        </a:xfrm>
+      </p:grpSpPr>
+      <p:sp>
+        <p:nvSpPr>
+          <p:cNvPr id="6" name="Title 1"/>
+          <p:cNvSpPr>
+            <a:spLocks noGrp="1"/>
+          </p:cNvSpPr>
+          <p:nvPr>
+            <p:ph type="title"/>
+          </p:nvPr>
+        </p:nvSpPr>
+        <p:spPr>
+          <a:xfrm>
+            <a:off x="457200" y="205980"/>
+            <a:ext cx="8229600" cy="857251"/>
+          </a:xfrm>
+        </p:spPr>
+        <p:txBody>
+          <a:bodyPr>
+            <a:normAutofit/>
+          </a:bodyPr>
+          <a:lstStyle/>
+          <a:p>
+            <a:r>
+              <a:rPr lang="en-US" b="1" dirty="0" err="1">
+                <a:solidFill>
+                  <a:srgbClr val="0070C0"/>
+                </a:solidFill>
+              </a:rPr>
+              <a:t>Referências</a:t>
+            </a:r>
+            <a:r>
+              <a:rPr lang="en-US" b="1" dirty="0">
+                <a:solidFill>
+                  <a:srgbClr val="0070C0"/>
+                </a:solidFill>
+              </a:rPr>
+              <a:t> </a:t>
+            </a:r>
+            <a:r>
+              <a:rPr lang="en-US" b="1" dirty="0" err="1">
+                <a:solidFill>
+                  <a:srgbClr val="0070C0"/>
+                </a:solidFill>
+              </a:rPr>
+              <a:t>Bibliográficas</a:t>
+            </a:r>
+            <a:endParaRPr lang="en-US" b="1" dirty="0">
+              <a:solidFill>
+                <a:srgbClr val="0070C0"/>
+              </a:solidFill>
+            </a:endParaRPr>
+          </a:p>
+        </p:txBody>
+      </p:sp>
+      <p:sp>
+        <p:nvSpPr>
+          <p:cNvPr id="8" name="Text Placeholder 2"/>
+          <p:cNvSpPr>
+            <a:spLocks noGrp="1"/>
+          </p:cNvSpPr>
+          <p:nvPr>
+            <p:ph type="body" sz="half" idx="1"/>
+          </p:nvPr>
+        </p:nvSpPr>
+        <p:spPr>
+          <a:xfrm>
+            <a:off x="139472" y="1063230"/>
+            <a:ext cx="8865056" cy="3874289"/>
+          </a:xfrm>
+        </p:spPr>
+        <p:txBody>
+          <a:bodyPr>
+            <a:noAutofit/>
+          </a:bodyPr>
+          <a:lstStyle/>
+          <a:p>
+            <a:pPr marL="0" indent="0">
+              <a:buNone/>
+            </a:pPr>
+            <a:r>
+              <a:rPr lang="pt-BR" sz="1800" dirty="0">
+                <a:latin typeface="Times New Roman" panose="02020603050405020304" pitchFamily="18" charset="0"/>
+                <a:cs typeface="Times New Roman" panose="02020603050405020304" pitchFamily="18" charset="0"/>
+              </a:rPr>
+              <a:t>[1] </a:t>
+            </a:r>
+            <a:r>
+              <a:rPr lang="pt-BR" sz="1800" b="1" dirty="0">
+                <a:latin typeface="Times New Roman" panose="02020603050405020304" pitchFamily="18" charset="0"/>
+                <a:cs typeface="Times New Roman" panose="02020603050405020304" pitchFamily="18" charset="0"/>
+              </a:rPr>
+              <a:t>REZENDE, Denis Alcides. </a:t>
+            </a:r>
+          </a:p>
+          <a:p>
+            <a:pPr marL="0" indent="0">
+              <a:buNone/>
+            </a:pPr>
+            <a:r>
+              <a:rPr lang="pt-BR" sz="1800" dirty="0">
+                <a:latin typeface="Times New Roman" panose="02020603050405020304" pitchFamily="18" charset="0"/>
+                <a:cs typeface="Times New Roman" panose="02020603050405020304" pitchFamily="18" charset="0"/>
+              </a:rPr>
+              <a:t>Planejamento estratégico para organizações privadas e públicas. RJ: </a:t>
+            </a:r>
+            <a:r>
+              <a:rPr lang="pt-BR" sz="1800" dirty="0" err="1">
+                <a:latin typeface="Times New Roman" panose="02020603050405020304" pitchFamily="18" charset="0"/>
+                <a:cs typeface="Times New Roman" panose="02020603050405020304" pitchFamily="18" charset="0"/>
+              </a:rPr>
+              <a:t>Brasport</a:t>
+            </a:r>
+            <a:r>
+              <a:rPr lang="pt-BR" sz="1800" dirty="0">
+                <a:latin typeface="Times New Roman" panose="02020603050405020304" pitchFamily="18" charset="0"/>
+                <a:cs typeface="Times New Roman" panose="02020603050405020304" pitchFamily="18" charset="0"/>
+              </a:rPr>
+              <a:t>, 2018.</a:t>
+            </a:r>
+          </a:p>
+          <a:p>
+            <a:pPr marL="0" indent="0">
+              <a:buNone/>
+            </a:pPr>
+            <a:endParaRPr lang="pt-BR" sz="1800" dirty="0">
+              <a:latin typeface="Times New Roman" panose="02020603050405020304" pitchFamily="18" charset="0"/>
+              <a:cs typeface="Times New Roman" panose="02020603050405020304" pitchFamily="18" charset="0"/>
+            </a:endParaRPr>
+          </a:p>
+          <a:p>
+            <a:pPr marL="0" indent="0">
+              <a:buNone/>
+            </a:pPr>
+            <a:r>
+              <a:rPr lang="pt-BR" sz="1800" dirty="0">
+                <a:latin typeface="Times New Roman" panose="02020603050405020304" pitchFamily="18" charset="0"/>
+                <a:cs typeface="Times New Roman" panose="02020603050405020304" pitchFamily="18" charset="0"/>
+              </a:rPr>
+              <a:t>[2] </a:t>
+            </a:r>
+            <a:r>
+              <a:rPr lang="pt-BR" sz="1800" b="1" dirty="0">
+                <a:latin typeface="Times New Roman" panose="02020603050405020304" pitchFamily="18" charset="0"/>
+                <a:cs typeface="Times New Roman" panose="02020603050405020304" pitchFamily="18" charset="0"/>
+              </a:rPr>
+              <a:t>TURBAN, Efraim et al. </a:t>
+            </a:r>
+          </a:p>
+          <a:p>
+            <a:pPr marL="0" indent="0">
+              <a:buNone/>
+            </a:pPr>
+            <a:r>
+              <a:rPr lang="pt-BR" sz="1800" dirty="0">
+                <a:latin typeface="Times New Roman" panose="02020603050405020304" pitchFamily="18" charset="0"/>
+                <a:cs typeface="Times New Roman" panose="02020603050405020304" pitchFamily="18" charset="0"/>
+              </a:rPr>
+              <a:t>Tecnologia da Informação para Gestão. 10. ed. Porto Alegre: Bookman, 2020.</a:t>
+            </a:r>
+          </a:p>
+          <a:p>
+            <a:pPr marL="0" indent="0">
+              <a:buNone/>
+            </a:pPr>
+            <a:endParaRPr lang="pt-BR" sz="1800" dirty="0">
+              <a:latin typeface="Times New Roman" panose="02020603050405020304" pitchFamily="18" charset="0"/>
+              <a:cs typeface="Times New Roman" panose="02020603050405020304" pitchFamily="18" charset="0"/>
+            </a:endParaRPr>
+          </a:p>
+          <a:p>
+            <a:pPr marL="0" indent="0">
+              <a:buNone/>
+            </a:pPr>
+            <a:r>
+              <a:rPr lang="pt-BR" sz="1800" dirty="0">
+                <a:latin typeface="Times New Roman" panose="02020603050405020304" pitchFamily="18" charset="0"/>
+                <a:cs typeface="Times New Roman" panose="02020603050405020304" pitchFamily="18" charset="0"/>
+              </a:rPr>
+              <a:t>[3] </a:t>
+            </a:r>
+            <a:r>
+              <a:rPr lang="pt-BR" sz="1800" b="1" dirty="0">
+                <a:latin typeface="Times New Roman" panose="02020603050405020304" pitchFamily="18" charset="0"/>
+                <a:cs typeface="Times New Roman" panose="02020603050405020304" pitchFamily="18" charset="0"/>
+              </a:rPr>
+              <a:t>BRASIL. Ministério da Economia. </a:t>
+            </a:r>
+          </a:p>
+          <a:p>
+            <a:pPr marL="0" indent="0">
+              <a:buNone/>
+            </a:pPr>
+            <a:r>
+              <a:rPr lang="pt-BR" sz="1800" dirty="0">
+                <a:latin typeface="Times New Roman" panose="02020603050405020304" pitchFamily="18" charset="0"/>
+                <a:cs typeface="Times New Roman" panose="02020603050405020304" pitchFamily="18" charset="0"/>
+              </a:rPr>
+              <a:t>Guia de Elaboração PDTI. Brasília, 2023. Disponível em: </a:t>
+            </a:r>
+            <a:r>
+              <a:rPr lang="pt-BR" sz="1800" dirty="0">
+                <a:latin typeface="Times New Roman" panose="02020603050405020304" pitchFamily="18" charset="0"/>
+                <a:cs typeface="Times New Roman" panose="02020603050405020304" pitchFamily="18" charset="0"/>
+                <a:hlinkClick r:id="rId3"/>
+              </a:rPr>
+              <a:t>https://www.gov.br/governodigital</a:t>
+            </a:r>
+            <a:endParaRPr lang="pt-BR" sz="1800" dirty="0">
+              <a:latin typeface="Times New Roman" panose="02020603050405020304" pitchFamily="18" charset="0"/>
+              <a:cs typeface="Times New Roman" panose="02020603050405020304" pitchFamily="18" charset="0"/>
+            </a:endParaRPr>
+          </a:p>
+          <a:p>
+            <a:pPr marL="0" indent="0">
+              <a:buNone/>
+            </a:pPr>
+            <a:endParaRPr lang="pt-BR" sz="1800" dirty="0">
+              <a:latin typeface="Times New Roman" panose="02020603050405020304" pitchFamily="18" charset="0"/>
+              <a:cs typeface="Times New Roman" panose="02020603050405020304" pitchFamily="18" charset="0"/>
+            </a:endParaRPr>
+          </a:p>
+          <a:p>
+            <a:pPr marL="0" indent="0">
+              <a:buNone/>
+            </a:pPr>
+            <a:r>
+              <a:rPr lang="pt-BR" sz="1800" dirty="0">
+                <a:latin typeface="Times New Roman" panose="02020603050405020304" pitchFamily="18" charset="0"/>
+                <a:cs typeface="Times New Roman" panose="02020603050405020304" pitchFamily="18" charset="0"/>
+              </a:rPr>
+              <a:t>[4] </a:t>
+            </a:r>
+            <a:r>
+              <a:rPr lang="pt-BR" sz="1800" b="1" dirty="0">
+                <a:latin typeface="Times New Roman" panose="02020603050405020304" pitchFamily="18" charset="0"/>
+                <a:cs typeface="Times New Roman" panose="02020603050405020304" pitchFamily="18" charset="0"/>
+              </a:rPr>
+              <a:t>LAUDON, Kenneth C.; LAUDON, Jane P. </a:t>
+            </a:r>
+          </a:p>
+          <a:p>
+            <a:pPr marL="0" indent="0">
+              <a:buNone/>
+            </a:pPr>
+            <a:r>
+              <a:rPr lang="pt-BR" sz="1800" dirty="0">
+                <a:latin typeface="Times New Roman" panose="02020603050405020304" pitchFamily="18" charset="0"/>
+                <a:cs typeface="Times New Roman" panose="02020603050405020304" pitchFamily="18" charset="0"/>
+              </a:rPr>
+              <a:t>Sistemas de Informação Gerenciais. 16. ed. São Paulo: Pearson, 2021.</a:t>
+            </a:r>
+          </a:p>
+        </p:txBody>
+      </p:sp>
+    </p:spTree>
+    <p:extLst>
+      <p:ext uri="{BB962C8B-B14F-4D97-AF65-F5344CB8AC3E}">
+        <p14:creationId xmlns:p14="http://schemas.microsoft.com/office/powerpoint/2010/main" val="1115311843"/>
+      </p:ext>
+    </p:extLst>
+  </p:cSld>
+  <p:clrMapOvr>
+    <a:masterClrMapping/>
+  </p:clrMapOvr>
+  <p:transition spd="med"/>
+</p:sld>
+</file>
+
+<file path=ppt/slides/slide16.xml><?xml version="1.0" encoding="utf-8"?>
+<p:sld xmlns:a="http://schemas.openxmlformats.org/drawingml/2006/main" xmlns:r="http://schemas.openxmlformats.org/officeDocument/2006/relationships" xmlns:p="http://schemas.openxmlformats.org/presentationml/2006/main">
+  <p:cSld>
+    <p:spTree>
+      <p:nvGrpSpPr>
+        <p:cNvPr id="1" name=""/>
+        <p:cNvGrpSpPr/>
+        <p:nvPr/>
+      </p:nvGrpSpPr>
+      <p:grpSpPr>
+        <a:xfrm>
+          <a:off x="0" y="0"/>
+          <a:ext cx="0" cy="0"/>
+          <a:chOff x="0" y="0"/>
+          <a:chExt cx="0" cy="0"/>
+        </a:xfrm>
+      </p:grpSpPr>
+      <p:pic>
+        <p:nvPicPr>
+          <p:cNvPr id="112" name="Picture 6" descr="Picture 6"/>
+          <p:cNvPicPr>
+            <a:picLocks noChangeAspect="1"/>
+          </p:cNvPicPr>
+          <p:nvPr/>
+        </p:nvPicPr>
+        <p:blipFill>
+          <a:blip r:embed="rId2"/>
+          <a:stretch>
+            <a:fillRect/>
+          </a:stretch>
+        </p:blipFill>
+        <p:spPr>
+          <a:xfrm>
+            <a:off x="0" y="0"/>
+            <a:ext cx="9144000" cy="5143500"/>
+          </a:xfrm>
+          <a:prstGeom prst="rect">
+            <a:avLst/>
+          </a:prstGeom>
+          <a:ln w="12700">
+            <a:miter lim="400000"/>
+            <a:headEnd/>
+            <a:tailEnd/>
+          </a:ln>
+        </p:spPr>
+      </p:pic>
+      <p:pic>
+        <p:nvPicPr>
+          <p:cNvPr id="114" name="Picture 5" descr="Picture 5"/>
+          <p:cNvPicPr>
+            <a:picLocks noChangeAspect="1"/>
+          </p:cNvPicPr>
+          <p:nvPr/>
+        </p:nvPicPr>
+        <p:blipFill>
+          <a:blip r:embed="rId3"/>
+          <a:stretch>
+            <a:fillRect/>
+          </a:stretch>
+        </p:blipFill>
+        <p:spPr>
+          <a:xfrm>
+            <a:off x="469900" y="0"/>
+            <a:ext cx="4391984" cy="171450"/>
+          </a:xfrm>
+          <a:prstGeom prst="rect">
+            <a:avLst/>
+          </a:prstGeom>
+          <a:ln w="12700">
+            <a:miter lim="400000"/>
+            <a:headEnd/>
+            <a:tailEnd/>
+          </a:ln>
+        </p:spPr>
+      </p:pic>
+      <p:sp>
+        <p:nvSpPr>
+          <p:cNvPr id="3" name="Título 2"/>
+          <p:cNvSpPr>
+            <a:spLocks noGrp="1"/>
+          </p:cNvSpPr>
+          <p:nvPr>
+            <p:ph type="title"/>
+          </p:nvPr>
+        </p:nvSpPr>
+        <p:spPr>
+          <a:xfrm>
+            <a:off x="285751" y="2386770"/>
+            <a:ext cx="8615364" cy="1102519"/>
+          </a:xfrm>
+        </p:spPr>
+        <p:txBody>
+          <a:bodyPr>
+            <a:noAutofit/>
+          </a:bodyPr>
+          <a:lstStyle/>
+          <a:p>
+            <a:r>
+              <a:rPr lang="pt-BR" sz="4800" b="1" dirty="0">
+                <a:solidFill>
+                  <a:schemeClr val="bg1"/>
+                </a:solidFill>
+              </a:rPr>
+              <a:t>GESTÃO DE INFORMAÇÃO</a:t>
+            </a:r>
+          </a:p>
+        </p:txBody>
+      </p:sp>
+      <p:sp>
+        <p:nvSpPr>
+          <p:cNvPr id="6" name="Título 2"/>
+          <p:cNvSpPr txBox="1"/>
+          <p:nvPr/>
+        </p:nvSpPr>
+        <p:spPr>
+          <a:xfrm>
+            <a:off x="975683" y="3866663"/>
+            <a:ext cx="7772400" cy="1102519"/>
+          </a:xfrm>
+          <a:prstGeom prst="rect">
+            <a:avLst/>
+          </a:prstGeom>
+          <a:ln w="12700">
+            <a:miter lim="400000"/>
+          </a:ln>
+        </p:spPr>
+        <p:txBody>
+          <a:bodyPr lIns="45718" tIns="45718" rIns="45718" bIns="45718" anchor="ctr">
+            <a:noAutofit/>
+          </a:bodyPr>
+          <a:lstStyle>
+            <a:lvl1pPr marL="0" marR="0" indent="0" algn="ctr" defTabSz="457200" rtl="0" latinLnBrk="0">
+              <a:lnSpc>
+                <a:spcPct val="100000"/>
+              </a:lnSpc>
+              <a:spcBef>
+                <a:spcPts val="0"/>
+              </a:spcBef>
+              <a:spcAft>
+                <a:spcPts val="0"/>
+              </a:spcAft>
+              <a:buClrTx/>
+              <a:buSzTx/>
+              <a:buFontTx/>
+              <a:buNone/>
+              <a:defRPr sz="4400" b="0" i="0" u="none" strike="noStrike" cap="none" spc="0" baseline="0">
+                <a:ln>
+                  <a:noFill/>
+                </a:ln>
+                <a:solidFill>
+                  <a:srgbClr val="000000"/>
+                </a:solidFill>
+                <a:uFillTx/>
+                <a:latin typeface="+mj-lt"/>
+                <a:ea typeface="+mj-ea"/>
+                <a:cs typeface="+mj-cs"/>
+                <a:sym typeface="Calibri"/>
+              </a:defRPr>
+            </a:lvl1pPr>
+            <a:lvl2pPr marL="0" marR="0" indent="0" algn="ctr" defTabSz="457200" rtl="0" latinLnBrk="0">
+              <a:lnSpc>
+                <a:spcPct val="100000"/>
+              </a:lnSpc>
+              <a:spcBef>
+                <a:spcPts val="0"/>
+              </a:spcBef>
+              <a:spcAft>
+                <a:spcPts val="0"/>
+              </a:spcAft>
+              <a:buClrTx/>
+              <a:buSzTx/>
+              <a:buFontTx/>
+              <a:buNone/>
+              <a:defRPr sz="4400" b="0" i="0" u="none" strike="noStrike" cap="none" spc="0" baseline="0">
+                <a:ln>
+                  <a:noFill/>
+                </a:ln>
+                <a:solidFill>
+                  <a:srgbClr val="000000"/>
+                </a:solidFill>
+                <a:uFillTx/>
+                <a:latin typeface="+mj-lt"/>
+                <a:ea typeface="+mj-ea"/>
+                <a:cs typeface="+mj-cs"/>
+                <a:sym typeface="Calibri"/>
+              </a:defRPr>
+            </a:lvl2pPr>
+            <a:lvl3pPr marL="0" marR="0" indent="0" algn="ctr" defTabSz="457200" rtl="0" latinLnBrk="0">
+              <a:lnSpc>
+                <a:spcPct val="100000"/>
+              </a:lnSpc>
+              <a:spcBef>
+                <a:spcPts val="0"/>
+              </a:spcBef>
+              <a:spcAft>
+                <a:spcPts val="0"/>
+              </a:spcAft>
+              <a:buClrTx/>
+              <a:buSzTx/>
+              <a:buFontTx/>
+              <a:buNone/>
+              <a:defRPr sz="4400" b="0" i="0" u="none" strike="noStrike" cap="none" spc="0" baseline="0">
+                <a:ln>
+                  <a:noFill/>
+                </a:ln>
+                <a:solidFill>
+                  <a:srgbClr val="000000"/>
+                </a:solidFill>
+                <a:uFillTx/>
+                <a:latin typeface="+mj-lt"/>
+                <a:ea typeface="+mj-ea"/>
+                <a:cs typeface="+mj-cs"/>
+                <a:sym typeface="Calibri"/>
+              </a:defRPr>
+            </a:lvl3pPr>
+            <a:lvl4pPr marL="0" marR="0" indent="0" algn="ctr" defTabSz="457200" rtl="0" latinLnBrk="0">
+              <a:lnSpc>
+                <a:spcPct val="100000"/>
+              </a:lnSpc>
+              <a:spcBef>
+                <a:spcPts val="0"/>
+              </a:spcBef>
+              <a:spcAft>
+                <a:spcPts val="0"/>
+              </a:spcAft>
+              <a:buClrTx/>
+              <a:buSzTx/>
+              <a:buFontTx/>
+              <a:buNone/>
+              <a:defRPr sz="4400" b="0" i="0" u="none" strike="noStrike" cap="none" spc="0" baseline="0">
+                <a:ln>
+                  <a:noFill/>
+                </a:ln>
+                <a:solidFill>
+                  <a:srgbClr val="000000"/>
+                </a:solidFill>
+                <a:uFillTx/>
+                <a:latin typeface="+mj-lt"/>
+                <a:ea typeface="+mj-ea"/>
+                <a:cs typeface="+mj-cs"/>
+                <a:sym typeface="Calibri"/>
+              </a:defRPr>
+            </a:lvl4pPr>
+            <a:lvl5pPr marL="0" marR="0" indent="0" algn="ctr" defTabSz="457200" rtl="0" latinLnBrk="0">
+              <a:lnSpc>
+                <a:spcPct val="100000"/>
+              </a:lnSpc>
+              <a:spcBef>
+                <a:spcPts val="0"/>
+              </a:spcBef>
+              <a:spcAft>
+                <a:spcPts val="0"/>
+              </a:spcAft>
+              <a:buClrTx/>
+              <a:buSzTx/>
+              <a:buFontTx/>
+              <a:buNone/>
+              <a:defRPr sz="4400" b="0" i="0" u="none" strike="noStrike" cap="none" spc="0" baseline="0">
+                <a:ln>
+                  <a:noFill/>
+                </a:ln>
+                <a:solidFill>
+                  <a:srgbClr val="000000"/>
+                </a:solidFill>
+                <a:uFillTx/>
+                <a:latin typeface="+mj-lt"/>
+                <a:ea typeface="+mj-ea"/>
+                <a:cs typeface="+mj-cs"/>
+                <a:sym typeface="Calibri"/>
+              </a:defRPr>
+            </a:lvl5pPr>
+            <a:lvl6pPr marL="0" marR="0" indent="0" algn="ctr" defTabSz="457200" rtl="0" latinLnBrk="0">
+              <a:lnSpc>
+                <a:spcPct val="100000"/>
+              </a:lnSpc>
+              <a:spcBef>
+                <a:spcPts val="0"/>
+              </a:spcBef>
+              <a:spcAft>
+                <a:spcPts val="0"/>
+              </a:spcAft>
+              <a:buClrTx/>
+              <a:buSzTx/>
+              <a:buFontTx/>
+              <a:buNone/>
+              <a:defRPr sz="4400" b="0" i="0" u="none" strike="noStrike" cap="none" spc="0" baseline="0">
+                <a:ln>
+                  <a:noFill/>
+                </a:ln>
+                <a:solidFill>
+                  <a:srgbClr val="000000"/>
+                </a:solidFill>
+                <a:uFillTx/>
+                <a:latin typeface="+mj-lt"/>
+                <a:ea typeface="+mj-ea"/>
+                <a:cs typeface="+mj-cs"/>
+                <a:sym typeface="Calibri"/>
+              </a:defRPr>
+            </a:lvl6pPr>
+            <a:lvl7pPr marL="0" marR="0" indent="0" algn="ctr" defTabSz="457200" rtl="0" latinLnBrk="0">
+              <a:lnSpc>
+                <a:spcPct val="100000"/>
+              </a:lnSpc>
+              <a:spcBef>
+                <a:spcPts val="0"/>
+              </a:spcBef>
+              <a:spcAft>
+                <a:spcPts val="0"/>
+              </a:spcAft>
+              <a:buClrTx/>
+              <a:buSzTx/>
+              <a:buFontTx/>
+              <a:buNone/>
+              <a:defRPr sz="4400" b="0" i="0" u="none" strike="noStrike" cap="none" spc="0" baseline="0">
+                <a:ln>
+                  <a:noFill/>
+                </a:ln>
+                <a:solidFill>
+                  <a:srgbClr val="000000"/>
+                </a:solidFill>
+                <a:uFillTx/>
+                <a:latin typeface="+mj-lt"/>
+                <a:ea typeface="+mj-ea"/>
+                <a:cs typeface="+mj-cs"/>
+                <a:sym typeface="Calibri"/>
+              </a:defRPr>
+            </a:lvl7pPr>
+            <a:lvl8pPr marL="0" marR="0" indent="0" algn="ctr" defTabSz="457200" rtl="0" latinLnBrk="0">
+              <a:lnSpc>
+                <a:spcPct val="100000"/>
+              </a:lnSpc>
+              <a:spcBef>
+                <a:spcPts val="0"/>
+              </a:spcBef>
+              <a:spcAft>
+                <a:spcPts val="0"/>
+              </a:spcAft>
+              <a:buClrTx/>
+              <a:buSzTx/>
+              <a:buFontTx/>
+              <a:buNone/>
+              <a:defRPr sz="4400" b="0" i="0" u="none" strike="noStrike" cap="none" spc="0" baseline="0">
+                <a:ln>
+                  <a:noFill/>
+                </a:ln>
+                <a:solidFill>
+                  <a:srgbClr val="000000"/>
+                </a:solidFill>
+                <a:uFillTx/>
+                <a:latin typeface="+mj-lt"/>
+                <a:ea typeface="+mj-ea"/>
+                <a:cs typeface="+mj-cs"/>
+                <a:sym typeface="Calibri"/>
+              </a:defRPr>
+            </a:lvl8pPr>
+            <a:lvl9pPr marL="0" marR="0" indent="0" algn="ctr" defTabSz="457200" rtl="0" latinLnBrk="0">
+              <a:lnSpc>
+                <a:spcPct val="100000"/>
+              </a:lnSpc>
+              <a:spcBef>
+                <a:spcPts val="0"/>
+              </a:spcBef>
+              <a:spcAft>
+                <a:spcPts val="0"/>
+              </a:spcAft>
+              <a:buClrTx/>
+              <a:buSzTx/>
+              <a:buFontTx/>
+              <a:buNone/>
+              <a:defRPr sz="4400" b="0" i="0" u="none" strike="noStrike" cap="none" spc="0" baseline="0">
+                <a:ln>
+                  <a:noFill/>
+                </a:ln>
+                <a:solidFill>
+                  <a:srgbClr val="000000"/>
+                </a:solidFill>
+                <a:uFillTx/>
+                <a:latin typeface="+mj-lt"/>
+                <a:ea typeface="+mj-ea"/>
+                <a:cs typeface="+mj-cs"/>
+                <a:sym typeface="Calibri"/>
+              </a:defRPr>
+            </a:lvl9pPr>
+          </a:lstStyle>
+          <a:p>
+            <a:pPr algn="r" hangingPunct="1"/>
+            <a:r>
+              <a:rPr lang="pt-BR" sz="2000" b="1" dirty="0">
+                <a:solidFill>
+                  <a:schemeClr val="bg1"/>
+                </a:solidFill>
+              </a:rPr>
+              <a:t>Professor </a:t>
+            </a:r>
+            <a:r>
+              <a:rPr lang="pt-BR" sz="2000" b="1">
+                <a:solidFill>
+                  <a:schemeClr val="bg1"/>
+                </a:solidFill>
+              </a:rPr>
+              <a:t>M.Sc</a:t>
+            </a:r>
+            <a:r>
+              <a:rPr lang="pt-BR" sz="2000" b="1" dirty="0">
+                <a:solidFill>
+                  <a:schemeClr val="bg1"/>
+                </a:solidFill>
+              </a:rPr>
+              <a:t>. Heleno Cardoso</a:t>
+            </a:r>
+          </a:p>
+        </p:txBody>
+      </p:sp>
+      <p:pic>
+        <p:nvPicPr>
+          <p:cNvPr id="2" name="Google Shape;62;p1" descr="Imagem">
+            <a:extLst>
+              <a:ext uri="{FF2B5EF4-FFF2-40B4-BE49-F238E27FC236}">
+                <a16:creationId xmlns:a16="http://schemas.microsoft.com/office/drawing/2014/main" id="{9C895622-2963-024D-634E-EA58F5381D06}"/>
+              </a:ext>
+            </a:extLst>
+          </p:cNvPr>
+          <p:cNvPicPr preferRelativeResize="0"/>
+          <p:nvPr/>
+        </p:nvPicPr>
+        <p:blipFill rotWithShape="1">
+          <a:blip r:embed="rId4">
+            <a:alphaModFix/>
+          </a:blip>
+          <a:srcRect/>
+          <a:stretch/>
+        </p:blipFill>
+        <p:spPr>
+          <a:xfrm>
+            <a:off x="469898" y="343798"/>
+            <a:ext cx="2858518" cy="1338697"/>
+          </a:xfrm>
+          <a:prstGeom prst="rect">
+            <a:avLst/>
+          </a:prstGeom>
+          <a:noFill/>
+          <a:ln>
+            <a:noFill/>
+          </a:ln>
+        </p:spPr>
+      </p:pic>
+    </p:spTree>
+  </p:cSld>
+  <p:clrMapOvr>
+    <a:masterClrMapping/>
+  </p:clrMapOvr>
+  <p:transition spd="med"/>
+</p:sld>
+</file>
+
 <file path=ppt/slides/slide2.xml><?xml version="1.0" encoding="utf-8"?>
 <p:sld xmlns:a="http://schemas.openxmlformats.org/drawingml/2006/main" xmlns:r="http://schemas.openxmlformats.org/officeDocument/2006/relationships" xmlns:p="http://schemas.openxmlformats.org/presentationml/2006/main">
   <p:cSld>
@@ -4419,25 +7141,33 @@
           <a:p>
             <a:r>
               <a:rPr lang="pt-BR" sz="2400" dirty="0">
-                <a:latin typeface="Times New Roman" panose="02020603050405020304" pitchFamily="18" charset="0"/>
-                <a:cs typeface="Times New Roman" panose="02020603050405020304" pitchFamily="18" charset="0"/>
-              </a:rPr>
-              <a:t>Compreender o conceito de BI nas organizações</a:t>
-            </a:r>
-          </a:p>
-          <a:p>
-            <a:endParaRPr lang="pt-BR" sz="2400" dirty="0">
-              <a:latin typeface="Times New Roman" panose="02020603050405020304" pitchFamily="18" charset="0"/>
-              <a:cs typeface="Times New Roman" panose="02020603050405020304" pitchFamily="18" charset="0"/>
-            </a:endParaRPr>
-          </a:p>
-          <a:p>
+                <a:solidFill>
+                  <a:schemeClr val="tx1"/>
+                </a:solidFill>
+                <a:latin typeface="Times New Roman" panose="02020603050405020304" pitchFamily="18" charset="0"/>
+                <a:cs typeface="Times New Roman" panose="02020603050405020304" pitchFamily="18" charset="0"/>
+              </a:rPr>
+              <a:t>Compreender os conceitos de </a:t>
+            </a:r>
+            <a:r>
+              <a:rPr lang="pt-BR" sz="2400" b="1" dirty="0">
+                <a:solidFill>
+                  <a:schemeClr val="tx1"/>
+                </a:solidFill>
+                <a:latin typeface="Times New Roman" panose="02020603050405020304" pitchFamily="18" charset="0"/>
+                <a:cs typeface="Times New Roman" panose="02020603050405020304" pitchFamily="18" charset="0"/>
+              </a:rPr>
+              <a:t>PETI</a:t>
+            </a:r>
             <a:r>
               <a:rPr lang="pt-BR" sz="2400" dirty="0">
-                <a:latin typeface="Times New Roman" panose="02020603050405020304" pitchFamily="18" charset="0"/>
-                <a:cs typeface="Times New Roman" panose="02020603050405020304" pitchFamily="18" charset="0"/>
-              </a:rPr>
-              <a:t>Relacionar BI com </a:t>
+                <a:solidFill>
+                  <a:schemeClr val="tx1"/>
+                </a:solidFill>
+                <a:latin typeface="Times New Roman" panose="02020603050405020304" pitchFamily="18" charset="0"/>
+                <a:cs typeface="Times New Roman" panose="02020603050405020304" pitchFamily="18" charset="0"/>
+              </a:rPr>
+              <a:t> e </a:t>
             </a:r>
             <a:r>
               <a:rPr lang="pt-BR" sz="2400" b="1" dirty="0">
@@ -4447,76 +7177,10 @@
                 <a:latin typeface="Times New Roman" panose="02020603050405020304" pitchFamily="18" charset="0"/>
                 <a:cs typeface="Times New Roman" panose="02020603050405020304" pitchFamily="18" charset="0"/>
               </a:rPr>
-              <a:t>tomada de decisão gerencial</a:t>
-            </a:r>
-          </a:p>
-          <a:p>
-            <a:endParaRPr lang="pt-BR" sz="2400" dirty="0">
-              <a:latin typeface="Times New Roman" panose="02020603050405020304" pitchFamily="18" charset="0"/>
-              <a:cs typeface="Times New Roman" panose="02020603050405020304" pitchFamily="18" charset="0"/>
-            </a:endParaRPr>
-          </a:p>
-          <a:p>
-            <a:r>
-              <a:rPr lang="pt-BR" sz="2400" dirty="0">
-                <a:latin typeface="Times New Roman" panose="02020603050405020304" pitchFamily="18" charset="0"/>
-                <a:cs typeface="Times New Roman" panose="02020603050405020304" pitchFamily="18" charset="0"/>
-              </a:rPr>
-              <a:t>Aplicar conceitos em situações reais</a:t>
-            </a:r>
-          </a:p>
-          <a:p>
-            <a:endParaRPr lang="pt-BR" sz="2400" dirty="0">
-              <a:latin typeface="Times New Roman" panose="02020603050405020304" pitchFamily="18" charset="0"/>
-              <a:cs typeface="Times New Roman" panose="02020603050405020304" pitchFamily="18" charset="0"/>
-            </a:endParaRPr>
-          </a:p>
-          <a:p>
-            <a:r>
-              <a:rPr lang="pt-BR" sz="2400" dirty="0">
-                <a:latin typeface="Times New Roman" panose="02020603050405020304" pitchFamily="18" charset="0"/>
-                <a:cs typeface="Times New Roman" panose="02020603050405020304" pitchFamily="18" charset="0"/>
-              </a:rPr>
-              <a:t>Desenvolver visão </a:t>
-            </a:r>
-            <a:r>
-              <a:rPr lang="pt-BR" sz="2400" b="1" dirty="0">
-                <a:latin typeface="Times New Roman" panose="02020603050405020304" pitchFamily="18" charset="0"/>
-                <a:cs typeface="Times New Roman" panose="02020603050405020304" pitchFamily="18" charset="0"/>
-              </a:rPr>
-              <a:t>data-</a:t>
-            </a:r>
-            <a:r>
-              <a:rPr lang="pt-BR" sz="2400" b="1" dirty="0" err="1">
-                <a:latin typeface="Times New Roman" panose="02020603050405020304" pitchFamily="18" charset="0"/>
-                <a:cs typeface="Times New Roman" panose="02020603050405020304" pitchFamily="18" charset="0"/>
-              </a:rPr>
-              <a:t>driven</a:t>
-            </a:r>
-            <a:r>
-              <a:rPr lang="pt-BR" sz="2400" dirty="0">
-                <a:latin typeface="Times New Roman" panose="02020603050405020304" pitchFamily="18" charset="0"/>
-                <a:cs typeface="Times New Roman" panose="02020603050405020304" pitchFamily="18" charset="0"/>
-              </a:rPr>
-              <a:t> (</a:t>
-            </a:r>
-            <a:r>
-              <a:rPr lang="pt-BR" sz="2400" b="1" dirty="0">
-                <a:solidFill>
-                  <a:srgbClr val="FF0000"/>
-                </a:solidFill>
-                <a:latin typeface="Times New Roman" panose="02020603050405020304" pitchFamily="18" charset="0"/>
-                <a:cs typeface="Times New Roman" panose="02020603050405020304" pitchFamily="18" charset="0"/>
-              </a:rPr>
-              <a:t>orientada a dados</a:t>
-            </a:r>
-            <a:r>
-              <a:rPr lang="pt-BR" sz="2400" dirty="0">
-                <a:latin typeface="Times New Roman" panose="02020603050405020304" pitchFamily="18" charset="0"/>
-                <a:cs typeface="Times New Roman" panose="02020603050405020304" pitchFamily="18" charset="0"/>
-              </a:rPr>
-              <a:t>)</a:t>
-            </a:r>
+              <a:t>PDTI</a:t>
+            </a:r>
+          </a:p>
+          <a:p>
             <a:endParaRPr lang="pt-BR" sz="2400" dirty="0">
               <a:solidFill>
                 <a:schemeClr val="tx1"/>
@@ -4524,6 +7188,90 @@
               <a:latin typeface="Times New Roman" panose="02020603050405020304" pitchFamily="18" charset="0"/>
               <a:cs typeface="Times New Roman" panose="02020603050405020304" pitchFamily="18" charset="0"/>
             </a:endParaRPr>
+          </a:p>
+          <a:p>
+            <a:r>
+              <a:rPr lang="pt-BR" sz="2400" dirty="0">
+                <a:solidFill>
+                  <a:schemeClr val="tx1"/>
+                </a:solidFill>
+                <a:latin typeface="Times New Roman" panose="02020603050405020304" pitchFamily="18" charset="0"/>
+                <a:cs typeface="Times New Roman" panose="02020603050405020304" pitchFamily="18" charset="0"/>
+              </a:rPr>
+              <a:t>Relacionar </a:t>
+            </a:r>
+            <a:r>
+              <a:rPr lang="pt-BR" sz="2400" b="1" dirty="0">
+                <a:solidFill>
+                  <a:schemeClr val="tx1"/>
+                </a:solidFill>
+                <a:latin typeface="Times New Roman" panose="02020603050405020304" pitchFamily="18" charset="0"/>
+                <a:cs typeface="Times New Roman" panose="02020603050405020304" pitchFamily="18" charset="0"/>
+              </a:rPr>
+              <a:t>TI</a:t>
+            </a:r>
+            <a:r>
+              <a:rPr lang="pt-BR" sz="2400" dirty="0">
+                <a:solidFill>
+                  <a:schemeClr val="tx1"/>
+                </a:solidFill>
+                <a:latin typeface="Times New Roman" panose="02020603050405020304" pitchFamily="18" charset="0"/>
+                <a:cs typeface="Times New Roman" panose="02020603050405020304" pitchFamily="18" charset="0"/>
+              </a:rPr>
+              <a:t> com estratégia organizacional</a:t>
+            </a:r>
+          </a:p>
+          <a:p>
+            <a:endParaRPr lang="pt-BR" sz="2400" dirty="0">
+              <a:solidFill>
+                <a:schemeClr val="tx1"/>
+              </a:solidFill>
+              <a:latin typeface="Times New Roman" panose="02020603050405020304" pitchFamily="18" charset="0"/>
+              <a:cs typeface="Times New Roman" panose="02020603050405020304" pitchFamily="18" charset="0"/>
+            </a:endParaRPr>
+          </a:p>
+          <a:p>
+            <a:r>
+              <a:rPr lang="pt-BR" sz="2400" dirty="0">
+                <a:solidFill>
+                  <a:schemeClr val="tx1"/>
+                </a:solidFill>
+                <a:latin typeface="Times New Roman" panose="02020603050405020304" pitchFamily="18" charset="0"/>
+                <a:cs typeface="Times New Roman" panose="02020603050405020304" pitchFamily="18" charset="0"/>
+              </a:rPr>
+              <a:t>Entender o papel da terceirização de </a:t>
+            </a:r>
+            <a:r>
+              <a:rPr lang="pt-BR" sz="2400" b="1" dirty="0">
+                <a:solidFill>
+                  <a:schemeClr val="tx1"/>
+                </a:solidFill>
+                <a:latin typeface="Times New Roman" panose="02020603050405020304" pitchFamily="18" charset="0"/>
+                <a:cs typeface="Times New Roman" panose="02020603050405020304" pitchFamily="18" charset="0"/>
+              </a:rPr>
+              <a:t>TI</a:t>
+            </a:r>
+          </a:p>
+          <a:p>
+            <a:endParaRPr lang="pt-BR" sz="2400" dirty="0">
+              <a:solidFill>
+                <a:schemeClr val="tx1"/>
+              </a:solidFill>
+              <a:latin typeface="Times New Roman" panose="02020603050405020304" pitchFamily="18" charset="0"/>
+              <a:cs typeface="Times New Roman" panose="02020603050405020304" pitchFamily="18" charset="0"/>
+            </a:endParaRPr>
+          </a:p>
+          <a:p>
+            <a:r>
+              <a:rPr lang="pt-BR" sz="2400" dirty="0">
+                <a:solidFill>
+                  <a:schemeClr val="tx1"/>
+                </a:solidFill>
+                <a:latin typeface="Times New Roman" panose="02020603050405020304" pitchFamily="18" charset="0"/>
+                <a:cs typeface="Times New Roman" panose="02020603050405020304" pitchFamily="18" charset="0"/>
+              </a:rPr>
+              <a:t>Aplicar conceitos em situações reais organizacionais</a:t>
+            </a:r>
           </a:p>
         </p:txBody>
       </p:sp>
@@ -4546,433 +7294,10 @@
   <p:cSld>
     <p:spTree>
       <p:nvGrpSpPr>
-        <p:cNvPr id="1" name=""/>
-        <p:cNvGrpSpPr/>
-        <p:nvPr/>
-      </p:nvGrpSpPr>
-      <p:grpSpPr>
-        <a:xfrm>
-          <a:off x="0" y="0"/>
-          <a:ext cx="0" cy="0"/>
-          <a:chOff x="0" y="0"/>
-          <a:chExt cx="0" cy="0"/>
-        </a:xfrm>
-      </p:grpSpPr>
-      <p:sp>
-        <p:nvSpPr>
-          <p:cNvPr id="6" name="Title 1"/>
-          <p:cNvSpPr>
-            <a:spLocks noGrp="1"/>
-          </p:cNvSpPr>
-          <p:nvPr>
-            <p:ph type="title"/>
-          </p:nvPr>
-        </p:nvSpPr>
-        <p:spPr>
-          <a:xfrm>
-            <a:off x="457200" y="205980"/>
-            <a:ext cx="8229600" cy="857251"/>
-          </a:xfrm>
-        </p:spPr>
-        <p:txBody>
-          <a:bodyPr>
-            <a:normAutofit/>
-          </a:bodyPr>
-          <a:lstStyle/>
-          <a:p>
-            <a:r>
-              <a:rPr lang="en-US" b="1" dirty="0" err="1">
-                <a:solidFill>
-                  <a:srgbClr val="0070C0"/>
-                </a:solidFill>
-              </a:rPr>
-              <a:t>Leitura</a:t>
-            </a:r>
-            <a:r>
-              <a:rPr lang="en-US" b="1" dirty="0">
-                <a:solidFill>
-                  <a:srgbClr val="0070C0"/>
-                </a:solidFill>
-              </a:rPr>
-              <a:t> </a:t>
-            </a:r>
-            <a:r>
-              <a:rPr lang="en-US" b="1" dirty="0" err="1">
-                <a:solidFill>
-                  <a:srgbClr val="0070C0"/>
-                </a:solidFill>
-              </a:rPr>
-              <a:t>Específica</a:t>
-            </a:r>
-            <a:endParaRPr lang="en-US" b="1" dirty="0">
-              <a:solidFill>
-                <a:srgbClr val="0070C0"/>
-              </a:solidFill>
-            </a:endParaRPr>
-          </a:p>
-        </p:txBody>
-      </p:sp>
-      <p:sp>
-        <p:nvSpPr>
-          <p:cNvPr id="8" name="Text Placeholder 2"/>
-          <p:cNvSpPr>
-            <a:spLocks noGrp="1"/>
-          </p:cNvSpPr>
-          <p:nvPr>
-            <p:ph type="body" sz="half" idx="1"/>
-          </p:nvPr>
-        </p:nvSpPr>
-        <p:spPr>
-          <a:xfrm>
-            <a:off x="142865" y="1200150"/>
-            <a:ext cx="8865056" cy="3737369"/>
-          </a:xfrm>
-        </p:spPr>
-        <p:txBody>
-          <a:bodyPr>
-            <a:noAutofit/>
-          </a:bodyPr>
-          <a:lstStyle/>
-          <a:p>
-            <a:pPr marL="0" indent="0" algn="just">
-              <a:buNone/>
-            </a:pPr>
-            <a:r>
-              <a:rPr lang="pt-BR" sz="2400" dirty="0">
-                <a:latin typeface="Times New Roman" panose="02020603050405020304" pitchFamily="18" charset="0"/>
-                <a:cs typeface="Times New Roman" panose="02020603050405020304" pitchFamily="18" charset="0"/>
-              </a:rPr>
-              <a:t>[1] </a:t>
-            </a:r>
-            <a:r>
-              <a:rPr lang="pt-BR" sz="2400" b="1" dirty="0">
-                <a:latin typeface="Times New Roman" panose="02020603050405020304" pitchFamily="18" charset="0"/>
-                <a:cs typeface="Times New Roman" panose="02020603050405020304" pitchFamily="18" charset="0"/>
-              </a:rPr>
-              <a:t>Livro (Google Books)</a:t>
-            </a:r>
-          </a:p>
-          <a:p>
-            <a:pPr marL="0" indent="0">
-              <a:buNone/>
-            </a:pPr>
-            <a:r>
-              <a:rPr lang="pt-BR" sz="2400" b="1" dirty="0">
-                <a:solidFill>
-                  <a:srgbClr val="FF0000"/>
-                </a:solidFill>
-                <a:latin typeface="Times New Roman" panose="02020603050405020304" pitchFamily="18" charset="0"/>
-                <a:cs typeface="Times New Roman" panose="02020603050405020304" pitchFamily="18" charset="0"/>
-              </a:rPr>
-              <a:t>Disponível em: </a:t>
-            </a:r>
-            <a:endParaRPr lang="pt-BR" sz="2400" dirty="0">
-              <a:latin typeface="Times New Roman" panose="02020603050405020304" pitchFamily="18" charset="0"/>
-              <a:cs typeface="Times New Roman" panose="02020603050405020304" pitchFamily="18" charset="0"/>
-            </a:endParaRPr>
-          </a:p>
-          <a:p>
-            <a:pPr marL="0" indent="0">
-              <a:buNone/>
-            </a:pPr>
-            <a:endParaRPr lang="pt-BR" sz="2400" dirty="0">
-              <a:latin typeface="Times New Roman" panose="02020603050405020304" pitchFamily="18" charset="0"/>
-              <a:cs typeface="Times New Roman" panose="02020603050405020304" pitchFamily="18" charset="0"/>
-            </a:endParaRPr>
-          </a:p>
-          <a:p>
-            <a:pPr marL="0" indent="0">
-              <a:buNone/>
-            </a:pPr>
-            <a:endParaRPr lang="pt-BR" sz="2400" dirty="0">
-              <a:latin typeface="Times New Roman" panose="02020603050405020304" pitchFamily="18" charset="0"/>
-              <a:cs typeface="Times New Roman" panose="02020603050405020304" pitchFamily="18" charset="0"/>
-            </a:endParaRPr>
-          </a:p>
-          <a:p>
-            <a:pPr marL="0" indent="0">
-              <a:buNone/>
-            </a:pPr>
-            <a:r>
-              <a:rPr lang="pt-BR" sz="2400" dirty="0">
-                <a:latin typeface="Times New Roman" panose="02020603050405020304" pitchFamily="18" charset="0"/>
-                <a:cs typeface="Times New Roman" panose="02020603050405020304" pitchFamily="18" charset="0"/>
-              </a:rPr>
-              <a:t>[2] </a:t>
-            </a:r>
-            <a:r>
-              <a:rPr lang="pt-BR" sz="2400" b="1" dirty="0">
-                <a:latin typeface="Times New Roman" panose="02020603050405020304" pitchFamily="18" charset="0"/>
-                <a:cs typeface="Times New Roman" panose="02020603050405020304" pitchFamily="18" charset="0"/>
-              </a:rPr>
-              <a:t>Livro clássico</a:t>
-            </a:r>
-            <a:br>
-              <a:rPr lang="pt-BR" sz="2400" dirty="0">
-                <a:latin typeface="Times New Roman" panose="02020603050405020304" pitchFamily="18" charset="0"/>
-                <a:cs typeface="Times New Roman" panose="02020603050405020304" pitchFamily="18" charset="0"/>
-              </a:rPr>
-            </a:br>
-            <a:r>
-              <a:rPr lang="pt-BR" sz="2400" b="1" dirty="0">
-                <a:solidFill>
-                  <a:srgbClr val="FF0000"/>
-                </a:solidFill>
-                <a:latin typeface="Times New Roman" panose="02020603050405020304" pitchFamily="18" charset="0"/>
-                <a:cs typeface="Times New Roman" panose="02020603050405020304" pitchFamily="18" charset="0"/>
-              </a:rPr>
-              <a:t>Disponível em: </a:t>
-            </a:r>
-            <a:endParaRPr lang="pt-BR" sz="2400" dirty="0">
-              <a:latin typeface="Times New Roman" panose="02020603050405020304" pitchFamily="18" charset="0"/>
-              <a:cs typeface="Times New Roman" panose="02020603050405020304" pitchFamily="18" charset="0"/>
-            </a:endParaRPr>
-          </a:p>
-        </p:txBody>
-      </p:sp>
-    </p:spTree>
-    <p:extLst>
-      <p:ext uri="{BB962C8B-B14F-4D97-AF65-F5344CB8AC3E}">
-        <p14:creationId xmlns:p14="http://schemas.microsoft.com/office/powerpoint/2010/main" val="3680270425"/>
-      </p:ext>
-    </p:extLst>
-  </p:cSld>
-  <p:clrMapOvr>
-    <a:masterClrMapping/>
-  </p:clrMapOvr>
-  <p:transition spd="med"/>
-</p:sld>
-</file>
-
-<file path=ppt/slides/slide5.xml><?xml version="1.0" encoding="utf-8"?>
-<p:sld xmlns:a="http://schemas.openxmlformats.org/drawingml/2006/main" xmlns:r="http://schemas.openxmlformats.org/officeDocument/2006/relationships" xmlns:p="http://schemas.openxmlformats.org/presentationml/2006/main">
-  <p:cSld>
-    <p:spTree>
-      <p:nvGrpSpPr>
-        <p:cNvPr id="1" name=""/>
-        <p:cNvGrpSpPr/>
-        <p:nvPr/>
-      </p:nvGrpSpPr>
-      <p:grpSpPr>
-        <a:xfrm>
-          <a:off x="0" y="0"/>
-          <a:ext cx="0" cy="0"/>
-          <a:chOff x="0" y="0"/>
-          <a:chExt cx="0" cy="0"/>
-        </a:xfrm>
-      </p:grpSpPr>
-      <p:sp>
-        <p:nvSpPr>
-          <p:cNvPr id="6" name="Title 1"/>
-          <p:cNvSpPr>
-            <a:spLocks noGrp="1"/>
-          </p:cNvSpPr>
-          <p:nvPr>
-            <p:ph type="title"/>
-          </p:nvPr>
-        </p:nvSpPr>
-        <p:spPr>
-          <a:xfrm>
-            <a:off x="457200" y="205980"/>
-            <a:ext cx="8229600" cy="857251"/>
-          </a:xfrm>
-        </p:spPr>
-        <p:txBody>
-          <a:bodyPr>
-            <a:normAutofit/>
-          </a:bodyPr>
-          <a:lstStyle/>
-          <a:p>
-            <a:r>
-              <a:rPr lang="en-US" b="1" dirty="0" err="1">
-                <a:solidFill>
-                  <a:srgbClr val="0070C0"/>
-                </a:solidFill>
-              </a:rPr>
-              <a:t>Aprenda</a:t>
-            </a:r>
-            <a:r>
-              <a:rPr lang="en-US" b="1" dirty="0">
-                <a:solidFill>
-                  <a:srgbClr val="0070C0"/>
-                </a:solidFill>
-              </a:rPr>
-              <a:t>+</a:t>
-            </a:r>
-          </a:p>
-        </p:txBody>
-      </p:sp>
-      <p:sp>
-        <p:nvSpPr>
-          <p:cNvPr id="8" name="Text Placeholder 2"/>
-          <p:cNvSpPr>
-            <a:spLocks noGrp="1"/>
-          </p:cNvSpPr>
-          <p:nvPr>
-            <p:ph type="body" sz="half" idx="1"/>
-          </p:nvPr>
-        </p:nvSpPr>
-        <p:spPr>
-          <a:xfrm>
-            <a:off x="142865" y="1200150"/>
-            <a:ext cx="8865056" cy="3737370"/>
-          </a:xfrm>
-        </p:spPr>
-        <p:txBody>
-          <a:bodyPr>
-            <a:noAutofit/>
-          </a:bodyPr>
-          <a:lstStyle/>
-          <a:p>
-            <a:pPr marL="0" indent="0" algn="just">
-              <a:buNone/>
-            </a:pPr>
-            <a:r>
-              <a:rPr lang="pt-BR" sz="2200" dirty="0">
-                <a:latin typeface="Times New Roman" panose="02020603050405020304" pitchFamily="18" charset="0"/>
-                <a:cs typeface="Times New Roman" panose="02020603050405020304" pitchFamily="18" charset="0"/>
-              </a:rPr>
-              <a:t>[1] </a:t>
-            </a:r>
-            <a:r>
-              <a:rPr lang="pt-BR" sz="2400" b="1" dirty="0">
-                <a:latin typeface="Times New Roman" panose="02020603050405020304" pitchFamily="18" charset="0"/>
-                <a:cs typeface="Times New Roman" panose="02020603050405020304" pitchFamily="18" charset="0"/>
-              </a:rPr>
-              <a:t>Business </a:t>
-            </a:r>
-            <a:r>
-              <a:rPr lang="pt-BR" sz="2400" b="1" dirty="0" err="1">
-                <a:latin typeface="Times New Roman" panose="02020603050405020304" pitchFamily="18" charset="0"/>
-                <a:cs typeface="Times New Roman" panose="02020603050405020304" pitchFamily="18" charset="0"/>
-              </a:rPr>
-              <a:t>Intelligence</a:t>
-            </a:r>
-            <a:endParaRPr lang="pt-BR" sz="2400" b="1" dirty="0">
-              <a:latin typeface="Times New Roman" panose="02020603050405020304" pitchFamily="18" charset="0"/>
-              <a:cs typeface="Times New Roman" panose="02020603050405020304" pitchFamily="18" charset="0"/>
-            </a:endParaRPr>
-          </a:p>
-          <a:p>
-            <a:pPr marL="0" indent="0" algn="just">
-              <a:buNone/>
-            </a:pPr>
-            <a:r>
-              <a:rPr lang="pt-BR" sz="2200" b="1" dirty="0">
-                <a:solidFill>
-                  <a:srgbClr val="FF0000"/>
-                </a:solidFill>
-                <a:latin typeface="Times New Roman" panose="02020603050405020304" pitchFamily="18" charset="0"/>
-                <a:cs typeface="Times New Roman" panose="02020603050405020304" pitchFamily="18" charset="0"/>
-              </a:rPr>
-              <a:t>Disponível em:</a:t>
-            </a:r>
-            <a:endParaRPr lang="pt-BR" sz="2400" dirty="0">
-              <a:latin typeface="Times New Roman" panose="02020603050405020304" pitchFamily="18" charset="0"/>
-              <a:cs typeface="Times New Roman" panose="02020603050405020304" pitchFamily="18" charset="0"/>
-            </a:endParaRPr>
-          </a:p>
-          <a:p>
-            <a:pPr marL="0" indent="0" algn="just">
-              <a:buNone/>
-            </a:pPr>
-            <a:endParaRPr lang="pt-BR" sz="2200" dirty="0">
-              <a:latin typeface="Times New Roman" panose="02020603050405020304" pitchFamily="18" charset="0"/>
-              <a:cs typeface="Times New Roman" panose="02020603050405020304" pitchFamily="18" charset="0"/>
-            </a:endParaRPr>
-          </a:p>
-          <a:p>
-            <a:pPr marL="0" indent="0" algn="just">
-              <a:buNone/>
-            </a:pPr>
-            <a:endParaRPr lang="pt-BR" sz="2200" dirty="0">
-              <a:latin typeface="Times New Roman" panose="02020603050405020304" pitchFamily="18" charset="0"/>
-              <a:cs typeface="Times New Roman" panose="02020603050405020304" pitchFamily="18" charset="0"/>
-            </a:endParaRPr>
-          </a:p>
-          <a:p>
-            <a:pPr marL="0" indent="0" algn="just">
-              <a:buNone/>
-            </a:pPr>
-            <a:r>
-              <a:rPr lang="pt-BR" sz="2200" dirty="0">
-                <a:latin typeface="Times New Roman" panose="02020603050405020304" pitchFamily="18" charset="0"/>
-                <a:cs typeface="Times New Roman" panose="02020603050405020304" pitchFamily="18" charset="0"/>
-              </a:rPr>
-              <a:t>[2] </a:t>
-            </a:r>
-            <a:r>
-              <a:rPr lang="pt-BR" sz="2400" b="1" dirty="0">
-                <a:latin typeface="Times New Roman" panose="02020603050405020304" pitchFamily="18" charset="0"/>
-                <a:cs typeface="Times New Roman" panose="02020603050405020304" pitchFamily="18" charset="0"/>
-              </a:rPr>
-              <a:t>Business </a:t>
-            </a:r>
-            <a:r>
-              <a:rPr lang="pt-BR" sz="2400" b="1" dirty="0" err="1">
-                <a:latin typeface="Times New Roman" panose="02020603050405020304" pitchFamily="18" charset="0"/>
-                <a:cs typeface="Times New Roman" panose="02020603050405020304" pitchFamily="18" charset="0"/>
-              </a:rPr>
-              <a:t>Intelligence</a:t>
-            </a:r>
-            <a:endParaRPr lang="pt-BR" sz="2200" b="1" dirty="0">
-              <a:latin typeface="Times New Roman" panose="02020603050405020304" pitchFamily="18" charset="0"/>
-              <a:cs typeface="Times New Roman" panose="02020603050405020304" pitchFamily="18" charset="0"/>
-            </a:endParaRPr>
-          </a:p>
-          <a:p>
-            <a:pPr marL="0" indent="0" algn="just">
-              <a:buNone/>
-            </a:pPr>
-            <a:r>
-              <a:rPr lang="pt-BR" sz="2200" b="1" dirty="0">
-                <a:solidFill>
-                  <a:srgbClr val="FF0000"/>
-                </a:solidFill>
-                <a:latin typeface="Times New Roman" panose="02020603050405020304" pitchFamily="18" charset="0"/>
-                <a:cs typeface="Times New Roman" panose="02020603050405020304" pitchFamily="18" charset="0"/>
-              </a:rPr>
-              <a:t>Disponível em:</a:t>
-            </a:r>
-            <a:endParaRPr lang="pt-BR" sz="2400" dirty="0">
-              <a:latin typeface="Times New Roman" panose="02020603050405020304" pitchFamily="18" charset="0"/>
-              <a:cs typeface="Times New Roman" panose="02020603050405020304" pitchFamily="18" charset="0"/>
-            </a:endParaRPr>
-          </a:p>
-          <a:p>
-            <a:pPr marL="0" indent="0" algn="just">
-              <a:buNone/>
-            </a:pPr>
-            <a:endParaRPr lang="pt-BR" sz="2200" dirty="0">
-              <a:latin typeface="Times New Roman" panose="02020603050405020304" pitchFamily="18" charset="0"/>
-              <a:cs typeface="Times New Roman" panose="02020603050405020304" pitchFamily="18" charset="0"/>
-            </a:endParaRPr>
-          </a:p>
-        </p:txBody>
-      </p:sp>
-    </p:spTree>
-    <p:extLst>
-      <p:ext uri="{BB962C8B-B14F-4D97-AF65-F5344CB8AC3E}">
-        <p14:creationId xmlns:p14="http://schemas.microsoft.com/office/powerpoint/2010/main" val="2747596967"/>
-      </p:ext>
-    </p:extLst>
-  </p:cSld>
-  <p:clrMapOvr>
-    <a:masterClrMapping/>
-  </p:clrMapOvr>
-  <p:transition spd="med"/>
-</p:sld>
-</file>
-
-<file path=ppt/slides/slide6.xml><?xml version="1.0" encoding="utf-8"?>
-<p:sld xmlns:a="http://schemas.openxmlformats.org/drawingml/2006/main" xmlns:r="http://schemas.openxmlformats.org/officeDocument/2006/relationships" xmlns:p="http://schemas.openxmlformats.org/presentationml/2006/main">
-  <p:cSld>
-    <p:spTree>
-      <p:nvGrpSpPr>
         <p:cNvPr id="1" name="">
           <a:extLst>
             <a:ext uri="{FF2B5EF4-FFF2-40B4-BE49-F238E27FC236}">
-              <a16:creationId xmlns:a16="http://schemas.microsoft.com/office/drawing/2014/main" id="{2953AC7D-8CF9-A63F-57A2-D983DEB50039}"/>
+              <a16:creationId xmlns:a16="http://schemas.microsoft.com/office/drawing/2014/main" id="{A19F0B19-A930-A9A9-1992-610CC5154EB9}"/>
             </a:ext>
           </a:extLst>
         </p:cNvPr>
@@ -4992,7 +7317,7 @@
           <p:cNvPr id="6" name="Title 1">
             <a:extLst>
               <a:ext uri="{FF2B5EF4-FFF2-40B4-BE49-F238E27FC236}">
-                <a16:creationId xmlns:a16="http://schemas.microsoft.com/office/drawing/2014/main" id="{CC4C3A19-ED0C-1CE0-1512-03DBBA8E622A}"/>
+                <a16:creationId xmlns:a16="http://schemas.microsoft.com/office/drawing/2014/main" id="{9BF55746-1533-7FC6-53B7-77030615BE3C}"/>
               </a:ext>
             </a:extLst>
           </p:cNvPr>
@@ -5021,7 +7346,7 @@
                   <a:srgbClr val="0070C0"/>
                 </a:solidFill>
               </a:rPr>
-              <a:t>Dinâmica</a:t>
+              <a:t>Conceito</a:t>
             </a:r>
             <a:r>
               <a:rPr lang="en-US" b="1" dirty="0">
@@ -5029,21 +7354,8 @@
                   <a:srgbClr val="0070C0"/>
                 </a:solidFill>
               </a:rPr>
-              <a:t>/</a:t>
-            </a:r>
-            <a:r>
-              <a:rPr lang="en-US" b="1" dirty="0" err="1">
-                <a:solidFill>
-                  <a:srgbClr val="0070C0"/>
-                </a:solidFill>
-              </a:rPr>
-              <a:t>Atividade</a:t>
-            </a:r>
-            <a:endParaRPr lang="en-US" b="1" dirty="0">
-              <a:solidFill>
-                <a:srgbClr val="0070C0"/>
-              </a:solidFill>
-            </a:endParaRPr>
+              <a:t> PETI</a:t>
+            </a:r>
           </a:p>
         </p:txBody>
       </p:sp>
@@ -5052,7 +7364,7 @@
           <p:cNvPr id="8" name="Text Placeholder 2">
             <a:extLst>
               <a:ext uri="{FF2B5EF4-FFF2-40B4-BE49-F238E27FC236}">
-                <a16:creationId xmlns:a16="http://schemas.microsoft.com/office/drawing/2014/main" id="{B45119E1-EF11-7248-2ADA-8776A0D7E7E3}"/>
+                <a16:creationId xmlns:a16="http://schemas.microsoft.com/office/drawing/2014/main" id="{352BCFB7-D78F-12FB-2A3E-1B45307BEC22}"/>
               </a:ext>
             </a:extLst>
           </p:cNvPr>
@@ -5075,168 +7387,199 @@
           </a:bodyPr>
           <a:lstStyle/>
           <a:p>
-            <a:pPr marL="457200" indent="-457200">
-              <a:buFont typeface="+mj-lt"/>
-              <a:buAutoNum type="arabicPeriod"/>
-            </a:pPr>
-            <a:r>
-              <a:rPr lang="pt-BR" sz="2400" dirty="0">
-                <a:latin typeface="Times New Roman" panose="02020603050405020304" pitchFamily="18" charset="0"/>
-                <a:cs typeface="Times New Roman" panose="02020603050405020304" pitchFamily="18" charset="0"/>
-              </a:rPr>
-              <a:t>Escolher uma empresa (</a:t>
-            </a:r>
-            <a:r>
-              <a:rPr lang="pt-BR" sz="2400" b="1" dirty="0">
-                <a:latin typeface="Times New Roman" panose="02020603050405020304" pitchFamily="18" charset="0"/>
-                <a:cs typeface="Times New Roman" panose="02020603050405020304" pitchFamily="18" charset="0"/>
-              </a:rPr>
-              <a:t>real ou </a:t>
-            </a:r>
-            <a:r>
-              <a:rPr lang="pt-BR" sz="2400" b="1" dirty="0">
-                <a:solidFill>
-                  <a:srgbClr val="FF0000"/>
-                </a:solidFill>
-                <a:latin typeface="Times New Roman" panose="02020603050405020304" pitchFamily="18" charset="0"/>
-                <a:cs typeface="Times New Roman" panose="02020603050405020304" pitchFamily="18" charset="0"/>
-              </a:rPr>
-              <a:t>fictícia</a:t>
-            </a:r>
-            <a:r>
-              <a:rPr lang="pt-BR" sz="2400" dirty="0">
-                <a:latin typeface="Times New Roman" panose="02020603050405020304" pitchFamily="18" charset="0"/>
-                <a:cs typeface="Times New Roman" panose="02020603050405020304" pitchFamily="18" charset="0"/>
-              </a:rPr>
-              <a:t>)</a:t>
-            </a:r>
-          </a:p>
-          <a:p>
-            <a:pPr marL="457200" indent="-457200">
-              <a:buFont typeface="+mj-lt"/>
-              <a:buAutoNum type="arabicPeriod"/>
-            </a:pPr>
-            <a:r>
-              <a:rPr lang="pt-BR" sz="2400" dirty="0">
-                <a:latin typeface="Times New Roman" panose="02020603050405020304" pitchFamily="18" charset="0"/>
-                <a:cs typeface="Times New Roman" panose="02020603050405020304" pitchFamily="18" charset="0"/>
-              </a:rPr>
-              <a:t>Definir um problema gerencial</a:t>
-            </a:r>
-          </a:p>
-          <a:p>
-            <a:pPr marL="457200" indent="-457200">
-              <a:buFont typeface="+mj-lt"/>
-              <a:buAutoNum type="arabicPeriod"/>
-            </a:pPr>
-            <a:r>
-              <a:rPr lang="pt-BR" sz="2400" dirty="0">
-                <a:latin typeface="Times New Roman" panose="02020603050405020304" pitchFamily="18" charset="0"/>
-                <a:cs typeface="Times New Roman" panose="02020603050405020304" pitchFamily="18" charset="0"/>
-              </a:rPr>
-              <a:t>Propor uso de </a:t>
-            </a:r>
-            <a:r>
-              <a:rPr lang="pt-BR" sz="2400" b="1" dirty="0">
-                <a:latin typeface="Times New Roman" panose="02020603050405020304" pitchFamily="18" charset="0"/>
-                <a:cs typeface="Times New Roman" panose="02020603050405020304" pitchFamily="18" charset="0"/>
-              </a:rPr>
-              <a:t>BI</a:t>
-            </a:r>
-          </a:p>
-          <a:p>
-            <a:pPr marL="457200" indent="-457200">
-              <a:buFont typeface="+mj-lt"/>
-              <a:buAutoNum type="arabicPeriod"/>
-            </a:pPr>
-            <a:r>
-              <a:rPr lang="pt-BR" sz="2400" dirty="0">
-                <a:latin typeface="Times New Roman" panose="02020603050405020304" pitchFamily="18" charset="0"/>
-                <a:cs typeface="Times New Roman" panose="02020603050405020304" pitchFamily="18" charset="0"/>
-              </a:rPr>
-              <a:t>Criar 3 indicadores (</a:t>
-            </a:r>
-            <a:r>
-              <a:rPr lang="pt-BR" sz="2400" b="1" dirty="0">
-                <a:latin typeface="Times New Roman" panose="02020603050405020304" pitchFamily="18" charset="0"/>
-                <a:cs typeface="Times New Roman" panose="02020603050405020304" pitchFamily="18" charset="0"/>
-              </a:rPr>
-              <a:t>KPIs</a:t>
-            </a:r>
-            <a:r>
-              <a:rPr lang="pt-BR" sz="2400" dirty="0">
-                <a:latin typeface="Times New Roman" panose="02020603050405020304" pitchFamily="18" charset="0"/>
-                <a:cs typeface="Times New Roman" panose="02020603050405020304" pitchFamily="18" charset="0"/>
-              </a:rPr>
-              <a:t>)</a:t>
-            </a:r>
-          </a:p>
-          <a:p>
-            <a:pPr marL="457200" indent="-457200">
-              <a:buFont typeface="+mj-lt"/>
-              <a:buAutoNum type="arabicPeriod"/>
-            </a:pPr>
-            <a:r>
-              <a:rPr lang="pt-BR" sz="2400" dirty="0">
-                <a:latin typeface="Times New Roman" panose="02020603050405020304" pitchFamily="18" charset="0"/>
-                <a:cs typeface="Times New Roman" panose="02020603050405020304" pitchFamily="18" charset="0"/>
-              </a:rPr>
-              <a:t>Sugerir um </a:t>
-            </a:r>
-            <a:r>
-              <a:rPr lang="pt-BR" sz="2400" b="1" dirty="0">
-                <a:latin typeface="Times New Roman" panose="02020603050405020304" pitchFamily="18" charset="0"/>
-                <a:cs typeface="Times New Roman" panose="02020603050405020304" pitchFamily="18" charset="0"/>
-              </a:rPr>
-              <a:t>dashboard</a:t>
-            </a:r>
-          </a:p>
-          <a:p>
             <a:pPr marL="0" indent="0">
               <a:buNone/>
             </a:pPr>
-            <a:endParaRPr lang="pt-BR" sz="2400" dirty="0">
+            <a:r>
+              <a:rPr lang="pt-BR" sz="2200" b="1" dirty="0">
+                <a:solidFill>
+                  <a:schemeClr val="tx1"/>
+                </a:solidFill>
+                <a:latin typeface="Times New Roman" panose="02020603050405020304" pitchFamily="18" charset="0"/>
+                <a:cs typeface="Times New Roman" panose="02020603050405020304" pitchFamily="18" charset="0"/>
+              </a:rPr>
+              <a:t>Planejamento Estratégico de Tecnologia da Informação </a:t>
+            </a:r>
+            <a:r>
+              <a:rPr lang="pt-BR" sz="2200" dirty="0">
+                <a:solidFill>
+                  <a:schemeClr val="tx1"/>
+                </a:solidFill>
+                <a:latin typeface="Times New Roman" panose="02020603050405020304" pitchFamily="18" charset="0"/>
+                <a:cs typeface="Times New Roman" panose="02020603050405020304" pitchFamily="18" charset="0"/>
+              </a:rPr>
+              <a:t>(</a:t>
+            </a:r>
+            <a:r>
+              <a:rPr lang="pt-BR" sz="2200" b="1" dirty="0">
+                <a:solidFill>
+                  <a:schemeClr val="tx1"/>
+                </a:solidFill>
+                <a:latin typeface="Times New Roman" panose="02020603050405020304" pitchFamily="18" charset="0"/>
+                <a:cs typeface="Times New Roman" panose="02020603050405020304" pitchFamily="18" charset="0"/>
+              </a:rPr>
+              <a:t>PETI</a:t>
+            </a:r>
+            <a:r>
+              <a:rPr lang="pt-BR" sz="2200" dirty="0">
+                <a:solidFill>
+                  <a:schemeClr val="tx1"/>
+                </a:solidFill>
+                <a:latin typeface="Times New Roman" panose="02020603050405020304" pitchFamily="18" charset="0"/>
+                <a:cs typeface="Times New Roman" panose="02020603050405020304" pitchFamily="18" charset="0"/>
+              </a:rPr>
+              <a:t>)</a:t>
+            </a:r>
+          </a:p>
+          <a:p>
+            <a:endParaRPr lang="pt-BR" sz="2200" dirty="0">
+              <a:solidFill>
+                <a:schemeClr val="tx1"/>
+              </a:solidFill>
               <a:latin typeface="Times New Roman" panose="02020603050405020304" pitchFamily="18" charset="0"/>
               <a:cs typeface="Times New Roman" panose="02020603050405020304" pitchFamily="18" charset="0"/>
             </a:endParaRPr>
           </a:p>
           <a:p>
-            <a:pPr marL="0" indent="0" algn="just">
+            <a:r>
+              <a:rPr lang="pt-BR" sz="2200" dirty="0">
+                <a:solidFill>
+                  <a:schemeClr val="tx1"/>
+                </a:solidFill>
+                <a:latin typeface="Times New Roman" panose="02020603050405020304" pitchFamily="18" charset="0"/>
+                <a:cs typeface="Times New Roman" panose="02020603050405020304" pitchFamily="18" charset="0"/>
+              </a:rPr>
+              <a:t>Alinha </a:t>
+            </a:r>
+            <a:r>
+              <a:rPr lang="pt-BR" sz="2200" b="1" dirty="0">
+                <a:solidFill>
+                  <a:schemeClr val="tx1"/>
+                </a:solidFill>
+                <a:latin typeface="Times New Roman" panose="02020603050405020304" pitchFamily="18" charset="0"/>
+                <a:cs typeface="Times New Roman" panose="02020603050405020304" pitchFamily="18" charset="0"/>
+              </a:rPr>
+              <a:t>TI</a:t>
+            </a:r>
+            <a:r>
+              <a:rPr lang="pt-BR" sz="2200" dirty="0">
+                <a:solidFill>
+                  <a:schemeClr val="tx1"/>
+                </a:solidFill>
+                <a:latin typeface="Times New Roman" panose="02020603050405020304" pitchFamily="18" charset="0"/>
+                <a:cs typeface="Times New Roman" panose="02020603050405020304" pitchFamily="18" charset="0"/>
+              </a:rPr>
+              <a:t> aos objetivos estratégicos da empresa</a:t>
+            </a:r>
+          </a:p>
+          <a:p>
+            <a:r>
+              <a:rPr lang="pt-BR" sz="2200" dirty="0">
+                <a:solidFill>
+                  <a:schemeClr val="tx1"/>
+                </a:solidFill>
+                <a:latin typeface="Times New Roman" panose="02020603050405020304" pitchFamily="18" charset="0"/>
+                <a:cs typeface="Times New Roman" panose="02020603050405020304" pitchFamily="18" charset="0"/>
+              </a:rPr>
+              <a:t>Define como a </a:t>
+            </a:r>
+            <a:r>
+              <a:rPr lang="pt-BR" sz="2200" b="1" dirty="0">
+                <a:solidFill>
+                  <a:schemeClr val="tx1"/>
+                </a:solidFill>
+                <a:latin typeface="Times New Roman" panose="02020603050405020304" pitchFamily="18" charset="0"/>
+                <a:cs typeface="Times New Roman" panose="02020603050405020304" pitchFamily="18" charset="0"/>
+              </a:rPr>
+              <a:t>TI</a:t>
+            </a:r>
+            <a:r>
+              <a:rPr lang="pt-BR" sz="2200" dirty="0">
+                <a:solidFill>
+                  <a:schemeClr val="tx1"/>
+                </a:solidFill>
+                <a:latin typeface="Times New Roman" panose="02020603050405020304" pitchFamily="18" charset="0"/>
+                <a:cs typeface="Times New Roman" panose="02020603050405020304" pitchFamily="18" charset="0"/>
+              </a:rPr>
+              <a:t> gera valor ao negócio</a:t>
+            </a:r>
+          </a:p>
+          <a:p>
+            <a:r>
+              <a:rPr lang="pt-BR" sz="2200" dirty="0">
+                <a:solidFill>
+                  <a:schemeClr val="tx1"/>
+                </a:solidFill>
+                <a:latin typeface="Times New Roman" panose="02020603050405020304" pitchFamily="18" charset="0"/>
+                <a:cs typeface="Times New Roman" panose="02020603050405020304" pitchFamily="18" charset="0"/>
+              </a:rPr>
+              <a:t>Horizonte de médio e longo prazo</a:t>
+            </a:r>
+          </a:p>
+          <a:p>
+            <a:endParaRPr lang="pt-BR" sz="2200" dirty="0">
+              <a:solidFill>
+                <a:schemeClr val="tx1"/>
+              </a:solidFill>
+              <a:latin typeface="Times New Roman" panose="02020603050405020304" pitchFamily="18" charset="0"/>
+              <a:cs typeface="Times New Roman" panose="02020603050405020304" pitchFamily="18" charset="0"/>
+            </a:endParaRPr>
+          </a:p>
+          <a:p>
+            <a:pPr marL="0" indent="0">
               <a:buNone/>
             </a:pPr>
             <a:r>
-              <a:rPr lang="pt-BR" sz="2400" b="1" dirty="0">
+              <a:rPr lang="pt-BR" sz="2200" b="1" dirty="0">
                 <a:solidFill>
                   <a:srgbClr val="FF0000"/>
                 </a:solidFill>
                 <a:latin typeface="Times New Roman" panose="02020603050405020304" pitchFamily="18" charset="0"/>
                 <a:cs typeface="Times New Roman" panose="02020603050405020304" pitchFamily="18" charset="0"/>
               </a:rPr>
-              <a:t>Entrega</a:t>
-            </a:r>
-            <a:r>
-              <a:rPr lang="pt-BR" sz="2400" dirty="0">
-                <a:latin typeface="Times New Roman" panose="02020603050405020304" pitchFamily="18" charset="0"/>
-                <a:cs typeface="Times New Roman" panose="02020603050405020304" pitchFamily="18" charset="0"/>
-              </a:rPr>
-              <a:t>: apresentação (</a:t>
-            </a:r>
-            <a:r>
-              <a:rPr lang="pt-BR" sz="2400" b="1" dirty="0">
-                <a:solidFill>
-                  <a:srgbClr val="FF0000"/>
-                </a:solidFill>
-                <a:latin typeface="Times New Roman" panose="02020603050405020304" pitchFamily="18" charset="0"/>
-                <a:cs typeface="Times New Roman" panose="02020603050405020304" pitchFamily="18" charset="0"/>
-              </a:rPr>
-              <a:t>08 min</a:t>
-            </a:r>
-            <a:r>
-              <a:rPr lang="pt-BR" sz="2400" dirty="0">
-                <a:latin typeface="Times New Roman" panose="02020603050405020304" pitchFamily="18" charset="0"/>
-                <a:cs typeface="Times New Roman" panose="02020603050405020304" pitchFamily="18" charset="0"/>
-              </a:rPr>
-              <a:t>)</a:t>
+              <a:t>Na prática</a:t>
+            </a:r>
+            <a:endParaRPr lang="pt-BR" sz="2200" dirty="0">
+              <a:solidFill>
+                <a:schemeClr val="tx1"/>
+              </a:solidFill>
+              <a:latin typeface="Times New Roman" panose="02020603050405020304" pitchFamily="18" charset="0"/>
+              <a:cs typeface="Times New Roman" panose="02020603050405020304" pitchFamily="18" charset="0"/>
+            </a:endParaRPr>
+          </a:p>
+          <a:p>
+            <a:pPr marL="0" indent="0">
+              <a:buNone/>
+            </a:pPr>
+            <a:r>
+              <a:rPr lang="pt-BR" sz="2200" dirty="0">
+                <a:solidFill>
+                  <a:schemeClr val="tx1"/>
+                </a:solidFill>
+                <a:latin typeface="Times New Roman" panose="02020603050405020304" pitchFamily="18" charset="0"/>
+                <a:cs typeface="Times New Roman" panose="02020603050405020304" pitchFamily="18" charset="0"/>
+              </a:rPr>
+              <a:t>	Empresas usam </a:t>
+            </a:r>
+            <a:r>
+              <a:rPr lang="pt-BR" sz="2200" b="1" dirty="0">
+                <a:solidFill>
+                  <a:schemeClr val="tx1"/>
+                </a:solidFill>
+                <a:latin typeface="Times New Roman" panose="02020603050405020304" pitchFamily="18" charset="0"/>
+                <a:cs typeface="Times New Roman" panose="02020603050405020304" pitchFamily="18" charset="0"/>
+              </a:rPr>
+              <a:t>PETI</a:t>
+            </a:r>
+            <a:r>
+              <a:rPr lang="pt-BR" sz="2200" dirty="0">
+                <a:solidFill>
+                  <a:schemeClr val="tx1"/>
+                </a:solidFill>
+                <a:latin typeface="Times New Roman" panose="02020603050405020304" pitchFamily="18" charset="0"/>
+                <a:cs typeface="Times New Roman" panose="02020603050405020304" pitchFamily="18" charset="0"/>
+              </a:rPr>
+              <a:t> para decidir investimentos em sistemas, inovação e segurança.</a:t>
             </a:r>
           </a:p>
         </p:txBody>
@@ -5244,7 +7587,7 @@
     </p:spTree>
     <p:extLst>
       <p:ext uri="{BB962C8B-B14F-4D97-AF65-F5344CB8AC3E}">
-        <p14:creationId xmlns:p14="http://schemas.microsoft.com/office/powerpoint/2010/main" val="2976682751"/>
+        <p14:creationId xmlns:p14="http://schemas.microsoft.com/office/powerpoint/2010/main" val="1805046134"/>
       </p:ext>
     </p:extLst>
   </p:cSld>
@@ -5255,12 +7598,18 @@
 </p:sld>
 </file>
 
-<file path=ppt/slides/slide7.xml><?xml version="1.0" encoding="utf-8"?>
+<file path=ppt/slides/slide5.xml><?xml version="1.0" encoding="utf-8"?>
 <p:sld xmlns:a="http://schemas.openxmlformats.org/drawingml/2006/main" xmlns:r="http://schemas.openxmlformats.org/officeDocument/2006/relationships" xmlns:p="http://schemas.openxmlformats.org/presentationml/2006/main">
   <p:cSld>
     <p:spTree>
       <p:nvGrpSpPr>
-        <p:cNvPr id="1" name=""/>
+        <p:cNvPr id="1" name="">
+          <a:extLst>
+            <a:ext uri="{FF2B5EF4-FFF2-40B4-BE49-F238E27FC236}">
+              <a16:creationId xmlns:a16="http://schemas.microsoft.com/office/drawing/2014/main" id="{39753838-6F41-947D-FE92-679E69460234}"/>
+            </a:ext>
+          </a:extLst>
+        </p:cNvPr>
         <p:cNvGrpSpPr/>
         <p:nvPr/>
       </p:nvGrpSpPr>
@@ -5274,7 +7623,13 @@
       </p:grpSpPr>
       <p:sp>
         <p:nvSpPr>
-          <p:cNvPr id="6" name="Title 1"/>
+          <p:cNvPr id="6" name="Title 1">
+            <a:extLst>
+              <a:ext uri="{FF2B5EF4-FFF2-40B4-BE49-F238E27FC236}">
+                <a16:creationId xmlns:a16="http://schemas.microsoft.com/office/drawing/2014/main" id="{21BBC818-E03C-D0AE-ED32-10662F3B52A7}"/>
+              </a:ext>
+            </a:extLst>
+          </p:cNvPr>
           <p:cNvSpPr>
             <a:spLocks noGrp="1"/>
           </p:cNvSpPr>
@@ -5295,40 +7650,25 @@
           <a:lstStyle/>
           <a:p>
             <a:r>
-              <a:rPr lang="en-US" b="1" dirty="0" err="1">
+              <a:rPr lang="en-US" b="1" dirty="0">
                 <a:solidFill>
                   <a:srgbClr val="0070C0"/>
                 </a:solidFill>
               </a:rPr>
-              <a:t>Referências</a:t>
-            </a:r>
-            <a:r>
-              <a:rPr lang="en-US" b="1" dirty="0">
-                <a:solidFill>
-                  <a:srgbClr val="0070C0"/>
-                </a:solidFill>
-              </a:rPr>
-              <a:t> </a:t>
-            </a:r>
-            <a:r>
-              <a:rPr lang="en-US" b="1" dirty="0" err="1">
-                <a:solidFill>
-                  <a:srgbClr val="0070C0"/>
-                </a:solidFill>
-              </a:rPr>
-              <a:t>Bibliográficas</a:t>
-            </a:r>
-            <a:endParaRPr lang="en-US" b="1" dirty="0">
-              <a:solidFill>
-                <a:srgbClr val="0070C0"/>
-              </a:solidFill>
-            </a:endParaRPr>
+              <a:t>PEC vs PETI</a:t>
+            </a:r>
           </a:p>
         </p:txBody>
       </p:sp>
       <p:sp>
         <p:nvSpPr>
-          <p:cNvPr id="8" name="Text Placeholder 2"/>
+          <p:cNvPr id="8" name="Text Placeholder 2">
+            <a:extLst>
+              <a:ext uri="{FF2B5EF4-FFF2-40B4-BE49-F238E27FC236}">
+                <a16:creationId xmlns:a16="http://schemas.microsoft.com/office/drawing/2014/main" id="{FEED0474-FCC6-A281-73F4-D2450920F5C5}"/>
+              </a:ext>
+            </a:extLst>
+          </p:cNvPr>
           <p:cNvSpPr>
             <a:spLocks noGrp="1"/>
           </p:cNvSpPr>
@@ -5338,8 +7678,8 @@
         </p:nvSpPr>
         <p:spPr>
           <a:xfrm>
-            <a:off x="139472" y="1063230"/>
-            <a:ext cx="8865056" cy="3874289"/>
+            <a:off x="142865" y="1035050"/>
+            <a:ext cx="8865056" cy="3994150"/>
           </a:xfrm>
         </p:spPr>
         <p:txBody>
@@ -5352,98 +7692,76 @@
               <a:buNone/>
             </a:pPr>
             <a:r>
-              <a:rPr lang="pt-BR" sz="1800" dirty="0">
-                <a:latin typeface="Times New Roman" panose="02020603050405020304" pitchFamily="18" charset="0"/>
-                <a:cs typeface="Times New Roman" panose="02020603050405020304" pitchFamily="18" charset="0"/>
-              </a:rPr>
-              <a:t>[1] </a:t>
-            </a:r>
-            <a:r>
               <a:rPr lang="pt-BR" sz="1800" b="1" dirty="0">
                 <a:latin typeface="Times New Roman" panose="02020603050405020304" pitchFamily="18" charset="0"/>
                 <a:cs typeface="Times New Roman" panose="02020603050405020304" pitchFamily="18" charset="0"/>
               </a:rPr>
-              <a:t>SHARDA, R.; DELEN, D.; TURBAN, E.</a:t>
-            </a:r>
-          </a:p>
-          <a:p>
-            <a:pPr marL="0" indent="0" algn="just">
-              <a:buNone/>
-            </a:pPr>
-            <a:r>
-              <a:rPr lang="pt-BR" sz="1800" dirty="0">
-                <a:latin typeface="Times New Roman" panose="02020603050405020304" pitchFamily="18" charset="0"/>
-                <a:cs typeface="Times New Roman" panose="02020603050405020304" pitchFamily="18" charset="0"/>
-              </a:rPr>
-              <a:t>Business </a:t>
-            </a:r>
-            <a:r>
-              <a:rPr lang="pt-BR" sz="1800" dirty="0" err="1">
-                <a:latin typeface="Times New Roman" panose="02020603050405020304" pitchFamily="18" charset="0"/>
-                <a:cs typeface="Times New Roman" panose="02020603050405020304" pitchFamily="18" charset="0"/>
-              </a:rPr>
-              <a:t>Intelligence</a:t>
-            </a:r>
-            <a:r>
-              <a:rPr lang="pt-BR" sz="1800" dirty="0">
-                <a:latin typeface="Times New Roman" panose="02020603050405020304" pitchFamily="18" charset="0"/>
-                <a:cs typeface="Times New Roman" panose="02020603050405020304" pitchFamily="18" charset="0"/>
-              </a:rPr>
-              <a:t> e análise de dados para gestão do negócio. São Paulo: Bookman, 2019.</a:t>
-            </a:r>
-          </a:p>
-          <a:p>
-            <a:pPr marL="0" indent="0" algn="just">
-              <a:buNone/>
-            </a:pPr>
+              <a:t>PEC (Planejamento Estratégico Corporativo)</a:t>
+            </a:r>
             <a:endParaRPr lang="pt-BR" sz="1800" dirty="0">
               <a:latin typeface="Times New Roman" panose="02020603050405020304" pitchFamily="18" charset="0"/>
               <a:cs typeface="Times New Roman" panose="02020603050405020304" pitchFamily="18" charset="0"/>
             </a:endParaRPr>
           </a:p>
           <a:p>
+            <a:r>
+              <a:rPr lang="pt-BR" sz="1800" dirty="0">
+                <a:latin typeface="Times New Roman" panose="02020603050405020304" pitchFamily="18" charset="0"/>
+                <a:cs typeface="Times New Roman" panose="02020603050405020304" pitchFamily="18" charset="0"/>
+              </a:rPr>
+              <a:t>Define missão, visão e objetivos organizacionais</a:t>
+            </a:r>
+          </a:p>
+          <a:p>
             <a:pPr marL="0" indent="0">
               <a:buNone/>
             </a:pPr>
             <a:r>
+              <a:rPr lang="pt-BR" sz="1800" b="1" dirty="0">
+                <a:solidFill>
+                  <a:srgbClr val="FF0000"/>
+                </a:solidFill>
+                <a:latin typeface="Times New Roman" panose="02020603050405020304" pitchFamily="18" charset="0"/>
+                <a:cs typeface="Times New Roman" panose="02020603050405020304" pitchFamily="18" charset="0"/>
+              </a:rPr>
+              <a:t>PETI</a:t>
+            </a:r>
+            <a:endParaRPr lang="pt-BR" sz="1800" dirty="0">
+              <a:solidFill>
+                <a:srgbClr val="FF0000"/>
+              </a:solidFill>
+              <a:latin typeface="Times New Roman" panose="02020603050405020304" pitchFamily="18" charset="0"/>
+              <a:cs typeface="Times New Roman" panose="02020603050405020304" pitchFamily="18" charset="0"/>
+            </a:endParaRPr>
+          </a:p>
+          <a:p>
+            <a:r>
               <a:rPr lang="pt-BR" sz="1800" dirty="0">
                 <a:latin typeface="Times New Roman" panose="02020603050405020304" pitchFamily="18" charset="0"/>
                 <a:cs typeface="Times New Roman" panose="02020603050405020304" pitchFamily="18" charset="0"/>
               </a:rPr>
-              <a:t>[2] </a:t>
+              <a:t>Traduz o </a:t>
             </a:r>
             <a:r>
               <a:rPr lang="pt-BR" sz="1800" b="1" dirty="0">
                 <a:latin typeface="Times New Roman" panose="02020603050405020304" pitchFamily="18" charset="0"/>
                 <a:cs typeface="Times New Roman" panose="02020603050405020304" pitchFamily="18" charset="0"/>
               </a:rPr>
-              <a:t>TURBAN, E. et al.</a:t>
-            </a:r>
-          </a:p>
-          <a:p>
-            <a:pPr marL="0" indent="0">
-              <a:buNone/>
-            </a:pPr>
+              <a:t>PEC</a:t>
+            </a:r>
             <a:r>
               <a:rPr lang="pt-BR" sz="1800" dirty="0">
                 <a:latin typeface="Times New Roman" panose="02020603050405020304" pitchFamily="18" charset="0"/>
                 <a:cs typeface="Times New Roman" panose="02020603050405020304" pitchFamily="18" charset="0"/>
               </a:rPr>
-              <a:t>Business </a:t>
-            </a:r>
-            <a:r>
-              <a:rPr lang="pt-BR" sz="1800" dirty="0" err="1">
-                <a:latin typeface="Times New Roman" panose="02020603050405020304" pitchFamily="18" charset="0"/>
-                <a:cs typeface="Times New Roman" panose="02020603050405020304" pitchFamily="18" charset="0"/>
-              </a:rPr>
-              <a:t>Intelligence</a:t>
-            </a:r>
-            <a:r>
-              <a:rPr lang="pt-BR" sz="1800" dirty="0">
-                <a:latin typeface="Times New Roman" panose="02020603050405020304" pitchFamily="18" charset="0"/>
-                <a:cs typeface="Times New Roman" panose="02020603050405020304" pitchFamily="18" charset="0"/>
-              </a:rPr>
-              <a:t>: um enfoque gerencial. Porto Alegre: Bookman, 2009.</a:t>
+              <a:t> para o contexto da </a:t>
+            </a:r>
+            <a:r>
+              <a:rPr lang="pt-BR" sz="1800" b="1" dirty="0">
+                <a:latin typeface="Times New Roman" panose="02020603050405020304" pitchFamily="18" charset="0"/>
+                <a:cs typeface="Times New Roman" panose="02020603050405020304" pitchFamily="18" charset="0"/>
+              </a:rPr>
+              <a:t>TI</a:t>
             </a:r>
           </a:p>
           <a:p>
@@ -5460,36 +7778,15 @@
               <a:buNone/>
             </a:pPr>
             <a:r>
-              <a:rPr lang="pt-BR" sz="1800" dirty="0">
-                <a:latin typeface="Times New Roman" panose="02020603050405020304" pitchFamily="18" charset="0"/>
-                <a:cs typeface="Times New Roman" panose="02020603050405020304" pitchFamily="18" charset="0"/>
-              </a:rPr>
-              <a:t>[3] </a:t>
-            </a:r>
-            <a:r>
               <a:rPr lang="pt-BR" sz="1800" b="1" dirty="0">
-                <a:latin typeface="Times New Roman" panose="02020603050405020304" pitchFamily="18" charset="0"/>
-                <a:cs typeface="Times New Roman" panose="02020603050405020304" pitchFamily="18" charset="0"/>
-              </a:rPr>
-              <a:t>LAUDON, K.; LAUDON, J.</a:t>
-            </a:r>
-          </a:p>
-          <a:p>
-            <a:pPr marL="0" indent="0">
-              <a:buNone/>
-            </a:pPr>
-            <a:r>
-              <a:rPr lang="pt-BR" sz="1800" dirty="0">
-                <a:latin typeface="Times New Roman" panose="02020603050405020304" pitchFamily="18" charset="0"/>
-                <a:cs typeface="Times New Roman" panose="02020603050405020304" pitchFamily="18" charset="0"/>
-              </a:rPr>
-              <a:t>Sistemas de informação gerenciais. São Paulo: Pearson, 2014.</a:t>
-            </a:r>
-          </a:p>
-          <a:p>
-            <a:pPr marL="0" indent="0">
-              <a:buNone/>
-            </a:pPr>
+                <a:solidFill>
+                  <a:srgbClr val="FF0000"/>
+                </a:solidFill>
+                <a:latin typeface="Times New Roman" panose="02020603050405020304" pitchFamily="18" charset="0"/>
+                <a:cs typeface="Times New Roman" panose="02020603050405020304" pitchFamily="18" charset="0"/>
+              </a:rPr>
+              <a:t>Relação</a:t>
+            </a:r>
             <a:endParaRPr lang="pt-BR" sz="1800" dirty="0">
               <a:latin typeface="Times New Roman" panose="02020603050405020304" pitchFamily="18" charset="0"/>
               <a:cs typeface="Times New Roman" panose="02020603050405020304" pitchFamily="18" charset="0"/>
@@ -5504,34 +7801,1095 @@
                 <a:latin typeface="Times New Roman" panose="02020603050405020304" pitchFamily="18" charset="0"/>
                 <a:cs typeface="Times New Roman" panose="02020603050405020304" pitchFamily="18" charset="0"/>
               </a:rPr>
-              <a:t>[4] </a:t>
+              <a:t>	</a:t>
             </a:r>
             <a:r>
               <a:rPr lang="pt-BR" sz="1800" b="1" dirty="0">
-                <a:latin typeface="Times New Roman" panose="02020603050405020304" pitchFamily="18" charset="0"/>
-                <a:cs typeface="Times New Roman" panose="02020603050405020304" pitchFamily="18" charset="0"/>
-              </a:rPr>
-              <a:t>PORTER, M.</a:t>
+                <a:solidFill>
+                  <a:srgbClr val="FF0000"/>
+                </a:solidFill>
+                <a:latin typeface="Times New Roman" panose="02020603050405020304" pitchFamily="18" charset="0"/>
+                <a:cs typeface="Times New Roman" panose="02020603050405020304" pitchFamily="18" charset="0"/>
+              </a:rPr>
+              <a:t>PETI</a:t>
+            </a:r>
+            <a:r>
+              <a:rPr lang="pt-BR" sz="1800" dirty="0">
+                <a:latin typeface="Times New Roman" panose="02020603050405020304" pitchFamily="18" charset="0"/>
+                <a:cs typeface="Times New Roman" panose="02020603050405020304" pitchFamily="18" charset="0"/>
+              </a:rPr>
+              <a:t> = suporte tecnológico para execução do </a:t>
+            </a:r>
+            <a:r>
+              <a:rPr lang="pt-BR" sz="1800" b="1" dirty="0">
+                <a:latin typeface="Times New Roman" panose="02020603050405020304" pitchFamily="18" charset="0"/>
+                <a:cs typeface="Times New Roman" panose="02020603050405020304" pitchFamily="18" charset="0"/>
+              </a:rPr>
+              <a:t>PEC</a:t>
             </a:r>
           </a:p>
           <a:p>
             <a:pPr marL="0" indent="0">
               <a:buNone/>
             </a:pPr>
+            <a:endParaRPr lang="pt-BR" sz="1800" b="1" dirty="0">
+              <a:latin typeface="Times New Roman" panose="02020603050405020304" pitchFamily="18" charset="0"/>
+              <a:cs typeface="Times New Roman" panose="02020603050405020304" pitchFamily="18" charset="0"/>
+            </a:endParaRPr>
+          </a:p>
+          <a:p>
+            <a:pPr marL="0" indent="0">
+              <a:buNone/>
+            </a:pPr>
+            <a:r>
+              <a:rPr lang="pt-BR" sz="1800" b="1" dirty="0">
+                <a:solidFill>
+                  <a:srgbClr val="FF0000"/>
+                </a:solidFill>
+                <a:latin typeface="Times New Roman" panose="02020603050405020304" pitchFamily="18" charset="0"/>
+                <a:cs typeface="Times New Roman" panose="02020603050405020304" pitchFamily="18" charset="0"/>
+              </a:rPr>
+              <a:t>Exemplo</a:t>
+            </a:r>
+            <a:endParaRPr lang="pt-BR" sz="1800" dirty="0">
+              <a:latin typeface="Times New Roman" panose="02020603050405020304" pitchFamily="18" charset="0"/>
+              <a:cs typeface="Times New Roman" panose="02020603050405020304" pitchFamily="18" charset="0"/>
+            </a:endParaRPr>
+          </a:p>
+          <a:p>
+            <a:r>
+              <a:rPr lang="pt-BR" sz="1800" b="1" dirty="0">
+                <a:latin typeface="Times New Roman" panose="02020603050405020304" pitchFamily="18" charset="0"/>
+                <a:cs typeface="Times New Roman" panose="02020603050405020304" pitchFamily="18" charset="0"/>
+              </a:rPr>
+              <a:t>PEC</a:t>
+            </a:r>
             <a:r>
               <a:rPr lang="pt-BR" sz="1800" dirty="0">
                 <a:latin typeface="Times New Roman" panose="02020603050405020304" pitchFamily="18" charset="0"/>
                 <a:cs typeface="Times New Roman" panose="02020603050405020304" pitchFamily="18" charset="0"/>
               </a:rPr>
-              <a:t>Estratégia competitiva. Rio de Janeiro: Elsevier, 2004.</a:t>
-            </a:r>
+              <a:t>: expandir mercado;</a:t>
+            </a:r>
+          </a:p>
+          <a:p>
+            <a:r>
+              <a:rPr lang="pt-BR" sz="1800" b="1" dirty="0">
+                <a:solidFill>
+                  <a:srgbClr val="FF0000"/>
+                </a:solidFill>
+                <a:latin typeface="Times New Roman" panose="02020603050405020304" pitchFamily="18" charset="0"/>
+                <a:cs typeface="Times New Roman" panose="02020603050405020304" pitchFamily="18" charset="0"/>
+              </a:rPr>
+              <a:t>PETI</a:t>
+            </a:r>
+            <a:r>
+              <a:rPr lang="pt-BR" sz="1800" dirty="0">
+                <a:latin typeface="Times New Roman" panose="02020603050405020304" pitchFamily="18" charset="0"/>
+                <a:cs typeface="Times New Roman" panose="02020603050405020304" pitchFamily="18" charset="0"/>
+              </a:rPr>
+              <a:t>: implementar e-commerce, </a:t>
+            </a:r>
+            <a:r>
+              <a:rPr lang="pt-BR" sz="1800" b="1" dirty="0">
+                <a:latin typeface="Times New Roman" panose="02020603050405020304" pitchFamily="18" charset="0"/>
+                <a:cs typeface="Times New Roman" panose="02020603050405020304" pitchFamily="18" charset="0"/>
+              </a:rPr>
+              <a:t>BI</a:t>
+            </a:r>
+            <a:r>
+              <a:rPr lang="pt-BR" sz="1800" dirty="0">
+                <a:latin typeface="Times New Roman" panose="02020603050405020304" pitchFamily="18" charset="0"/>
+                <a:cs typeface="Times New Roman" panose="02020603050405020304" pitchFamily="18" charset="0"/>
+              </a:rPr>
+              <a:t> e </a:t>
+            </a:r>
+            <a:r>
+              <a:rPr lang="pt-BR" sz="1800" b="1" dirty="0">
+                <a:latin typeface="Times New Roman" panose="02020603050405020304" pitchFamily="18" charset="0"/>
+                <a:cs typeface="Times New Roman" panose="02020603050405020304" pitchFamily="18" charset="0"/>
+              </a:rPr>
+              <a:t>CRM.</a:t>
+            </a:r>
+            <a:endParaRPr lang="pt-BR" sz="1800" dirty="0">
+              <a:latin typeface="Times New Roman" panose="02020603050405020304" pitchFamily="18" charset="0"/>
+              <a:cs typeface="Times New Roman" panose="02020603050405020304" pitchFamily="18" charset="0"/>
+            </a:endParaRPr>
           </a:p>
         </p:txBody>
       </p:sp>
     </p:spTree>
     <p:extLst>
       <p:ext uri="{BB962C8B-B14F-4D97-AF65-F5344CB8AC3E}">
-        <p14:creationId xmlns:p14="http://schemas.microsoft.com/office/powerpoint/2010/main" val="1115311843"/>
+        <p14:creationId xmlns:p14="http://schemas.microsoft.com/office/powerpoint/2010/main" val="447412234"/>
+      </p:ext>
+    </p:extLst>
+  </p:cSld>
+  <p:clrMapOvr>
+    <a:masterClrMapping/>
+  </p:clrMapOvr>
+  <p:transition spd="med"/>
+</p:sld>
+</file>
+
+<file path=ppt/slides/slide6.xml><?xml version="1.0" encoding="utf-8"?>
+<p:sld xmlns:a="http://schemas.openxmlformats.org/drawingml/2006/main" xmlns:r="http://schemas.openxmlformats.org/officeDocument/2006/relationships" xmlns:p="http://schemas.openxmlformats.org/presentationml/2006/main">
+  <p:cSld>
+    <p:spTree>
+      <p:nvGrpSpPr>
+        <p:cNvPr id="1" name="">
+          <a:extLst>
+            <a:ext uri="{FF2B5EF4-FFF2-40B4-BE49-F238E27FC236}">
+              <a16:creationId xmlns:a16="http://schemas.microsoft.com/office/drawing/2014/main" id="{96ACBC75-3E39-326A-1491-4BFC828AA202}"/>
+            </a:ext>
+          </a:extLst>
+        </p:cNvPr>
+        <p:cNvGrpSpPr/>
+        <p:nvPr/>
+      </p:nvGrpSpPr>
+      <p:grpSpPr>
+        <a:xfrm>
+          <a:off x="0" y="0"/>
+          <a:ext cx="0" cy="0"/>
+          <a:chOff x="0" y="0"/>
+          <a:chExt cx="0" cy="0"/>
+        </a:xfrm>
+      </p:grpSpPr>
+      <p:sp>
+        <p:nvSpPr>
+          <p:cNvPr id="6" name="Title 1">
+            <a:extLst>
+              <a:ext uri="{FF2B5EF4-FFF2-40B4-BE49-F238E27FC236}">
+                <a16:creationId xmlns:a16="http://schemas.microsoft.com/office/drawing/2014/main" id="{17796F6A-B965-BD9E-03D6-1DF5CE313B42}"/>
+              </a:ext>
+            </a:extLst>
+          </p:cNvPr>
+          <p:cNvSpPr>
+            <a:spLocks noGrp="1"/>
+          </p:cNvSpPr>
+          <p:nvPr>
+            <p:ph type="title"/>
+          </p:nvPr>
+        </p:nvSpPr>
+        <p:spPr>
+          <a:xfrm>
+            <a:off x="457200" y="205980"/>
+            <a:ext cx="8229600" cy="857251"/>
+          </a:xfrm>
+        </p:spPr>
+        <p:txBody>
+          <a:bodyPr>
+            <a:normAutofit/>
+          </a:bodyPr>
+          <a:lstStyle/>
+          <a:p>
+            <a:r>
+              <a:rPr lang="en-US" b="1" dirty="0" err="1">
+                <a:solidFill>
+                  <a:srgbClr val="0070C0"/>
+                </a:solidFill>
+              </a:rPr>
+              <a:t>Conceito</a:t>
+            </a:r>
+            <a:r>
+              <a:rPr lang="en-US" b="1" dirty="0">
+                <a:solidFill>
+                  <a:srgbClr val="0070C0"/>
+                </a:solidFill>
+              </a:rPr>
+              <a:t> PDTI</a:t>
+            </a:r>
+          </a:p>
+        </p:txBody>
+      </p:sp>
+      <p:sp>
+        <p:nvSpPr>
+          <p:cNvPr id="8" name="Text Placeholder 2">
+            <a:extLst>
+              <a:ext uri="{FF2B5EF4-FFF2-40B4-BE49-F238E27FC236}">
+                <a16:creationId xmlns:a16="http://schemas.microsoft.com/office/drawing/2014/main" id="{2C40F0B1-17AD-35FB-4861-D4BF75B02F49}"/>
+              </a:ext>
+            </a:extLst>
+          </p:cNvPr>
+          <p:cNvSpPr>
+            <a:spLocks noGrp="1"/>
+          </p:cNvSpPr>
+          <p:nvPr>
+            <p:ph type="body" sz="half" idx="1"/>
+          </p:nvPr>
+        </p:nvSpPr>
+        <p:spPr>
+          <a:xfrm>
+            <a:off x="142865" y="1035050"/>
+            <a:ext cx="8865056" cy="3994150"/>
+          </a:xfrm>
+        </p:spPr>
+        <p:txBody>
+          <a:bodyPr>
+            <a:noAutofit/>
+          </a:bodyPr>
+          <a:lstStyle/>
+          <a:p>
+            <a:pPr marL="0" indent="0">
+              <a:buNone/>
+            </a:pPr>
+            <a:r>
+              <a:rPr lang="pt-BR" sz="2000" b="1" dirty="0">
+                <a:latin typeface="Times New Roman" panose="02020603050405020304" pitchFamily="18" charset="0"/>
+                <a:cs typeface="Times New Roman" panose="02020603050405020304" pitchFamily="18" charset="0"/>
+              </a:rPr>
+              <a:t>Plano Diretor de Tecnologia da Informação (</a:t>
+            </a:r>
+            <a:r>
+              <a:rPr lang="pt-BR" sz="2000" b="1" dirty="0">
+                <a:solidFill>
+                  <a:srgbClr val="FF0000"/>
+                </a:solidFill>
+                <a:latin typeface="Times New Roman" panose="02020603050405020304" pitchFamily="18" charset="0"/>
+                <a:cs typeface="Times New Roman" panose="02020603050405020304" pitchFamily="18" charset="0"/>
+              </a:rPr>
+              <a:t>PDTI</a:t>
+            </a:r>
+            <a:r>
+              <a:rPr lang="pt-BR" sz="2000" b="1" dirty="0">
+                <a:latin typeface="Times New Roman" panose="02020603050405020304" pitchFamily="18" charset="0"/>
+                <a:cs typeface="Times New Roman" panose="02020603050405020304" pitchFamily="18" charset="0"/>
+              </a:rPr>
+              <a:t>)</a:t>
+            </a:r>
+          </a:p>
+          <a:p>
+            <a:r>
+              <a:rPr lang="pt-BR" sz="2000" dirty="0">
+                <a:latin typeface="Times New Roman" panose="02020603050405020304" pitchFamily="18" charset="0"/>
+                <a:cs typeface="Times New Roman" panose="02020603050405020304" pitchFamily="18" charset="0"/>
+              </a:rPr>
+              <a:t>Documento tático-operacional</a:t>
+            </a:r>
+          </a:p>
+          <a:p>
+            <a:r>
+              <a:rPr lang="pt-BR" sz="2000" dirty="0">
+                <a:latin typeface="Times New Roman" panose="02020603050405020304" pitchFamily="18" charset="0"/>
+                <a:cs typeface="Times New Roman" panose="02020603050405020304" pitchFamily="18" charset="0"/>
+              </a:rPr>
+              <a:t>Define ações, projetos e recursos de </a:t>
+            </a:r>
+            <a:r>
+              <a:rPr lang="pt-BR" sz="2000" b="1" dirty="0">
+                <a:latin typeface="Times New Roman" panose="02020603050405020304" pitchFamily="18" charset="0"/>
+                <a:cs typeface="Times New Roman" panose="02020603050405020304" pitchFamily="18" charset="0"/>
+              </a:rPr>
+              <a:t>TI</a:t>
+            </a:r>
+          </a:p>
+          <a:p>
+            <a:pPr marL="0" indent="0">
+              <a:buNone/>
+            </a:pPr>
+            <a:endParaRPr lang="pt-BR" sz="2000" dirty="0">
+              <a:latin typeface="Times New Roman" panose="02020603050405020304" pitchFamily="18" charset="0"/>
+              <a:cs typeface="Times New Roman" panose="02020603050405020304" pitchFamily="18" charset="0"/>
+            </a:endParaRPr>
+          </a:p>
+          <a:p>
+            <a:pPr marL="0" indent="0">
+              <a:buNone/>
+            </a:pPr>
+            <a:endParaRPr lang="pt-BR" sz="2000" dirty="0">
+              <a:latin typeface="Times New Roman" panose="02020603050405020304" pitchFamily="18" charset="0"/>
+              <a:cs typeface="Times New Roman" panose="02020603050405020304" pitchFamily="18" charset="0"/>
+            </a:endParaRPr>
+          </a:p>
+          <a:p>
+            <a:pPr marL="0" indent="0">
+              <a:buNone/>
+            </a:pPr>
+            <a:r>
+              <a:rPr lang="pt-BR" sz="2000" b="1" dirty="0">
+                <a:solidFill>
+                  <a:srgbClr val="FF0000"/>
+                </a:solidFill>
+                <a:latin typeface="Times New Roman" panose="02020603050405020304" pitchFamily="18" charset="0"/>
+                <a:cs typeface="Times New Roman" panose="02020603050405020304" pitchFamily="18" charset="0"/>
+              </a:rPr>
+              <a:t>Inclui</a:t>
+            </a:r>
+          </a:p>
+          <a:p>
+            <a:r>
+              <a:rPr lang="pt-BR" sz="2000" dirty="0">
+                <a:latin typeface="Times New Roman" panose="02020603050405020304" pitchFamily="18" charset="0"/>
+                <a:cs typeface="Times New Roman" panose="02020603050405020304" pitchFamily="18" charset="0"/>
+              </a:rPr>
+              <a:t>Inventário de sistemas</a:t>
+            </a:r>
+          </a:p>
+          <a:p>
+            <a:r>
+              <a:rPr lang="pt-BR" sz="2000" dirty="0">
+                <a:latin typeface="Times New Roman" panose="02020603050405020304" pitchFamily="18" charset="0"/>
+                <a:cs typeface="Times New Roman" panose="02020603050405020304" pitchFamily="18" charset="0"/>
+              </a:rPr>
+              <a:t>Plano de investimentos</a:t>
+            </a:r>
+          </a:p>
+          <a:p>
+            <a:r>
+              <a:rPr lang="pt-BR" sz="2000" dirty="0">
+                <a:latin typeface="Times New Roman" panose="02020603050405020304" pitchFamily="18" charset="0"/>
+                <a:cs typeface="Times New Roman" panose="02020603050405020304" pitchFamily="18" charset="0"/>
+              </a:rPr>
+              <a:t>Cronograma de execução</a:t>
+            </a:r>
+          </a:p>
+          <a:p>
+            <a:r>
+              <a:rPr lang="pt-BR" sz="2000" dirty="0">
+                <a:latin typeface="Times New Roman" panose="02020603050405020304" pitchFamily="18" charset="0"/>
+                <a:cs typeface="Times New Roman" panose="02020603050405020304" pitchFamily="18" charset="0"/>
+              </a:rPr>
+              <a:t>Indicadores de desempenho</a:t>
+            </a:r>
+          </a:p>
+        </p:txBody>
+      </p:sp>
+    </p:spTree>
+    <p:extLst>
+      <p:ext uri="{BB962C8B-B14F-4D97-AF65-F5344CB8AC3E}">
+        <p14:creationId xmlns:p14="http://schemas.microsoft.com/office/powerpoint/2010/main" val="1254758320"/>
+      </p:ext>
+    </p:extLst>
+  </p:cSld>
+  <p:clrMapOvr>
+    <a:masterClrMapping/>
+  </p:clrMapOvr>
+  <p:transition spd="med"/>
+</p:sld>
+</file>
+
+<file path=ppt/slides/slide7.xml><?xml version="1.0" encoding="utf-8"?>
+<p:sld xmlns:a="http://schemas.openxmlformats.org/drawingml/2006/main" xmlns:r="http://schemas.openxmlformats.org/officeDocument/2006/relationships" xmlns:p="http://schemas.openxmlformats.org/presentationml/2006/main">
+  <p:cSld>
+    <p:spTree>
+      <p:nvGrpSpPr>
+        <p:cNvPr id="1" name="">
+          <a:extLst>
+            <a:ext uri="{FF2B5EF4-FFF2-40B4-BE49-F238E27FC236}">
+              <a16:creationId xmlns:a16="http://schemas.microsoft.com/office/drawing/2014/main" id="{47E616AF-9CB7-D1A9-CC19-537CF199CF17}"/>
+            </a:ext>
+          </a:extLst>
+        </p:cNvPr>
+        <p:cNvGrpSpPr/>
+        <p:nvPr/>
+      </p:nvGrpSpPr>
+      <p:grpSpPr>
+        <a:xfrm>
+          <a:off x="0" y="0"/>
+          <a:ext cx="0" cy="0"/>
+          <a:chOff x="0" y="0"/>
+          <a:chExt cx="0" cy="0"/>
+        </a:xfrm>
+      </p:grpSpPr>
+      <p:sp>
+        <p:nvSpPr>
+          <p:cNvPr id="6" name="Title 1">
+            <a:extLst>
+              <a:ext uri="{FF2B5EF4-FFF2-40B4-BE49-F238E27FC236}">
+                <a16:creationId xmlns:a16="http://schemas.microsoft.com/office/drawing/2014/main" id="{CA35C7AF-6D68-5FAA-F1E6-439F50AED7E0}"/>
+              </a:ext>
+            </a:extLst>
+          </p:cNvPr>
+          <p:cNvSpPr>
+            <a:spLocks noGrp="1"/>
+          </p:cNvSpPr>
+          <p:nvPr>
+            <p:ph type="title"/>
+          </p:nvPr>
+        </p:nvSpPr>
+        <p:spPr>
+          <a:xfrm>
+            <a:off x="457200" y="205980"/>
+            <a:ext cx="8229600" cy="857251"/>
+          </a:xfrm>
+        </p:spPr>
+        <p:txBody>
+          <a:bodyPr>
+            <a:normAutofit/>
+          </a:bodyPr>
+          <a:lstStyle/>
+          <a:p>
+            <a:r>
+              <a:rPr lang="en-US" b="1" dirty="0">
+                <a:solidFill>
+                  <a:srgbClr val="0070C0"/>
+                </a:solidFill>
+              </a:rPr>
+              <a:t>PETI vs PDTI</a:t>
+            </a:r>
+          </a:p>
+        </p:txBody>
+      </p:sp>
+      <p:sp>
+        <p:nvSpPr>
+          <p:cNvPr id="8" name="Text Placeholder 2">
+            <a:extLst>
+              <a:ext uri="{FF2B5EF4-FFF2-40B4-BE49-F238E27FC236}">
+                <a16:creationId xmlns:a16="http://schemas.microsoft.com/office/drawing/2014/main" id="{469BB4B5-4288-AFD0-E125-E98442D4D497}"/>
+              </a:ext>
+            </a:extLst>
+          </p:cNvPr>
+          <p:cNvSpPr>
+            <a:spLocks noGrp="1"/>
+          </p:cNvSpPr>
+          <p:nvPr>
+            <p:ph type="body" sz="half" idx="1"/>
+          </p:nvPr>
+        </p:nvSpPr>
+        <p:spPr>
+          <a:xfrm>
+            <a:off x="142865" y="1035050"/>
+            <a:ext cx="8865056" cy="3994150"/>
+          </a:xfrm>
+        </p:spPr>
+        <p:txBody>
+          <a:bodyPr>
+            <a:noAutofit/>
+          </a:bodyPr>
+          <a:lstStyle/>
+          <a:p>
+            <a:pPr marL="0" indent="0">
+              <a:buNone/>
+            </a:pPr>
+            <a:endParaRPr lang="pt-BR" sz="2000" dirty="0">
+              <a:latin typeface="Times New Roman" panose="02020603050405020304" pitchFamily="18" charset="0"/>
+              <a:cs typeface="Times New Roman" panose="02020603050405020304" pitchFamily="18" charset="0"/>
+            </a:endParaRPr>
+          </a:p>
+        </p:txBody>
+      </p:sp>
+      <p:graphicFrame>
+        <p:nvGraphicFramePr>
+          <p:cNvPr id="2" name="Tabela 1">
+            <a:extLst>
+              <a:ext uri="{FF2B5EF4-FFF2-40B4-BE49-F238E27FC236}">
+                <a16:creationId xmlns:a16="http://schemas.microsoft.com/office/drawing/2014/main" id="{27B880CD-01C5-D081-23C5-1199A0F3CCD6}"/>
+              </a:ext>
+            </a:extLst>
+          </p:cNvPr>
+          <p:cNvGraphicFramePr>
+            <a:graphicFrameLocks noGrp="1"/>
+          </p:cNvGraphicFramePr>
+          <p:nvPr>
+            <p:extLst>
+              <p:ext uri="{D42A27DB-BD31-4B8C-83A1-F6EECF244321}">
+                <p14:modId xmlns:p14="http://schemas.microsoft.com/office/powerpoint/2010/main" val="2400965694"/>
+              </p:ext>
+            </p:extLst>
+          </p:nvPr>
+        </p:nvGraphicFramePr>
+        <p:xfrm>
+          <a:off x="196654" y="1671842"/>
+          <a:ext cx="8705301" cy="2804160"/>
+        </p:xfrm>
+        <a:graphic>
+          <a:graphicData uri="http://schemas.openxmlformats.org/drawingml/2006/table">
+            <a:tbl>
+              <a:tblPr/>
+              <a:tblGrid>
+                <a:gridCol w="2901767">
+                  <a:extLst>
+                    <a:ext uri="{9D8B030D-6E8A-4147-A177-3AD203B41FA5}">
+                      <a16:colId xmlns:a16="http://schemas.microsoft.com/office/drawing/2014/main" val="1763318122"/>
+                    </a:ext>
+                  </a:extLst>
+                </a:gridCol>
+                <a:gridCol w="2901767">
+                  <a:extLst>
+                    <a:ext uri="{9D8B030D-6E8A-4147-A177-3AD203B41FA5}">
+                      <a16:colId xmlns:a16="http://schemas.microsoft.com/office/drawing/2014/main" val="224682341"/>
+                    </a:ext>
+                  </a:extLst>
+                </a:gridCol>
+                <a:gridCol w="2901767">
+                  <a:extLst>
+                    <a:ext uri="{9D8B030D-6E8A-4147-A177-3AD203B41FA5}">
+                      <a16:colId xmlns:a16="http://schemas.microsoft.com/office/drawing/2014/main" val="3888882925"/>
+                    </a:ext>
+                  </a:extLst>
+                </a:gridCol>
+              </a:tblGrid>
+              <a:tr h="424564">
+                <a:tc>
+                  <a:txBody>
+                    <a:bodyPr/>
+                    <a:lstStyle/>
+                    <a:p>
+                      <a:pPr algn="l">
+                        <a:buNone/>
+                      </a:pPr>
+                      <a:r>
+                        <a:rPr lang="pt-BR" sz="2200" b="1" u="sng" dirty="0">
+                          <a:solidFill>
+                            <a:srgbClr val="002060"/>
+                          </a:solidFill>
+                          <a:latin typeface="Times New Roman" panose="02020603050405020304" pitchFamily="18" charset="0"/>
+                          <a:cs typeface="Times New Roman" panose="02020603050405020304" pitchFamily="18" charset="0"/>
+                        </a:rPr>
+                        <a:t>Aspectos</a:t>
+                      </a:r>
+                    </a:p>
+                  </a:txBody>
+                  <a:tcPr anchor="ctr">
+                    <a:lnL>
+                      <a:noFill/>
+                    </a:lnL>
+                    <a:lnR>
+                      <a:noFill/>
+                    </a:lnR>
+                    <a:lnT>
+                      <a:noFill/>
+                    </a:lnT>
+                    <a:lnB>
+                      <a:noFill/>
+                    </a:lnB>
+                    <a:noFill/>
+                  </a:tcPr>
+                </a:tc>
+                <a:tc>
+                  <a:txBody>
+                    <a:bodyPr/>
+                    <a:lstStyle/>
+                    <a:p>
+                      <a:pPr algn="l">
+                        <a:buNone/>
+                      </a:pPr>
+                      <a:r>
+                        <a:rPr lang="pt-BR" sz="2200" b="1" u="sng" dirty="0">
+                          <a:latin typeface="Times New Roman" panose="02020603050405020304" pitchFamily="18" charset="0"/>
+                          <a:cs typeface="Times New Roman" panose="02020603050405020304" pitchFamily="18" charset="0"/>
+                        </a:rPr>
+                        <a:t>PETI</a:t>
+                      </a:r>
+                    </a:p>
+                  </a:txBody>
+                  <a:tcPr anchor="ctr">
+                    <a:lnL>
+                      <a:noFill/>
+                    </a:lnL>
+                    <a:lnR>
+                      <a:noFill/>
+                    </a:lnR>
+                    <a:lnT>
+                      <a:noFill/>
+                    </a:lnT>
+                    <a:lnB>
+                      <a:noFill/>
+                    </a:lnB>
+                    <a:noFill/>
+                  </a:tcPr>
+                </a:tc>
+                <a:tc>
+                  <a:txBody>
+                    <a:bodyPr/>
+                    <a:lstStyle/>
+                    <a:p>
+                      <a:pPr algn="l">
+                        <a:buNone/>
+                      </a:pPr>
+                      <a:r>
+                        <a:rPr lang="pt-BR" sz="2200" b="1" u="sng" dirty="0">
+                          <a:solidFill>
+                            <a:srgbClr val="FF0000"/>
+                          </a:solidFill>
+                          <a:latin typeface="Times New Roman" panose="02020603050405020304" pitchFamily="18" charset="0"/>
+                          <a:cs typeface="Times New Roman" panose="02020603050405020304" pitchFamily="18" charset="0"/>
+                        </a:rPr>
+                        <a:t>PDTI</a:t>
+                      </a:r>
+                    </a:p>
+                  </a:txBody>
+                  <a:tcPr anchor="ctr">
+                    <a:lnL>
+                      <a:noFill/>
+                    </a:lnL>
+                    <a:lnR>
+                      <a:noFill/>
+                    </a:lnR>
+                    <a:lnT>
+                      <a:noFill/>
+                    </a:lnT>
+                    <a:lnB>
+                      <a:noFill/>
+                    </a:lnB>
+                    <a:noFill/>
+                  </a:tcPr>
+                </a:tc>
+                <a:extLst>
+                  <a:ext uri="{0D108BD9-81ED-4DB2-BD59-A6C34878D82A}">
+                    <a16:rowId xmlns:a16="http://schemas.microsoft.com/office/drawing/2014/main" val="2530335364"/>
+                  </a:ext>
+                </a:extLst>
+              </a:tr>
+              <a:tr h="424564">
+                <a:tc>
+                  <a:txBody>
+                    <a:bodyPr/>
+                    <a:lstStyle/>
+                    <a:p>
+                      <a:pPr algn="l">
+                        <a:buNone/>
+                      </a:pPr>
+                      <a:r>
+                        <a:rPr lang="pt-BR" sz="2200" b="1" dirty="0">
+                          <a:latin typeface="Times New Roman" panose="02020603050405020304" pitchFamily="18" charset="0"/>
+                          <a:cs typeface="Times New Roman" panose="02020603050405020304" pitchFamily="18" charset="0"/>
+                        </a:rPr>
+                        <a:t>Nível</a:t>
+                      </a:r>
+                    </a:p>
+                  </a:txBody>
+                  <a:tcPr anchor="ctr">
+                    <a:lnL>
+                      <a:noFill/>
+                    </a:lnL>
+                    <a:lnR>
+                      <a:noFill/>
+                    </a:lnR>
+                    <a:lnT>
+                      <a:noFill/>
+                    </a:lnT>
+                    <a:lnB>
+                      <a:noFill/>
+                    </a:lnB>
+                    <a:noFill/>
+                  </a:tcPr>
+                </a:tc>
+                <a:tc>
+                  <a:txBody>
+                    <a:bodyPr/>
+                    <a:lstStyle/>
+                    <a:p>
+                      <a:pPr algn="l">
+                        <a:buNone/>
+                      </a:pPr>
+                      <a:r>
+                        <a:rPr lang="pt-BR" sz="2200" dirty="0">
+                          <a:latin typeface="Times New Roman" panose="02020603050405020304" pitchFamily="18" charset="0"/>
+                          <a:cs typeface="Times New Roman" panose="02020603050405020304" pitchFamily="18" charset="0"/>
+                        </a:rPr>
+                        <a:t>Estratégico</a:t>
+                      </a:r>
+                    </a:p>
+                  </a:txBody>
+                  <a:tcPr anchor="ctr">
+                    <a:lnL>
+                      <a:noFill/>
+                    </a:lnL>
+                    <a:lnR>
+                      <a:noFill/>
+                    </a:lnR>
+                    <a:lnT>
+                      <a:noFill/>
+                    </a:lnT>
+                    <a:lnB>
+                      <a:noFill/>
+                    </a:lnB>
+                    <a:noFill/>
+                  </a:tcPr>
+                </a:tc>
+                <a:tc>
+                  <a:txBody>
+                    <a:bodyPr/>
+                    <a:lstStyle/>
+                    <a:p>
+                      <a:pPr algn="l">
+                        <a:buNone/>
+                      </a:pPr>
+                      <a:r>
+                        <a:rPr lang="pt-BR" sz="2200" dirty="0">
+                          <a:latin typeface="Times New Roman" panose="02020603050405020304" pitchFamily="18" charset="0"/>
+                          <a:cs typeface="Times New Roman" panose="02020603050405020304" pitchFamily="18" charset="0"/>
+                        </a:rPr>
+                        <a:t>Tático</a:t>
+                      </a:r>
+                    </a:p>
+                  </a:txBody>
+                  <a:tcPr anchor="ctr">
+                    <a:lnL>
+                      <a:noFill/>
+                    </a:lnL>
+                    <a:lnR>
+                      <a:noFill/>
+                    </a:lnR>
+                    <a:lnT>
+                      <a:noFill/>
+                    </a:lnT>
+                    <a:lnB>
+                      <a:noFill/>
+                    </a:lnB>
+                    <a:noFill/>
+                  </a:tcPr>
+                </a:tc>
+                <a:extLst>
+                  <a:ext uri="{0D108BD9-81ED-4DB2-BD59-A6C34878D82A}">
+                    <a16:rowId xmlns:a16="http://schemas.microsoft.com/office/drawing/2014/main" val="639525542"/>
+                  </a:ext>
+                </a:extLst>
+              </a:tr>
+              <a:tr h="758149">
+                <a:tc>
+                  <a:txBody>
+                    <a:bodyPr/>
+                    <a:lstStyle/>
+                    <a:p>
+                      <a:pPr algn="l">
+                        <a:buNone/>
+                      </a:pPr>
+                      <a:r>
+                        <a:rPr lang="pt-BR" sz="2200" b="1" dirty="0">
+                          <a:latin typeface="Times New Roman" panose="02020603050405020304" pitchFamily="18" charset="0"/>
+                          <a:cs typeface="Times New Roman" panose="02020603050405020304" pitchFamily="18" charset="0"/>
+                        </a:rPr>
+                        <a:t>Foco</a:t>
+                      </a:r>
+                    </a:p>
+                  </a:txBody>
+                  <a:tcPr anchor="ctr">
+                    <a:lnL>
+                      <a:noFill/>
+                    </a:lnL>
+                    <a:lnR>
+                      <a:noFill/>
+                    </a:lnR>
+                    <a:lnT>
+                      <a:noFill/>
+                    </a:lnT>
+                    <a:lnB>
+                      <a:noFill/>
+                    </a:lnB>
+                    <a:noFill/>
+                  </a:tcPr>
+                </a:tc>
+                <a:tc>
+                  <a:txBody>
+                    <a:bodyPr/>
+                    <a:lstStyle/>
+                    <a:p>
+                      <a:pPr algn="l">
+                        <a:buNone/>
+                      </a:pPr>
+                      <a:r>
+                        <a:rPr lang="pt-BR" sz="2200" dirty="0">
+                          <a:latin typeface="Times New Roman" panose="02020603050405020304" pitchFamily="18" charset="0"/>
+                          <a:cs typeface="Times New Roman" panose="02020603050405020304" pitchFamily="18" charset="0"/>
+                        </a:rPr>
+                        <a:t>Alinhamento com negócio</a:t>
+                      </a:r>
+                    </a:p>
+                  </a:txBody>
+                  <a:tcPr anchor="ctr">
+                    <a:lnL>
+                      <a:noFill/>
+                    </a:lnL>
+                    <a:lnR>
+                      <a:noFill/>
+                    </a:lnR>
+                    <a:lnT>
+                      <a:noFill/>
+                    </a:lnT>
+                    <a:lnB>
+                      <a:noFill/>
+                    </a:lnB>
+                    <a:noFill/>
+                  </a:tcPr>
+                </a:tc>
+                <a:tc>
+                  <a:txBody>
+                    <a:bodyPr/>
+                    <a:lstStyle/>
+                    <a:p>
+                      <a:pPr algn="l">
+                        <a:buNone/>
+                      </a:pPr>
+                      <a:r>
+                        <a:rPr lang="pt-BR" sz="2200" dirty="0">
+                          <a:latin typeface="Times New Roman" panose="02020603050405020304" pitchFamily="18" charset="0"/>
+                          <a:cs typeface="Times New Roman" panose="02020603050405020304" pitchFamily="18" charset="0"/>
+                        </a:rPr>
+                        <a:t>Execução</a:t>
+                      </a:r>
+                    </a:p>
+                  </a:txBody>
+                  <a:tcPr anchor="ctr">
+                    <a:lnL>
+                      <a:noFill/>
+                    </a:lnL>
+                    <a:lnR>
+                      <a:noFill/>
+                    </a:lnR>
+                    <a:lnT>
+                      <a:noFill/>
+                    </a:lnT>
+                    <a:lnB>
+                      <a:noFill/>
+                    </a:lnB>
+                    <a:noFill/>
+                  </a:tcPr>
+                </a:tc>
+                <a:extLst>
+                  <a:ext uri="{0D108BD9-81ED-4DB2-BD59-A6C34878D82A}">
+                    <a16:rowId xmlns:a16="http://schemas.microsoft.com/office/drawing/2014/main" val="50102228"/>
+                  </a:ext>
+                </a:extLst>
+              </a:tr>
+              <a:tr h="424564">
+                <a:tc>
+                  <a:txBody>
+                    <a:bodyPr/>
+                    <a:lstStyle/>
+                    <a:p>
+                      <a:pPr algn="l">
+                        <a:buNone/>
+                      </a:pPr>
+                      <a:r>
+                        <a:rPr lang="pt-BR" sz="2200" b="1" dirty="0">
+                          <a:latin typeface="Times New Roman" panose="02020603050405020304" pitchFamily="18" charset="0"/>
+                          <a:cs typeface="Times New Roman" panose="02020603050405020304" pitchFamily="18" charset="0"/>
+                        </a:rPr>
+                        <a:t>Horizonte</a:t>
+                      </a:r>
+                    </a:p>
+                    <a:p>
+                      <a:pPr algn="l">
+                        <a:buNone/>
+                      </a:pPr>
+                      <a:endParaRPr lang="pt-BR" sz="2200" b="1" dirty="0">
+                        <a:latin typeface="Times New Roman" panose="02020603050405020304" pitchFamily="18" charset="0"/>
+                        <a:cs typeface="Times New Roman" panose="02020603050405020304" pitchFamily="18" charset="0"/>
+                      </a:endParaRPr>
+                    </a:p>
+                  </a:txBody>
+                  <a:tcPr anchor="ctr">
+                    <a:lnL>
+                      <a:noFill/>
+                    </a:lnL>
+                    <a:lnR>
+                      <a:noFill/>
+                    </a:lnR>
+                    <a:lnT>
+                      <a:noFill/>
+                    </a:lnT>
+                    <a:lnB>
+                      <a:noFill/>
+                    </a:lnB>
+                    <a:noFill/>
+                  </a:tcPr>
+                </a:tc>
+                <a:tc>
+                  <a:txBody>
+                    <a:bodyPr/>
+                    <a:lstStyle/>
+                    <a:p>
+                      <a:pPr algn="l">
+                        <a:buNone/>
+                      </a:pPr>
+                      <a:r>
+                        <a:rPr lang="pt-BR" sz="2200" dirty="0">
+                          <a:latin typeface="Times New Roman" panose="02020603050405020304" pitchFamily="18" charset="0"/>
+                          <a:cs typeface="Times New Roman" panose="02020603050405020304" pitchFamily="18" charset="0"/>
+                        </a:rPr>
+                        <a:t>Longo prazo</a:t>
+                      </a:r>
+                    </a:p>
+                    <a:p>
+                      <a:pPr algn="l">
+                        <a:buNone/>
+                      </a:pPr>
+                      <a:endParaRPr lang="pt-BR" sz="2200" dirty="0">
+                        <a:latin typeface="Times New Roman" panose="02020603050405020304" pitchFamily="18" charset="0"/>
+                        <a:cs typeface="Times New Roman" panose="02020603050405020304" pitchFamily="18" charset="0"/>
+                      </a:endParaRPr>
+                    </a:p>
+                  </a:txBody>
+                  <a:tcPr anchor="ctr">
+                    <a:lnL>
+                      <a:noFill/>
+                    </a:lnL>
+                    <a:lnR>
+                      <a:noFill/>
+                    </a:lnR>
+                    <a:lnT>
+                      <a:noFill/>
+                    </a:lnT>
+                    <a:lnB>
+                      <a:noFill/>
+                    </a:lnB>
+                    <a:noFill/>
+                  </a:tcPr>
+                </a:tc>
+                <a:tc>
+                  <a:txBody>
+                    <a:bodyPr/>
+                    <a:lstStyle/>
+                    <a:p>
+                      <a:pPr algn="l">
+                        <a:buNone/>
+                      </a:pPr>
+                      <a:r>
+                        <a:rPr lang="pt-BR" sz="2200" dirty="0">
+                          <a:latin typeface="Times New Roman" panose="02020603050405020304" pitchFamily="18" charset="0"/>
+                          <a:cs typeface="Times New Roman" panose="02020603050405020304" pitchFamily="18" charset="0"/>
+                        </a:rPr>
+                        <a:t>Médio prazo</a:t>
+                      </a:r>
+                    </a:p>
+                    <a:p>
+                      <a:pPr algn="l">
+                        <a:buNone/>
+                      </a:pPr>
+                      <a:endParaRPr lang="pt-BR" sz="2200" dirty="0">
+                        <a:latin typeface="Times New Roman" panose="02020603050405020304" pitchFamily="18" charset="0"/>
+                        <a:cs typeface="Times New Roman" panose="02020603050405020304" pitchFamily="18" charset="0"/>
+                      </a:endParaRPr>
+                    </a:p>
+                  </a:txBody>
+                  <a:tcPr anchor="ctr">
+                    <a:lnL>
+                      <a:noFill/>
+                    </a:lnL>
+                    <a:lnR>
+                      <a:noFill/>
+                    </a:lnR>
+                    <a:lnT>
+                      <a:noFill/>
+                    </a:lnT>
+                    <a:lnB>
+                      <a:noFill/>
+                    </a:lnB>
+                    <a:noFill/>
+                  </a:tcPr>
+                </a:tc>
+                <a:extLst>
+                  <a:ext uri="{0D108BD9-81ED-4DB2-BD59-A6C34878D82A}">
+                    <a16:rowId xmlns:a16="http://schemas.microsoft.com/office/drawing/2014/main" val="2632727872"/>
+                  </a:ext>
+                </a:extLst>
+              </a:tr>
+              <a:tr h="424564">
+                <a:tc>
+                  <a:txBody>
+                    <a:bodyPr/>
+                    <a:lstStyle/>
+                    <a:p>
+                      <a:pPr algn="l">
+                        <a:buNone/>
+                      </a:pPr>
+                      <a:r>
+                        <a:rPr lang="pt-BR" sz="2200" b="1" dirty="0">
+                          <a:latin typeface="Times New Roman" panose="02020603050405020304" pitchFamily="18" charset="0"/>
+                          <a:cs typeface="Times New Roman" panose="02020603050405020304" pitchFamily="18" charset="0"/>
+                        </a:rPr>
+                        <a:t>Resultado</a:t>
+                      </a:r>
+                    </a:p>
+                  </a:txBody>
+                  <a:tcPr anchor="ctr">
+                    <a:lnL>
+                      <a:noFill/>
+                    </a:lnL>
+                    <a:lnR>
+                      <a:noFill/>
+                    </a:lnR>
+                    <a:lnT>
+                      <a:noFill/>
+                    </a:lnT>
+                    <a:lnB>
+                      <a:noFill/>
+                    </a:lnB>
+                    <a:noFill/>
+                  </a:tcPr>
+                </a:tc>
+                <a:tc>
+                  <a:txBody>
+                    <a:bodyPr/>
+                    <a:lstStyle/>
+                    <a:p>
+                      <a:pPr algn="l">
+                        <a:buNone/>
+                      </a:pPr>
+                      <a:r>
+                        <a:rPr lang="pt-BR" sz="2200">
+                          <a:latin typeface="Times New Roman" panose="02020603050405020304" pitchFamily="18" charset="0"/>
+                          <a:cs typeface="Times New Roman" panose="02020603050405020304" pitchFamily="18" charset="0"/>
+                        </a:rPr>
+                        <a:t>Diretrizes</a:t>
+                      </a:r>
+                    </a:p>
+                  </a:txBody>
+                  <a:tcPr anchor="ctr">
+                    <a:lnL>
+                      <a:noFill/>
+                    </a:lnL>
+                    <a:lnR>
+                      <a:noFill/>
+                    </a:lnR>
+                    <a:lnT>
+                      <a:noFill/>
+                    </a:lnT>
+                    <a:lnB>
+                      <a:noFill/>
+                    </a:lnB>
+                    <a:noFill/>
+                  </a:tcPr>
+                </a:tc>
+                <a:tc>
+                  <a:txBody>
+                    <a:bodyPr/>
+                    <a:lstStyle/>
+                    <a:p>
+                      <a:pPr algn="l">
+                        <a:buNone/>
+                      </a:pPr>
+                      <a:r>
+                        <a:rPr lang="pt-BR" sz="2200" dirty="0">
+                          <a:latin typeface="Times New Roman" panose="02020603050405020304" pitchFamily="18" charset="0"/>
+                          <a:cs typeface="Times New Roman" panose="02020603050405020304" pitchFamily="18" charset="0"/>
+                        </a:rPr>
+                        <a:t>Plano de ação</a:t>
+                      </a:r>
+                    </a:p>
+                  </a:txBody>
+                  <a:tcPr anchor="ctr">
+                    <a:lnL>
+                      <a:noFill/>
+                    </a:lnL>
+                    <a:lnR>
+                      <a:noFill/>
+                    </a:lnR>
+                    <a:lnT>
+                      <a:noFill/>
+                    </a:lnT>
+                    <a:lnB>
+                      <a:noFill/>
+                    </a:lnB>
+                    <a:noFill/>
+                  </a:tcPr>
+                </a:tc>
+                <a:extLst>
+                  <a:ext uri="{0D108BD9-81ED-4DB2-BD59-A6C34878D82A}">
+                    <a16:rowId xmlns:a16="http://schemas.microsoft.com/office/drawing/2014/main" val="1933864895"/>
+                  </a:ext>
+                </a:extLst>
+              </a:tr>
+            </a:tbl>
+          </a:graphicData>
+        </a:graphic>
+      </p:graphicFrame>
+    </p:spTree>
+    <p:extLst>
+      <p:ext uri="{BB962C8B-B14F-4D97-AF65-F5344CB8AC3E}">
+        <p14:creationId xmlns:p14="http://schemas.microsoft.com/office/powerpoint/2010/main" val="3937032940"/>
       </p:ext>
     </p:extLst>
   </p:cSld>
@@ -5547,7 +8905,13 @@
   <p:cSld>
     <p:spTree>
       <p:nvGrpSpPr>
-        <p:cNvPr id="1" name=""/>
+        <p:cNvPr id="1" name="">
+          <a:extLst>
+            <a:ext uri="{FF2B5EF4-FFF2-40B4-BE49-F238E27FC236}">
+              <a16:creationId xmlns:a16="http://schemas.microsoft.com/office/drawing/2014/main" id="{DB6CEE00-3589-4119-5178-5A875CA54A42}"/>
+            </a:ext>
+          </a:extLst>
+        </p:cNvPr>
         <p:cNvGrpSpPr/>
         <p:nvPr/>
       </p:nvGrpSpPr>
@@ -5559,67 +8923,15 @@
           <a:chExt cx="0" cy="0"/>
         </a:xfrm>
       </p:grpSpPr>
-      <p:pic>
-        <p:nvPicPr>
-          <p:cNvPr id="112" name="Picture 6" descr="Picture 6"/>
-          <p:cNvPicPr>
-            <a:picLocks noChangeAspect="1"/>
-          </p:cNvPicPr>
-          <p:nvPr/>
-        </p:nvPicPr>
-        <p:blipFill>
-          <a:blip r:embed="rId2"/>
-          <a:stretch>
-            <a:fillRect/>
-          </a:stretch>
-        </p:blipFill>
-        <p:spPr>
-          <a:xfrm>
-            <a:off x="0" y="0"/>
-            <a:ext cx="9144000" cy="5143500"/>
-          </a:xfrm>
-          <a:prstGeom prst="rect">
-            <a:avLst/>
-          </a:prstGeom>
-          <a:ln w="12700">
-            <a:miter lim="400000"/>
-            <a:headEnd/>
-            <a:tailEnd/>
-          </a:ln>
-        </p:spPr>
-      </p:pic>
-      <p:pic>
-        <p:nvPicPr>
-          <p:cNvPr id="114" name="Picture 5" descr="Picture 5"/>
-          <p:cNvPicPr>
-            <a:picLocks noChangeAspect="1"/>
-          </p:cNvPicPr>
-          <p:nvPr/>
-        </p:nvPicPr>
-        <p:blipFill>
-          <a:blip r:embed="rId3"/>
-          <a:stretch>
-            <a:fillRect/>
-          </a:stretch>
-        </p:blipFill>
-        <p:spPr>
-          <a:xfrm>
-            <a:off x="469900" y="0"/>
-            <a:ext cx="4391984" cy="171450"/>
-          </a:xfrm>
-          <a:prstGeom prst="rect">
-            <a:avLst/>
-          </a:prstGeom>
-          <a:ln w="12700">
-            <a:miter lim="400000"/>
-            <a:headEnd/>
-            <a:tailEnd/>
-          </a:ln>
-        </p:spPr>
-      </p:pic>
       <p:sp>
         <p:nvSpPr>
-          <p:cNvPr id="3" name="Título 2"/>
+          <p:cNvPr id="6" name="Title 1">
+            <a:extLst>
+              <a:ext uri="{FF2B5EF4-FFF2-40B4-BE49-F238E27FC236}">
+                <a16:creationId xmlns:a16="http://schemas.microsoft.com/office/drawing/2014/main" id="{FF5A569B-EE1C-1290-5CF8-4B7E7B1BC937}"/>
+              </a:ext>
+            </a:extLst>
+          </p:cNvPr>
           <p:cNvSpPr>
             <a:spLocks noGrp="1"/>
           </p:cNvSpPr>
@@ -5629,8 +8941,55 @@
         </p:nvSpPr>
         <p:spPr>
           <a:xfrm>
-            <a:off x="285751" y="2386770"/>
-            <a:ext cx="8615364" cy="1102519"/>
+            <a:off x="457200" y="205980"/>
+            <a:ext cx="8229600" cy="857251"/>
+          </a:xfrm>
+        </p:spPr>
+        <p:txBody>
+          <a:bodyPr>
+            <a:normAutofit/>
+          </a:bodyPr>
+          <a:lstStyle/>
+          <a:p>
+            <a:r>
+              <a:rPr lang="en-US" b="1" dirty="0" err="1">
+                <a:solidFill>
+                  <a:srgbClr val="0070C0"/>
+                </a:solidFill>
+              </a:rPr>
+              <a:t>Terceirização</a:t>
+            </a:r>
+            <a:r>
+              <a:rPr lang="en-US" b="1" dirty="0">
+                <a:solidFill>
+                  <a:srgbClr val="0070C0"/>
+                </a:solidFill>
+              </a:rPr>
+              <a:t> de TI</a:t>
+            </a:r>
+          </a:p>
+        </p:txBody>
+      </p:sp>
+      <p:sp>
+        <p:nvSpPr>
+          <p:cNvPr id="8" name="Text Placeholder 2">
+            <a:extLst>
+              <a:ext uri="{FF2B5EF4-FFF2-40B4-BE49-F238E27FC236}">
+                <a16:creationId xmlns:a16="http://schemas.microsoft.com/office/drawing/2014/main" id="{477B2640-5A32-798C-7C16-AC3D85DDA781}"/>
+              </a:ext>
+            </a:extLst>
+          </p:cNvPr>
+          <p:cNvSpPr>
+            <a:spLocks noGrp="1"/>
+          </p:cNvSpPr>
+          <p:nvPr>
+            <p:ph type="body" sz="half" idx="1"/>
+          </p:nvPr>
+        </p:nvSpPr>
+        <p:spPr>
+          <a:xfrm>
+            <a:off x="142865" y="1035050"/>
+            <a:ext cx="8865056" cy="3994150"/>
           </a:xfrm>
         </p:spPr>
         <p:txBody>
@@ -5639,356 +8998,367 @@
           </a:bodyPr>
           <a:lstStyle/>
           <a:p>
-            <a:r>
-              <a:rPr lang="pt-BR" sz="4800" b="1" dirty="0">
-                <a:solidFill>
-                  <a:schemeClr val="bg1"/>
-                </a:solidFill>
-              </a:rPr>
-              <a:t>GESTÃO DE INFORMAÇÃO</a:t>
+            <a:pPr marL="0" indent="0">
+              <a:buNone/>
+            </a:pPr>
+            <a:r>
+              <a:rPr lang="pt-BR" sz="2200" b="1" dirty="0">
+                <a:latin typeface="Times New Roman" panose="02020603050405020304" pitchFamily="18" charset="0"/>
+                <a:cs typeface="Times New Roman" panose="02020603050405020304" pitchFamily="18" charset="0"/>
+              </a:rPr>
+              <a:t>Outsourcing de TI</a:t>
+            </a:r>
+            <a:endParaRPr lang="pt-BR" sz="2200" dirty="0">
+              <a:latin typeface="Times New Roman" panose="02020603050405020304" pitchFamily="18" charset="0"/>
+              <a:cs typeface="Times New Roman" panose="02020603050405020304" pitchFamily="18" charset="0"/>
+            </a:endParaRPr>
+          </a:p>
+          <a:p>
+            <a:r>
+              <a:rPr lang="pt-BR" sz="2200" dirty="0">
+                <a:latin typeface="Times New Roman" panose="02020603050405020304" pitchFamily="18" charset="0"/>
+                <a:cs typeface="Times New Roman" panose="02020603050405020304" pitchFamily="18" charset="0"/>
+              </a:rPr>
+              <a:t>Transferência de serviços de </a:t>
+            </a:r>
+            <a:r>
+              <a:rPr lang="pt-BR" sz="2200" b="1" dirty="0">
+                <a:latin typeface="Times New Roman" panose="02020603050405020304" pitchFamily="18" charset="0"/>
+                <a:cs typeface="Times New Roman" panose="02020603050405020304" pitchFamily="18" charset="0"/>
+              </a:rPr>
+              <a:t>TI</a:t>
+            </a:r>
+            <a:r>
+              <a:rPr lang="pt-BR" sz="2200" dirty="0">
+                <a:latin typeface="Times New Roman" panose="02020603050405020304" pitchFamily="18" charset="0"/>
+                <a:cs typeface="Times New Roman" panose="02020603050405020304" pitchFamily="18" charset="0"/>
+              </a:rPr>
+              <a:t> para terceiros</a:t>
+            </a:r>
+          </a:p>
+          <a:p>
+            <a:pPr marL="0" indent="0">
+              <a:buNone/>
+            </a:pPr>
+            <a:endParaRPr lang="pt-BR" sz="2200" dirty="0">
+              <a:latin typeface="Times New Roman" panose="02020603050405020304" pitchFamily="18" charset="0"/>
+              <a:cs typeface="Times New Roman" panose="02020603050405020304" pitchFamily="18" charset="0"/>
+            </a:endParaRPr>
+          </a:p>
+          <a:p>
+            <a:pPr marL="0" indent="0">
+              <a:buNone/>
+            </a:pPr>
+            <a:endParaRPr lang="pt-BR" sz="2200" dirty="0">
+              <a:latin typeface="Times New Roman" panose="02020603050405020304" pitchFamily="18" charset="0"/>
+              <a:cs typeface="Times New Roman" panose="02020603050405020304" pitchFamily="18" charset="0"/>
+            </a:endParaRPr>
+          </a:p>
+          <a:p>
+            <a:pPr marL="0" indent="0">
+              <a:buNone/>
+            </a:pPr>
+            <a:r>
+              <a:rPr lang="pt-BR" sz="2200" b="1" dirty="0">
+                <a:solidFill>
+                  <a:srgbClr val="FF0000"/>
+                </a:solidFill>
+                <a:latin typeface="Times New Roman" panose="02020603050405020304" pitchFamily="18" charset="0"/>
+                <a:cs typeface="Times New Roman" panose="02020603050405020304" pitchFamily="18" charset="0"/>
+              </a:rPr>
+              <a:t>Exemplos</a:t>
+            </a:r>
+          </a:p>
+          <a:p>
+            <a:r>
+              <a:rPr lang="pt-BR" sz="2200" dirty="0">
+                <a:latin typeface="Times New Roman" panose="02020603050405020304" pitchFamily="18" charset="0"/>
+                <a:cs typeface="Times New Roman" panose="02020603050405020304" pitchFamily="18" charset="0"/>
+              </a:rPr>
+              <a:t>Suporte técnico</a:t>
+            </a:r>
+          </a:p>
+          <a:p>
+            <a:r>
+              <a:rPr lang="pt-BR" sz="2200" dirty="0">
+                <a:latin typeface="Times New Roman" panose="02020603050405020304" pitchFamily="18" charset="0"/>
+                <a:cs typeface="Times New Roman" panose="02020603050405020304" pitchFamily="18" charset="0"/>
+              </a:rPr>
+              <a:t>Desenvolvimento de software</a:t>
+            </a:r>
+          </a:p>
+          <a:p>
+            <a:r>
+              <a:rPr lang="pt-BR" sz="2200" dirty="0">
+                <a:latin typeface="Times New Roman" panose="02020603050405020304" pitchFamily="18" charset="0"/>
+                <a:cs typeface="Times New Roman" panose="02020603050405020304" pitchFamily="18" charset="0"/>
+              </a:rPr>
+              <a:t>Infraestrutura em nuvem</a:t>
+            </a:r>
+          </a:p>
+        </p:txBody>
+      </p:sp>
+    </p:spTree>
+    <p:extLst>
+      <p:ext uri="{BB962C8B-B14F-4D97-AF65-F5344CB8AC3E}">
+        <p14:creationId xmlns:p14="http://schemas.microsoft.com/office/powerpoint/2010/main" val="2318999215"/>
+      </p:ext>
+    </p:extLst>
+  </p:cSld>
+  <p:clrMapOvr>
+    <a:masterClrMapping/>
+  </p:clrMapOvr>
+  <p:transition spd="med"/>
+</p:sld>
+</file>
+
+<file path=ppt/slides/slide9.xml><?xml version="1.0" encoding="utf-8"?>
+<p:sld xmlns:a="http://schemas.openxmlformats.org/drawingml/2006/main" xmlns:r="http://schemas.openxmlformats.org/officeDocument/2006/relationships" xmlns:p="http://schemas.openxmlformats.org/presentationml/2006/main">
+  <p:cSld>
+    <p:spTree>
+      <p:nvGrpSpPr>
+        <p:cNvPr id="1" name="">
+          <a:extLst>
+            <a:ext uri="{FF2B5EF4-FFF2-40B4-BE49-F238E27FC236}">
+              <a16:creationId xmlns:a16="http://schemas.microsoft.com/office/drawing/2014/main" id="{A01BE2E7-0A8D-6676-80D0-0B0589FF82E6}"/>
+            </a:ext>
+          </a:extLst>
+        </p:cNvPr>
+        <p:cNvGrpSpPr/>
+        <p:nvPr/>
+      </p:nvGrpSpPr>
+      <p:grpSpPr>
+        <a:xfrm>
+          <a:off x="0" y="0"/>
+          <a:ext cx="0" cy="0"/>
+          <a:chOff x="0" y="0"/>
+          <a:chExt cx="0" cy="0"/>
+        </a:xfrm>
+      </p:grpSpPr>
+      <p:sp>
+        <p:nvSpPr>
+          <p:cNvPr id="6" name="Title 1">
+            <a:extLst>
+              <a:ext uri="{FF2B5EF4-FFF2-40B4-BE49-F238E27FC236}">
+                <a16:creationId xmlns:a16="http://schemas.microsoft.com/office/drawing/2014/main" id="{E7DE7D2F-C89D-6E78-5241-BFAD429599D7}"/>
+              </a:ext>
+            </a:extLst>
+          </p:cNvPr>
+          <p:cNvSpPr>
+            <a:spLocks noGrp="1"/>
+          </p:cNvSpPr>
+          <p:nvPr>
+            <p:ph type="title"/>
+          </p:nvPr>
+        </p:nvSpPr>
+        <p:spPr>
+          <a:xfrm>
+            <a:off x="457200" y="205980"/>
+            <a:ext cx="8229600" cy="857251"/>
+          </a:xfrm>
+        </p:spPr>
+        <p:txBody>
+          <a:bodyPr>
+            <a:normAutofit/>
+          </a:bodyPr>
+          <a:lstStyle/>
+          <a:p>
+            <a:r>
+              <a:rPr lang="en-US" b="1" dirty="0" err="1">
+                <a:solidFill>
+                  <a:srgbClr val="0070C0"/>
+                </a:solidFill>
+              </a:rPr>
+              <a:t>Vantagens</a:t>
+            </a:r>
+            <a:r>
+              <a:rPr lang="en-US" b="1" dirty="0">
+                <a:solidFill>
+                  <a:srgbClr val="0070C0"/>
+                </a:solidFill>
+              </a:rPr>
+              <a:t> e </a:t>
+            </a:r>
+            <a:r>
+              <a:rPr lang="en-US" b="1" dirty="0" err="1">
+                <a:solidFill>
+                  <a:srgbClr val="0070C0"/>
+                </a:solidFill>
+              </a:rPr>
+              <a:t>Riscos</a:t>
+            </a:r>
+            <a:r>
+              <a:rPr lang="en-US" b="1" dirty="0">
+                <a:solidFill>
+                  <a:srgbClr val="0070C0"/>
+                </a:solidFill>
+              </a:rPr>
+              <a:t> da TI</a:t>
             </a:r>
           </a:p>
         </p:txBody>
       </p:sp>
       <p:sp>
         <p:nvSpPr>
-          <p:cNvPr id="6" name="Título 2"/>
-          <p:cNvSpPr txBox="1"/>
-          <p:nvPr/>
+          <p:cNvPr id="8" name="Text Placeholder 2">
+            <a:extLst>
+              <a:ext uri="{FF2B5EF4-FFF2-40B4-BE49-F238E27FC236}">
+                <a16:creationId xmlns:a16="http://schemas.microsoft.com/office/drawing/2014/main" id="{AE7D7139-DF22-6E87-057D-01A7AC61109F}"/>
+              </a:ext>
+            </a:extLst>
+          </p:cNvPr>
+          <p:cNvSpPr>
+            <a:spLocks noGrp="1"/>
+          </p:cNvSpPr>
+          <p:nvPr>
+            <p:ph type="body" sz="half" idx="1"/>
+          </p:nvPr>
         </p:nvSpPr>
         <p:spPr>
           <a:xfrm>
-            <a:off x="975683" y="3866663"/>
-            <a:ext cx="7772400" cy="1102519"/>
+            <a:off x="142865" y="914026"/>
+            <a:ext cx="8865056" cy="4202579"/>
           </a:xfrm>
-          <a:prstGeom prst="rect">
-            <a:avLst/>
-          </a:prstGeom>
-          <a:ln w="12700">
-            <a:miter lim="400000"/>
-          </a:ln>
         </p:spPr>
         <p:txBody>
-          <a:bodyPr lIns="45718" tIns="45718" rIns="45718" bIns="45718" anchor="ctr">
+          <a:bodyPr>
             <a:noAutofit/>
           </a:bodyPr>
-          <a:lstStyle>
-            <a:lvl1pPr marL="0" marR="0" indent="0" algn="ctr" defTabSz="457200" rtl="0" latinLnBrk="0">
-              <a:lnSpc>
-                <a:spcPct val="100000"/>
-              </a:lnSpc>
-              <a:spcBef>
-                <a:spcPts val="0"/>
-              </a:spcBef>
-              <a:spcAft>
-                <a:spcPts val="0"/>
-              </a:spcAft>
-              <a:buClrTx/>
-              <a:buSzTx/>
-              <a:buFontTx/>
+          <a:lstStyle/>
+          <a:p>
+            <a:pPr marL="0" indent="0">
               <a:buNone/>
-              <a:defRPr sz="4400" b="0" i="0" u="none" strike="noStrike" cap="none" spc="0" baseline="0">
-                <a:ln>
-                  <a:noFill/>
-                </a:ln>
-                <a:solidFill>
-                  <a:srgbClr val="000000"/>
-                </a:solidFill>
-                <a:uFillTx/>
-                <a:latin typeface="+mj-lt"/>
-                <a:ea typeface="+mj-ea"/>
-                <a:cs typeface="+mj-cs"/>
-                <a:sym typeface="Calibri"/>
-              </a:defRPr>
-            </a:lvl1pPr>
-            <a:lvl2pPr marL="0" marR="0" indent="0" algn="ctr" defTabSz="457200" rtl="0" latinLnBrk="0">
-              <a:lnSpc>
-                <a:spcPct val="100000"/>
-              </a:lnSpc>
-              <a:spcBef>
-                <a:spcPts val="0"/>
-              </a:spcBef>
-              <a:spcAft>
-                <a:spcPts val="0"/>
-              </a:spcAft>
-              <a:buClrTx/>
-              <a:buSzTx/>
-              <a:buFontTx/>
+            </a:pPr>
+            <a:r>
+              <a:rPr lang="pt-BR" sz="1800" b="1" dirty="0">
+                <a:latin typeface="Times New Roman" panose="02020603050405020304" pitchFamily="18" charset="0"/>
+                <a:cs typeface="Times New Roman" panose="02020603050405020304" pitchFamily="18" charset="0"/>
+              </a:rPr>
+              <a:t>Vantagens</a:t>
+            </a:r>
+          </a:p>
+          <a:p>
+            <a:r>
+              <a:rPr lang="pt-BR" sz="1800" dirty="0">
+                <a:latin typeface="Times New Roman" panose="02020603050405020304" pitchFamily="18" charset="0"/>
+                <a:cs typeface="Times New Roman" panose="02020603050405020304" pitchFamily="18" charset="0"/>
+              </a:rPr>
+              <a:t>Redução de custos</a:t>
+            </a:r>
+          </a:p>
+          <a:p>
+            <a:r>
+              <a:rPr lang="pt-BR" sz="1800" dirty="0">
+                <a:latin typeface="Times New Roman" panose="02020603050405020304" pitchFamily="18" charset="0"/>
+                <a:cs typeface="Times New Roman" panose="02020603050405020304" pitchFamily="18" charset="0"/>
+              </a:rPr>
+              <a:t>Acesso a especialistas</a:t>
+            </a:r>
+          </a:p>
+          <a:p>
+            <a:r>
+              <a:rPr lang="pt-BR" sz="1800" dirty="0">
+                <a:latin typeface="Times New Roman" panose="02020603050405020304" pitchFamily="18" charset="0"/>
+                <a:cs typeface="Times New Roman" panose="02020603050405020304" pitchFamily="18" charset="0"/>
+              </a:rPr>
+              <a:t>Foco no core business</a:t>
+            </a:r>
+          </a:p>
+          <a:p>
+            <a:pPr marL="0" indent="0">
               <a:buNone/>
-              <a:defRPr sz="4400" b="0" i="0" u="none" strike="noStrike" cap="none" spc="0" baseline="0">
-                <a:ln>
-                  <a:noFill/>
-                </a:ln>
-                <a:solidFill>
-                  <a:srgbClr val="000000"/>
-                </a:solidFill>
-                <a:uFillTx/>
-                <a:latin typeface="+mj-lt"/>
-                <a:ea typeface="+mj-ea"/>
-                <a:cs typeface="+mj-cs"/>
-                <a:sym typeface="Calibri"/>
-              </a:defRPr>
-            </a:lvl2pPr>
-            <a:lvl3pPr marL="0" marR="0" indent="0" algn="ctr" defTabSz="457200" rtl="0" latinLnBrk="0">
-              <a:lnSpc>
-                <a:spcPct val="100000"/>
-              </a:lnSpc>
-              <a:spcBef>
-                <a:spcPts val="0"/>
-              </a:spcBef>
-              <a:spcAft>
-                <a:spcPts val="0"/>
-              </a:spcAft>
-              <a:buClrTx/>
-              <a:buSzTx/>
-              <a:buFontTx/>
+            </a:pPr>
+            <a:endParaRPr lang="pt-BR" sz="1800" dirty="0">
+              <a:latin typeface="Times New Roman" panose="02020603050405020304" pitchFamily="18" charset="0"/>
+              <a:cs typeface="Times New Roman" panose="02020603050405020304" pitchFamily="18" charset="0"/>
+            </a:endParaRPr>
+          </a:p>
+          <a:p>
+            <a:pPr marL="0" indent="0">
               <a:buNone/>
-              <a:defRPr sz="4400" b="0" i="0" u="none" strike="noStrike" cap="none" spc="0" baseline="0">
-                <a:ln>
-                  <a:noFill/>
-                </a:ln>
-                <a:solidFill>
-                  <a:srgbClr val="000000"/>
-                </a:solidFill>
-                <a:uFillTx/>
-                <a:latin typeface="+mj-lt"/>
-                <a:ea typeface="+mj-ea"/>
-                <a:cs typeface="+mj-cs"/>
-                <a:sym typeface="Calibri"/>
-              </a:defRPr>
-            </a:lvl3pPr>
-            <a:lvl4pPr marL="0" marR="0" indent="0" algn="ctr" defTabSz="457200" rtl="0" latinLnBrk="0">
-              <a:lnSpc>
-                <a:spcPct val="100000"/>
-              </a:lnSpc>
-              <a:spcBef>
-                <a:spcPts val="0"/>
-              </a:spcBef>
-              <a:spcAft>
-                <a:spcPts val="0"/>
-              </a:spcAft>
-              <a:buClrTx/>
-              <a:buSzTx/>
-              <a:buFontTx/>
+            </a:pPr>
+            <a:r>
+              <a:rPr lang="pt-BR" sz="1800" b="1" dirty="0">
+                <a:solidFill>
+                  <a:srgbClr val="FF0000"/>
+                </a:solidFill>
+                <a:latin typeface="Times New Roman" panose="02020603050405020304" pitchFamily="18" charset="0"/>
+                <a:cs typeface="Times New Roman" panose="02020603050405020304" pitchFamily="18" charset="0"/>
+              </a:rPr>
+              <a:t>Riscos</a:t>
+            </a:r>
+          </a:p>
+          <a:p>
+            <a:r>
+              <a:rPr lang="pt-BR" sz="1800" dirty="0">
+                <a:latin typeface="Times New Roman" panose="02020603050405020304" pitchFamily="18" charset="0"/>
+                <a:cs typeface="Times New Roman" panose="02020603050405020304" pitchFamily="18" charset="0"/>
+              </a:rPr>
+              <a:t>Dependência de fornecedores</a:t>
+            </a:r>
+          </a:p>
+          <a:p>
+            <a:r>
+              <a:rPr lang="pt-BR" sz="1800" dirty="0">
+                <a:latin typeface="Times New Roman" panose="02020603050405020304" pitchFamily="18" charset="0"/>
+                <a:cs typeface="Times New Roman" panose="02020603050405020304" pitchFamily="18" charset="0"/>
+              </a:rPr>
+              <a:t>Problemas de segurança</a:t>
+            </a:r>
+          </a:p>
+          <a:p>
+            <a:r>
+              <a:rPr lang="pt-BR" sz="1800" dirty="0">
+                <a:latin typeface="Times New Roman" panose="02020603050405020304" pitchFamily="18" charset="0"/>
+                <a:cs typeface="Times New Roman" panose="02020603050405020304" pitchFamily="18" charset="0"/>
+              </a:rPr>
+              <a:t>Perda de controle</a:t>
+            </a:r>
+          </a:p>
+          <a:p>
+            <a:pPr marL="0" indent="0">
               <a:buNone/>
-              <a:defRPr sz="4400" b="0" i="0" u="none" strike="noStrike" cap="none" spc="0" baseline="0">
-                <a:ln>
-                  <a:noFill/>
-                </a:ln>
-                <a:solidFill>
-                  <a:srgbClr val="000000"/>
-                </a:solidFill>
-                <a:uFillTx/>
-                <a:latin typeface="+mj-lt"/>
-                <a:ea typeface="+mj-ea"/>
-                <a:cs typeface="+mj-cs"/>
-                <a:sym typeface="Calibri"/>
-              </a:defRPr>
-            </a:lvl4pPr>
-            <a:lvl5pPr marL="0" marR="0" indent="0" algn="ctr" defTabSz="457200" rtl="0" latinLnBrk="0">
-              <a:lnSpc>
-                <a:spcPct val="100000"/>
-              </a:lnSpc>
-              <a:spcBef>
-                <a:spcPts val="0"/>
-              </a:spcBef>
-              <a:spcAft>
-                <a:spcPts val="0"/>
-              </a:spcAft>
-              <a:buClrTx/>
-              <a:buSzTx/>
-              <a:buFontTx/>
+            </a:pPr>
+            <a:endParaRPr lang="pt-BR" sz="1800" dirty="0">
+              <a:latin typeface="Times New Roman" panose="02020603050405020304" pitchFamily="18" charset="0"/>
+              <a:cs typeface="Times New Roman" panose="02020603050405020304" pitchFamily="18" charset="0"/>
+            </a:endParaRPr>
+          </a:p>
+          <a:p>
+            <a:pPr marL="0" indent="0">
               <a:buNone/>
-              <a:defRPr sz="4400" b="0" i="0" u="none" strike="noStrike" cap="none" spc="0" baseline="0">
-                <a:ln>
-                  <a:noFill/>
-                </a:ln>
-                <a:solidFill>
-                  <a:srgbClr val="000000"/>
-                </a:solidFill>
-                <a:uFillTx/>
-                <a:latin typeface="+mj-lt"/>
-                <a:ea typeface="+mj-ea"/>
-                <a:cs typeface="+mj-cs"/>
-                <a:sym typeface="Calibri"/>
-              </a:defRPr>
-            </a:lvl5pPr>
-            <a:lvl6pPr marL="0" marR="0" indent="0" algn="ctr" defTabSz="457200" rtl="0" latinLnBrk="0">
-              <a:lnSpc>
-                <a:spcPct val="100000"/>
-              </a:lnSpc>
-              <a:spcBef>
-                <a:spcPts val="0"/>
-              </a:spcBef>
-              <a:spcAft>
-                <a:spcPts val="0"/>
-              </a:spcAft>
-              <a:buClrTx/>
-              <a:buSzTx/>
-              <a:buFontTx/>
+            </a:pPr>
+            <a:r>
+              <a:rPr lang="pt-BR" sz="1800" b="1" dirty="0">
+                <a:solidFill>
+                  <a:srgbClr val="FF0000"/>
+                </a:solidFill>
+                <a:latin typeface="Times New Roman" panose="02020603050405020304" pitchFamily="18" charset="0"/>
+                <a:cs typeface="Times New Roman" panose="02020603050405020304" pitchFamily="18" charset="0"/>
+              </a:rPr>
+              <a:t>Na prática</a:t>
+            </a:r>
+          </a:p>
+          <a:p>
+            <a:pPr marL="0" indent="0">
               <a:buNone/>
-              <a:defRPr sz="4400" b="0" i="0" u="none" strike="noStrike" cap="none" spc="0" baseline="0">
-                <a:ln>
-                  <a:noFill/>
-                </a:ln>
-                <a:solidFill>
-                  <a:srgbClr val="000000"/>
-                </a:solidFill>
-                <a:uFillTx/>
-                <a:latin typeface="+mj-lt"/>
-                <a:ea typeface="+mj-ea"/>
-                <a:cs typeface="+mj-cs"/>
-                <a:sym typeface="Calibri"/>
-              </a:defRPr>
-            </a:lvl6pPr>
-            <a:lvl7pPr marL="0" marR="0" indent="0" algn="ctr" defTabSz="457200" rtl="0" latinLnBrk="0">
-              <a:lnSpc>
-                <a:spcPct val="100000"/>
-              </a:lnSpc>
-              <a:spcBef>
-                <a:spcPts val="0"/>
-              </a:spcBef>
-              <a:spcAft>
-                <a:spcPts val="0"/>
-              </a:spcAft>
-              <a:buClrTx/>
-              <a:buSzTx/>
-              <a:buFontTx/>
-              <a:buNone/>
-              <a:defRPr sz="4400" b="0" i="0" u="none" strike="noStrike" cap="none" spc="0" baseline="0">
-                <a:ln>
-                  <a:noFill/>
-                </a:ln>
-                <a:solidFill>
-                  <a:srgbClr val="000000"/>
-                </a:solidFill>
-                <a:uFillTx/>
-                <a:latin typeface="+mj-lt"/>
-                <a:ea typeface="+mj-ea"/>
-                <a:cs typeface="+mj-cs"/>
-                <a:sym typeface="Calibri"/>
-              </a:defRPr>
-            </a:lvl7pPr>
-            <a:lvl8pPr marL="0" marR="0" indent="0" algn="ctr" defTabSz="457200" rtl="0" latinLnBrk="0">
-              <a:lnSpc>
-                <a:spcPct val="100000"/>
-              </a:lnSpc>
-              <a:spcBef>
-                <a:spcPts val="0"/>
-              </a:spcBef>
-              <a:spcAft>
-                <a:spcPts val="0"/>
-              </a:spcAft>
-              <a:buClrTx/>
-              <a:buSzTx/>
-              <a:buFontTx/>
-              <a:buNone/>
-              <a:defRPr sz="4400" b="0" i="0" u="none" strike="noStrike" cap="none" spc="0" baseline="0">
-                <a:ln>
-                  <a:noFill/>
-                </a:ln>
-                <a:solidFill>
-                  <a:srgbClr val="000000"/>
-                </a:solidFill>
-                <a:uFillTx/>
-                <a:latin typeface="+mj-lt"/>
-                <a:ea typeface="+mj-ea"/>
-                <a:cs typeface="+mj-cs"/>
-                <a:sym typeface="Calibri"/>
-              </a:defRPr>
-            </a:lvl8pPr>
-            <a:lvl9pPr marL="0" marR="0" indent="0" algn="ctr" defTabSz="457200" rtl="0" latinLnBrk="0">
-              <a:lnSpc>
-                <a:spcPct val="100000"/>
-              </a:lnSpc>
-              <a:spcBef>
-                <a:spcPts val="0"/>
-              </a:spcBef>
-              <a:spcAft>
-                <a:spcPts val="0"/>
-              </a:spcAft>
-              <a:buClrTx/>
-              <a:buSzTx/>
-              <a:buFontTx/>
-              <a:buNone/>
-              <a:defRPr sz="4400" b="0" i="0" u="none" strike="noStrike" cap="none" spc="0" baseline="0">
-                <a:ln>
-                  <a:noFill/>
-                </a:ln>
-                <a:solidFill>
-                  <a:srgbClr val="000000"/>
-                </a:solidFill>
-                <a:uFillTx/>
-                <a:latin typeface="+mj-lt"/>
-                <a:ea typeface="+mj-ea"/>
-                <a:cs typeface="+mj-cs"/>
-                <a:sym typeface="Calibri"/>
-              </a:defRPr>
-            </a:lvl9pPr>
-          </a:lstStyle>
-          <a:p>
-            <a:pPr algn="r" hangingPunct="1"/>
-            <a:r>
-              <a:rPr lang="pt-BR" sz="2000" b="1" dirty="0">
-                <a:solidFill>
-                  <a:schemeClr val="bg1"/>
-                </a:solidFill>
-              </a:rPr>
-              <a:t>Professor </a:t>
-            </a:r>
-            <a:r>
-              <a:rPr lang="pt-BR" sz="2000" b="1">
-                <a:solidFill>
-                  <a:schemeClr val="bg1"/>
-                </a:solidFill>
-              </a:rPr>
-              <a:t>M.Sc</a:t>
-            </a:r>
-            <a:r>
-              <a:rPr lang="pt-BR" sz="2000" b="1" dirty="0">
-                <a:solidFill>
-                  <a:schemeClr val="bg1"/>
-                </a:solidFill>
-              </a:rPr>
-              <a:t>. Heleno Cardoso</a:t>
+            </a:pPr>
+            <a:r>
+              <a:rPr lang="pt-BR" sz="1800" dirty="0">
+                <a:latin typeface="Times New Roman" panose="02020603050405020304" pitchFamily="18" charset="0"/>
+                <a:cs typeface="Times New Roman" panose="02020603050405020304" pitchFamily="18" charset="0"/>
+              </a:rPr>
+              <a:t>	Uso de cloud (AWS, Azure, GCC, etc.).</a:t>
             </a:r>
           </a:p>
         </p:txBody>
       </p:sp>
-      <p:pic>
-        <p:nvPicPr>
-          <p:cNvPr id="2" name="Google Shape;62;p1" descr="Imagem">
-            <a:extLst>
-              <a:ext uri="{FF2B5EF4-FFF2-40B4-BE49-F238E27FC236}">
-                <a16:creationId xmlns:a16="http://schemas.microsoft.com/office/drawing/2014/main" id="{9C895622-2963-024D-634E-EA58F5381D06}"/>
-              </a:ext>
-            </a:extLst>
-          </p:cNvPr>
-          <p:cNvPicPr preferRelativeResize="0"/>
-          <p:nvPr/>
-        </p:nvPicPr>
-        <p:blipFill rotWithShape="1">
-          <a:blip r:embed="rId4">
-            <a:alphaModFix/>
-          </a:blip>
-          <a:srcRect/>
-          <a:stretch/>
-        </p:blipFill>
-        <p:spPr>
-          <a:xfrm>
-            <a:off x="469898" y="343798"/>
-            <a:ext cx="2858518" cy="1338697"/>
-          </a:xfrm>
-          <a:prstGeom prst="rect">
-            <a:avLst/>
-          </a:prstGeom>
-          <a:noFill/>
-          <a:ln>
-            <a:noFill/>
-          </a:ln>
-        </p:spPr>
-      </p:pic>
     </p:spTree>
+    <p:extLst>
+      <p:ext uri="{BB962C8B-B14F-4D97-AF65-F5344CB8AC3E}">
+        <p14:creationId xmlns:p14="http://schemas.microsoft.com/office/powerpoint/2010/main" val="3752907642"/>
+      </p:ext>
+    </p:extLst>
   </p:cSld>
   <p:clrMapOvr>
     <a:masterClrMapping/>
